--- a/output/arryve-pitch.pptx
+++ b/output/arryve-pitch.pptx
@@ -4,6 +4,9 @@
   <p:sldMasterIdLst>
     <p:sldMasterId id="2147483648" r:id="rId1"/>
   </p:sldMasterIdLst>
+  <p:notesMasterIdLst>
+    <p:notesMasterId r:id="rId17"/>
+  </p:notesMasterIdLst>
   <p:sldIdLst>
     <p:sldId id="256" r:id="rId2"/>
     <p:sldId id="257" r:id="rId3"/>
@@ -21,9 +24,6 @@
     <p:sldId id="269" r:id="rId15"/>
     <p:sldId id="270" r:id="rId16"/>
   </p:sldIdLst>
-  <p:notesMasterIdLst>
-    <p:notesMasterId r:id="rId17"/>
-  </p:notesMasterIdLst>
   <p:sldSz cx="12192000" cy="6858000"/>
   <p:notesSz cx="6858000" cy="12192000"/>
   <p:defaultTextStyle>
@@ -118,6 +118,11 @@
       </a:defRPr>
     </a:lvl9pPr>
   </p:defaultTextStyle>
+  <p:extLst>
+    <p:ext uri="{EFAFB233-063F-42B5-8137-9DF3F51BA10A}">
+      <p15:sldGuideLst xmlns:p15="http://schemas.microsoft.com/office/powerpoint/2012/main"/>
+    </p:ext>
+  </p:extLst>
 </p:presentation>
 </file>
 
@@ -143,234 +148,10 @@
           <a:chExt cx="0" cy="0"/>
         </a:xfrm>
       </p:grpSpPr>
-      <p:sp>
-        <p:nvSpPr>
-          <p:cNvPr id="2" name="Header Placeholder 1"/>
-          <p:cNvSpPr>
-            <a:spLocks noGrp="1"/>
-          </p:cNvSpPr>
-          <p:nvPr>
-            <p:ph type="hdr" sz="quarter"/>
-          </p:nvPr>
-        </p:nvSpPr>
-        <p:spPr>
-          <a:xfrm>
-            <a:off x="0" y="0"/>
-            <a:ext cx="2971800" cy="458788"/>
-          </a:xfrm>
-          <a:prstGeom prst="rect">
-            <a:avLst/>
-          </a:prstGeom>
-        </p:spPr>
-        <p:txBody>
-          <a:bodyPr vert="horz" lIns="91440" tIns="45720" rIns="91440" bIns="45720" rtlCol="0"/>
-          <a:lstStyle>
-            <a:lvl1pPr algn="l">
-              <a:defRPr sz="1200"/>
-            </a:lvl1pPr>
-          </a:lstStyle>
-          <a:p>
-            <a:endParaRPr lang="en-US"/>
-          </a:p>
-        </p:txBody>
-      </p:sp>
-      <p:sp>
-        <p:nvSpPr>
-          <p:cNvPr id="3" name="Date Placeholder 2"/>
-          <p:cNvSpPr>
-            <a:spLocks noGrp="1"/>
-          </p:cNvSpPr>
-          <p:nvPr>
-            <p:ph type="dt" idx="1"/>
-          </p:nvPr>
-        </p:nvSpPr>
-        <p:spPr>
-          <a:xfrm>
-            <a:off x="3884613" y="0"/>
-            <a:ext cx="2971800" cy="458788"/>
-          </a:xfrm>
-          <a:prstGeom prst="rect">
-            <a:avLst/>
-          </a:prstGeom>
-        </p:spPr>
-        <p:txBody>
-          <a:bodyPr vert="horz" lIns="91440" tIns="45720" rIns="91440" bIns="45720" rtlCol="0"/>
-          <a:lstStyle>
-            <a:lvl1pPr algn="r">
-              <a:defRPr sz="1200"/>
-            </a:lvl1pPr>
-          </a:lstStyle>
-          <a:p>
-            <a:fld id="{5282F153-3F37-0F45-9E97-73ACFA13230C}" type="datetimeFigureOut">
-              <a:rPr lang="en-US"/>
-              <a:t>7/23/19</a:t>
-            </a:fld>
-            <a:endParaRPr lang="en-US"/>
-          </a:p>
-        </p:txBody>
-      </p:sp>
-      <p:sp>
-        <p:nvSpPr>
-          <p:cNvPr id="4" name="Slide Image Placeholder 3"/>
-          <p:cNvSpPr>
-            <a:spLocks noGrp="1" noRot="1" noChangeAspect="1"/>
-          </p:cNvSpPr>
-          <p:nvPr>
-            <p:ph type="sldImg" idx="2"/>
-          </p:nvPr>
-        </p:nvSpPr>
-        <p:spPr>
-          <a:xfrm>
-            <a:off x="685800" y="1143000"/>
-            <a:ext cx="5486400" cy="3086100"/>
-          </a:xfrm>
-          <a:prstGeom prst="rect">
-            <a:avLst/>
-          </a:prstGeom>
-          <a:noFill/>
-          <a:ln w="12700">
-            <a:solidFill>
-              <a:prstClr val="black"/>
-            </a:solidFill>
-          </a:ln>
-        </p:spPr>
-        <p:txBody>
-          <a:bodyPr vert="horz" lIns="91440" tIns="45720" rIns="91440" bIns="45720" rtlCol="0" anchor="ctr"/>
-          <a:lstStyle/>
-          <a:p>
-            <a:endParaRPr lang="en-US"/>
-          </a:p>
-        </p:txBody>
-      </p:sp>
-      <p:sp>
-        <p:nvSpPr>
-          <p:cNvPr id="5" name="Notes Placeholder 4"/>
-          <p:cNvSpPr>
-            <a:spLocks noGrp="1"/>
-          </p:cNvSpPr>
-          <p:nvPr>
-            <p:ph type="body" sz="quarter" idx="3"/>
-          </p:nvPr>
-        </p:nvSpPr>
-        <p:spPr>
-          <a:xfrm>
-            <a:off x="685800" y="4400550"/>
-            <a:ext cx="5486400" cy="3600450"/>
-          </a:xfrm>
-          <a:prstGeom prst="rect">
-            <a:avLst/>
-          </a:prstGeom>
-        </p:spPr>
-        <p:txBody>
-          <a:bodyPr vert="horz" lIns="91440" tIns="45720" rIns="91440" bIns="45720" rtlCol="0"/>
-          <a:lstStyle/>
-          <a:p>
-            <a:pPr lvl="0"/>
-            <a:r>
-              <a:rPr lang="en-US"/>
-              <a:t>Click to edit Master text styles</a:t>
-            </a:r>
-          </a:p>
-          <a:p>
-            <a:pPr lvl="1"/>
-            <a:r>
-              <a:rPr lang="en-US"/>
-              <a:t>Second level</a:t>
-            </a:r>
-          </a:p>
-          <a:p>
-            <a:pPr lvl="2"/>
-            <a:r>
-              <a:rPr lang="en-US"/>
-              <a:t>Third level</a:t>
-            </a:r>
-          </a:p>
-          <a:p>
-            <a:pPr lvl="3"/>
-            <a:r>
-              <a:rPr lang="en-US"/>
-              <a:t>Fourth level</a:t>
-            </a:r>
-          </a:p>
-          <a:p>
-            <a:pPr lvl="4"/>
-            <a:r>
-              <a:rPr lang="en-US"/>
-              <a:t>Fifth level</a:t>
-            </a:r>
-          </a:p>
-        </p:txBody>
-      </p:sp>
-      <p:sp>
-        <p:nvSpPr>
-          <p:cNvPr id="6" name="Footer Placeholder 5"/>
-          <p:cNvSpPr>
-            <a:spLocks noGrp="1"/>
-          </p:cNvSpPr>
-          <p:nvPr>
-            <p:ph type="ftr" sz="quarter" idx="4"/>
-          </p:nvPr>
-        </p:nvSpPr>
-        <p:spPr>
-          <a:xfrm>
-            <a:off x="0" y="8685213"/>
-            <a:ext cx="2971800" cy="458787"/>
-          </a:xfrm>
-          <a:prstGeom prst="rect">
-            <a:avLst/>
-          </a:prstGeom>
-        </p:spPr>
-        <p:txBody>
-          <a:bodyPr vert="horz" lIns="91440" tIns="45720" rIns="91440" bIns="45720" rtlCol="0" anchor="b"/>
-          <a:lstStyle>
-            <a:lvl1pPr algn="l">
-              <a:defRPr sz="1200"/>
-            </a:lvl1pPr>
-          </a:lstStyle>
-          <a:p>
-            <a:endParaRPr lang="en-US"/>
-          </a:p>
-        </p:txBody>
-      </p:sp>
-      <p:sp>
-        <p:nvSpPr>
-          <p:cNvPr id="7" name="Slide Number Placeholder 6"/>
-          <p:cNvSpPr>
-            <a:spLocks noGrp="1"/>
-          </p:cNvSpPr>
-          <p:nvPr>
-            <p:ph type="sldNum" sz="quarter" idx="5"/>
-          </p:nvPr>
-        </p:nvSpPr>
-        <p:spPr>
-          <a:xfrm>
-            <a:off x="3884613" y="8685213"/>
-            <a:ext cx="2971800" cy="458787"/>
-          </a:xfrm>
-          <a:prstGeom prst="rect">
-            <a:avLst/>
-          </a:prstGeom>
-        </p:spPr>
-        <p:txBody>
-          <a:bodyPr vert="horz" lIns="91440" tIns="45720" rIns="91440" bIns="45720" rtlCol="0" anchor="b"/>
-          <a:lstStyle>
-            <a:lvl1pPr algn="r">
-              <a:defRPr sz="1200"/>
-            </a:lvl1pPr>
-          </a:lstStyle>
-          <a:p>
-            <a:fld id="{CE5E9CC1-C706-0F49-92D6-E571CC5EEA8F}" type="slidenum">
-              <a:rPr lang="en-US"/>
-              <a:t>‹#›</a:t>
-            </a:fld>
-            <a:endParaRPr lang="en-US"/>
-          </a:p>
-        </p:txBody>
-      </p:sp>
     </p:spTree>
     <p:extLst>
       <p:ext uri="{BB962C8B-B14F-4D97-AF65-F5344CB8AC3E}">
-        <p14:creationId xmlns:p14="http://schemas.microsoft.com/office/powerpoint/2010/main" val="1024086991"/>
+        <p14:creationId xmlns:p14="http://schemas.microsoft.com/office/powerpoint/2010/main" val="2599725689"/>
       </p:ext>
     </p:extLst>
   </p:cSld>
@@ -514,10 +295,6 @@
           <a:bodyPr/>
           <a:lstStyle/>
           <a:p>
-            <a:r>
-              <a:rPr lang="en-US" dirty="0"/>
-              <a:t/>
-            </a:r>
             <a:endParaRPr lang="en-US" dirty="0"/>
           </a:p>
         </p:txBody>
@@ -602,10 +379,6 @@
           <a:bodyPr/>
           <a:lstStyle/>
           <a:p>
-            <a:r>
-              <a:rPr lang="en-US" dirty="0"/>
-              <a:t/>
-            </a:r>
             <a:endParaRPr lang="en-US" dirty="0"/>
           </a:p>
         </p:txBody>
@@ -690,10 +463,6 @@
           <a:bodyPr/>
           <a:lstStyle/>
           <a:p>
-            <a:r>
-              <a:rPr lang="en-US" dirty="0"/>
-              <a:t/>
-            </a:r>
             <a:endParaRPr lang="en-US" dirty="0"/>
           </a:p>
         </p:txBody>
@@ -778,10 +547,6 @@
           <a:bodyPr/>
           <a:lstStyle/>
           <a:p>
-            <a:r>
-              <a:rPr lang="en-US" dirty="0"/>
-              <a:t/>
-            </a:r>
             <a:endParaRPr lang="en-US" dirty="0"/>
           </a:p>
         </p:txBody>
@@ -866,10 +631,6 @@
           <a:bodyPr/>
           <a:lstStyle/>
           <a:p>
-            <a:r>
-              <a:rPr lang="en-US" dirty="0"/>
-              <a:t/>
-            </a:r>
             <a:endParaRPr lang="en-US" dirty="0"/>
           </a:p>
         </p:txBody>
@@ -954,10 +715,6 @@
           <a:bodyPr/>
           <a:lstStyle/>
           <a:p>
-            <a:r>
-              <a:rPr lang="en-US" dirty="0"/>
-              <a:t/>
-            </a:r>
             <a:endParaRPr lang="en-US" dirty="0"/>
           </a:p>
         </p:txBody>
@@ -1042,10 +799,6 @@
           <a:bodyPr/>
           <a:lstStyle/>
           <a:p>
-            <a:r>
-              <a:rPr lang="en-US" dirty="0"/>
-              <a:t/>
-            </a:r>
             <a:endParaRPr lang="en-US" dirty="0"/>
           </a:p>
         </p:txBody>
@@ -1130,10 +883,6 @@
           <a:bodyPr/>
           <a:lstStyle/>
           <a:p>
-            <a:r>
-              <a:rPr lang="en-US" dirty="0"/>
-              <a:t/>
-            </a:r>
             <a:endParaRPr lang="en-US" dirty="0"/>
           </a:p>
         </p:txBody>
@@ -1218,10 +967,6 @@
           <a:bodyPr/>
           <a:lstStyle/>
           <a:p>
-            <a:r>
-              <a:rPr lang="en-US" dirty="0"/>
-              <a:t/>
-            </a:r>
             <a:endParaRPr lang="en-US" dirty="0"/>
           </a:p>
         </p:txBody>
@@ -1306,10 +1051,6 @@
           <a:bodyPr/>
           <a:lstStyle/>
           <a:p>
-            <a:r>
-              <a:rPr lang="en-US" dirty="0"/>
-              <a:t/>
-            </a:r>
             <a:endParaRPr lang="en-US" dirty="0"/>
           </a:p>
         </p:txBody>
@@ -1394,10 +1135,6 @@
           <a:bodyPr/>
           <a:lstStyle/>
           <a:p>
-            <a:r>
-              <a:rPr lang="en-US" dirty="0"/>
-              <a:t/>
-            </a:r>
             <a:endParaRPr lang="en-US" dirty="0"/>
           </a:p>
         </p:txBody>
@@ -1482,10 +1219,6 @@
           <a:bodyPr/>
           <a:lstStyle/>
           <a:p>
-            <a:r>
-              <a:rPr lang="en-US" dirty="0"/>
-              <a:t/>
-            </a:r>
             <a:endParaRPr lang="en-US" dirty="0"/>
           </a:p>
         </p:txBody>
@@ -1570,10 +1303,6 @@
           <a:bodyPr/>
           <a:lstStyle/>
           <a:p>
-            <a:r>
-              <a:rPr lang="en-US" dirty="0"/>
-              <a:t/>
-            </a:r>
             <a:endParaRPr lang="en-US" dirty="0"/>
           </a:p>
         </p:txBody>
@@ -1658,10 +1387,6 @@
           <a:bodyPr/>
           <a:lstStyle/>
           <a:p>
-            <a:r>
-              <a:rPr lang="en-US" dirty="0"/>
-              <a:t/>
-            </a:r>
             <a:endParaRPr lang="en-US" dirty="0"/>
           </a:p>
         </p:txBody>
@@ -1746,10 +1471,6 @@
           <a:bodyPr/>
           <a:lstStyle/>
           <a:p>
-            <a:r>
-              <a:rPr lang="en-US" dirty="0"/>
-              <a:t/>
-            </a:r>
             <a:endParaRPr lang="en-US" dirty="0"/>
           </a:p>
         </p:txBody>
@@ -1828,6 +1549,7 @@
         <a:solidFill>
           <a:srgbClr val="FDFBF7"/>
         </a:solidFill>
+        <a:effectLst/>
       </p:bgPr>
     </p:bg>
     <p:spTree>
@@ -1860,6 +1582,7 @@
         <a:solidFill>
           <a:srgbClr val="FFFFFF"/>
         </a:solidFill>
+        <a:effectLst/>
       </p:bgPr>
     </p:bg>
     <p:spTree>
@@ -1892,6 +1615,7 @@
         <a:solidFill>
           <a:srgbClr val="F7F3EC"/>
         </a:solidFill>
+        <a:effectLst/>
       </p:bgPr>
     </p:bg>
     <p:spTree>
@@ -1924,6 +1648,7 @@
         <a:solidFill>
           <a:srgbClr val="03241E"/>
         </a:solidFill>
+        <a:effectLst/>
       </p:bgPr>
     </p:bg>
     <p:spTree>
@@ -1951,6 +1676,11 @@
 <file path=ppt/slideMasters/slideMaster1.xml><?xml version="1.0" encoding="utf-8"?>
 <p:sldMaster xmlns:a="http://schemas.openxmlformats.org/drawingml/2006/main" xmlns:r="http://schemas.openxmlformats.org/officeDocument/2006/relationships" xmlns:p="http://schemas.openxmlformats.org/presentationml/2006/main">
   <p:cSld>
+    <p:bg>
+      <p:bgRef idx="1001">
+        <a:schemeClr val="bg1"/>
+      </p:bgRef>
+    </p:bg>
     <p:spTree>
       <p:nvGrpSpPr>
         <p:cNvPr id="1" name=""/>
@@ -2267,11 +1997,11 @@
           <a:bodyPr wrap="square" rtlCol="0" anchor="ctr"/>
           <a:lstStyle/>
           <a:p>
-            <a:pPr algn="r" indent="0" marL="0">
-              <a:buNone/>
-            </a:pPr>
-            <a:r>
-              <a:rPr lang="en-US" sz="900" spc="300" kern="0" dirty="0">
+            <a:pPr marL="0" indent="0" algn="r">
+              <a:buNone/>
+            </a:pPr>
+            <a:r>
+              <a:rPr lang="en-US" sz="900" kern="0" spc="300" dirty="0">
                 <a:solidFill>
                   <a:srgbClr val="FFFFFF">
                     <a:alpha val="45000"/>
@@ -2311,6 +2041,13 @@
             <a:prstDash val="solid"/>
           </a:ln>
         </p:spPr>
+        <p:txBody>
+          <a:bodyPr/>
+          <a:lstStyle/>
+          <a:p>
+            <a:endParaRPr lang="en-UZ"/>
+          </a:p>
+        </p:txBody>
       </p:sp>
       <p:sp>
         <p:nvSpPr>
@@ -2333,11 +2070,11 @@
           <a:bodyPr wrap="square" rtlCol="0" anchor="ctr"/>
           <a:lstStyle/>
           <a:p>
-            <a:pPr indent="0" marL="0">
-              <a:buNone/>
-            </a:pPr>
-            <a:r>
-              <a:rPr lang="en-US" sz="1000" b="1" spc="400" kern="0" dirty="0">
+            <a:pPr marL="0" indent="0">
+              <a:buNone/>
+            </a:pPr>
+            <a:r>
+              <a:rPr lang="en-US" sz="1000" b="1" kern="0" spc="400" dirty="0">
                 <a:solidFill>
                   <a:srgbClr val="FFFFFF">
                     <a:alpha val="70000"/>
@@ -2355,15 +2092,15 @@
       </p:sp>
       <p:pic>
         <p:nvPicPr>
-          <p:cNvPr id="5" name="Image 0" descr="preencoded.png">    </p:cNvPr>
+          <p:cNvPr id="5" name="Image 0" descr="preencoded.png"/>
           <p:cNvPicPr>
             <a:picLocks noChangeAspect="1"/>
           </p:cNvPicPr>
           <p:nvPr/>
         </p:nvPicPr>
         <p:blipFill>
-          <a:blip r:embed="rId1"/>
-          <a:srcRect l="0" r="0" t="0" b="0"/>
+          <a:blip r:embed="rId3"/>
+          <a:srcRect/>
           <a:stretch/>
         </p:blipFill>
         <p:spPr>
@@ -2397,7 +2134,7 @@
           <a:bodyPr wrap="square" rtlCol="0" anchor="ctr"/>
           <a:lstStyle/>
           <a:p>
-            <a:pPr indent="0" marL="0">
+            <a:pPr marL="0" indent="0">
               <a:buNone/>
             </a:pPr>
             <a:r>
@@ -2413,9 +2150,6 @@
               </a:rPr>
               <a:t>A better arrival starts with the </a:t>
             </a:r>
-            <a:pPr indent="0" marL="0">
-              <a:buNone/>
-            </a:pPr>
             <a:r>
               <a:rPr lang="en-US" sz="3000" i="1" dirty="0">
                 <a:solidFill>
@@ -2432,9 +2166,6 @@
               </a:rPr>
               <a:t>first call</a:t>
             </a:r>
-            <a:pPr indent="0" marL="0">
-              <a:buNone/>
-            </a:pPr>
             <a:r>
               <a:rPr lang="en-US" sz="3000" i="1" dirty="0">
                 <a:solidFill>
@@ -2473,7 +2204,7 @@
           <a:bodyPr wrap="square" rtlCol="0" anchor="ctr"/>
           <a:lstStyle/>
           <a:p>
-            <a:pPr indent="0" marL="0">
+            <a:pPr marL="0" indent="0">
               <a:buNone/>
             </a:pPr>
             <a:r>
@@ -2487,9 +2218,6 @@
               </a:rPr>
               <a:t>Rakhmatjon</a:t>
             </a:r>
-            <a:pPr indent="0" marL="0">
-              <a:buNone/>
-            </a:pPr>
             <a:r>
               <a:rPr lang="en-US" sz="1200" dirty="0">
                 <a:solidFill>
@@ -2503,9 +2231,6 @@
               </a:rPr>
               <a:t>  Founder</a:t>
             </a:r>
-            <a:pPr indent="0" marL="0">
-              <a:buNone/>
-            </a:pPr>
             <a:r>
               <a:rPr lang="en-US" sz="1200" dirty="0">
                 <a:solidFill>
@@ -2519,9 +2244,6 @@
               </a:rPr>
               <a:t>     ·     </a:t>
             </a:r>
-            <a:pPr indent="0" marL="0">
-              <a:buNone/>
-            </a:pPr>
             <a:r>
               <a:rPr lang="en-US" sz="1200" b="1" dirty="0">
                 <a:solidFill>
@@ -2533,9 +2255,6 @@
               </a:rPr>
               <a:t>Nurislombek</a:t>
             </a:r>
-            <a:pPr indent="0" marL="0">
-              <a:buNone/>
-            </a:pPr>
             <a:r>
               <a:rPr lang="en-US" sz="1200" dirty="0">
                 <a:solidFill>
@@ -2549,9 +2268,6 @@
               </a:rPr>
               <a:t>  Technical Co-Founder</a:t>
             </a:r>
-            <a:pPr indent="0" marL="0">
-              <a:buNone/>
-            </a:pPr>
             <a:r>
               <a:rPr lang="en-US" sz="1200" dirty="0">
                 <a:solidFill>
@@ -2565,9 +2281,6 @@
               </a:rPr>
               <a:t>     ·     </a:t>
             </a:r>
-            <a:pPr indent="0" marL="0">
-              <a:buNone/>
-            </a:pPr>
             <a:r>
               <a:rPr lang="en-US" sz="1200" dirty="0">
                 <a:solidFill>
@@ -2631,11 +2344,11 @@
           <a:bodyPr wrap="square" rtlCol="0" anchor="ctr"/>
           <a:lstStyle/>
           <a:p>
-            <a:pPr algn="r" indent="0" marL="0">
-              <a:buNone/>
-            </a:pPr>
-            <a:r>
-              <a:rPr lang="en-US" sz="900" spc="300" kern="0" dirty="0">
+            <a:pPr marL="0" indent="0" algn="r">
+              <a:buNone/>
+            </a:pPr>
+            <a:r>
+              <a:rPr lang="en-US" sz="900" kern="0" spc="300" dirty="0">
                 <a:solidFill>
                   <a:srgbClr val="03241E">
                     <a:alpha val="45000"/>
@@ -2675,6 +2388,13 @@
             <a:prstDash val="solid"/>
           </a:ln>
         </p:spPr>
+        <p:txBody>
+          <a:bodyPr/>
+          <a:lstStyle/>
+          <a:p>
+            <a:endParaRPr lang="en-UZ"/>
+          </a:p>
+        </p:txBody>
       </p:sp>
       <p:sp>
         <p:nvSpPr>
@@ -2684,7 +2404,7 @@
         </p:nvSpPr>
         <p:spPr>
           <a:xfrm>
-            <a:off x="1097280" y="640080"/>
+            <a:off x="1097280" y="618308"/>
             <a:ext cx="5486400" cy="274320"/>
           </a:xfrm>
           <a:prstGeom prst="rect">
@@ -2697,11 +2417,11 @@
           <a:bodyPr wrap="square" rtlCol="0" anchor="ctr"/>
           <a:lstStyle/>
           <a:p>
-            <a:pPr indent="0" marL="0">
-              <a:buNone/>
-            </a:pPr>
-            <a:r>
-              <a:rPr lang="en-US" sz="1000" b="1" spc="400" kern="0" dirty="0">
+            <a:pPr marL="0" indent="0">
+              <a:buNone/>
+            </a:pPr>
+            <a:r>
+              <a:rPr lang="en-US" sz="1000" b="1" kern="0" spc="400" dirty="0">
                 <a:solidFill>
                   <a:srgbClr val="03241E">
                     <a:alpha val="60000"/>
@@ -2738,11 +2458,11 @@
           <a:bodyPr wrap="square" rtlCol="0" anchor="ctr"/>
           <a:lstStyle/>
           <a:p>
-            <a:pPr indent="0" marL="0">
-              <a:buNone/>
-            </a:pPr>
-            <a:r>
-              <a:rPr lang="en-US" sz="3800" spc="-100" kern="0" dirty="0">
+            <a:pPr marL="0" indent="0">
+              <a:buNone/>
+            </a:pPr>
+            <a:r>
+              <a:rPr lang="en-US" sz="3800" kern="0" spc="-100" dirty="0">
                 <a:solidFill>
                   <a:srgbClr val="03241E"/>
                 </a:solidFill>
@@ -2752,11 +2472,8 @@
               </a:rPr>
               <a:t>The category is validated. </a:t>
             </a:r>
-            <a:pPr indent="0" marL="0">
-              <a:buNone/>
-            </a:pPr>
-            <a:r>
-              <a:rPr lang="en-US" sz="3800" i="1" spc="-100" kern="0" dirty="0">
+            <a:r>
+              <a:rPr lang="en-US" sz="3800" i="1" kern="0" spc="-100" dirty="0">
                 <a:solidFill>
                   <a:srgbClr val="03241E"/>
                 </a:solidFill>
@@ -2766,11 +2483,8 @@
               </a:rPr>
               <a:t>Our lane is empty</a:t>
             </a:r>
-            <a:pPr indent="0" marL="0">
-              <a:buNone/>
-            </a:pPr>
-            <a:r>
-              <a:rPr lang="en-US" sz="3800" spc="-100" kern="0" dirty="0">
+            <a:r>
+              <a:rPr lang="en-US" sz="3800" kern="0" spc="-100" dirty="0">
                 <a:solidFill>
                   <a:srgbClr val="03241E"/>
                 </a:solidFill>
@@ -2810,6 +2524,13 @@
             <a:prstDash val="solid"/>
           </a:ln>
         </p:spPr>
+        <p:txBody>
+          <a:bodyPr/>
+          <a:lstStyle/>
+          <a:p>
+            <a:endParaRPr lang="en-UZ"/>
+          </a:p>
+        </p:txBody>
       </p:sp>
       <p:sp>
         <p:nvSpPr>
@@ -2830,6 +2551,13 @@
           </a:solidFill>
           <a:ln/>
         </p:spPr>
+        <p:txBody>
+          <a:bodyPr/>
+          <a:lstStyle/>
+          <a:p>
+            <a:endParaRPr lang="en-UZ"/>
+          </a:p>
+        </p:txBody>
       </p:sp>
       <p:sp>
         <p:nvSpPr>
@@ -2852,11 +2580,11 @@
           <a:bodyPr wrap="square" rtlCol="0" anchor="ctr"/>
           <a:lstStyle/>
           <a:p>
-            <a:pPr indent="0" marL="0">
-              <a:buNone/>
-            </a:pPr>
-            <a:r>
-              <a:rPr lang="en-US" sz="900" b="1" spc="400" kern="0" dirty="0">
+            <a:pPr marL="0" indent="0">
+              <a:buNone/>
+            </a:pPr>
+            <a:r>
+              <a:rPr lang="en-US" sz="900" b="1" kern="0" spc="400" dirty="0">
                 <a:solidFill>
                   <a:srgbClr val="03241E">
                     <a:alpha val="65000"/>
@@ -2893,11 +2621,11 @@
           <a:bodyPr wrap="square" rtlCol="0" anchor="ctr"/>
           <a:lstStyle/>
           <a:p>
-            <a:pPr indent="0" marL="0">
-              <a:buNone/>
-            </a:pPr>
-            <a:r>
-              <a:rPr lang="en-US" sz="900" b="1" spc="400" kern="0" dirty="0">
+            <a:pPr marL="0" indent="0">
+              <a:buNone/>
+            </a:pPr>
+            <a:r>
+              <a:rPr lang="en-US" sz="900" b="1" kern="0" spc="400" dirty="0">
                 <a:solidFill>
                   <a:srgbClr val="03241E">
                     <a:alpha val="65000"/>
@@ -2934,11 +2662,11 @@
           <a:bodyPr wrap="square" rtlCol="0" anchor="ctr"/>
           <a:lstStyle/>
           <a:p>
-            <a:pPr indent="0" marL="0">
-              <a:buNone/>
-            </a:pPr>
-            <a:r>
-              <a:rPr lang="en-US" sz="900" b="1" spc="400" kern="0" dirty="0">
+            <a:pPr marL="0" indent="0">
+              <a:buNone/>
+            </a:pPr>
+            <a:r>
+              <a:rPr lang="en-US" sz="900" b="1" kern="0" spc="400" dirty="0">
                 <a:solidFill>
                   <a:srgbClr val="03241E">
                     <a:alpha val="65000"/>
@@ -2975,7 +2703,7 @@
           <a:bodyPr wrap="square" rtlCol="0" anchor="ctr"/>
           <a:lstStyle/>
           <a:p>
-            <a:pPr indent="0" marL="0">
+            <a:pPr marL="0" indent="0">
               <a:buNone/>
             </a:pPr>
             <a:r>
@@ -3014,7 +2742,7 @@
           <a:bodyPr wrap="square" rtlCol="0" anchor="ctr"/>
           <a:lstStyle/>
           <a:p>
-            <a:pPr indent="0" marL="0">
+            <a:pPr marL="0" indent="0">
               <a:buNone/>
             </a:pPr>
             <a:r>
@@ -3055,7 +2783,7 @@
           <a:bodyPr wrap="square" rtlCol="0" anchor="ctr"/>
           <a:lstStyle/>
           <a:p>
-            <a:pPr indent="0" marL="0">
+            <a:pPr marL="0" indent="0">
               <a:buNone/>
             </a:pPr>
             <a:r>
@@ -3071,9 +2799,6 @@
               </a:rPr>
               <a:t>Text, not voice. Their </a:t>
             </a:r>
-            <a:pPr indent="0" marL="0">
-              <a:buNone/>
-            </a:pPr>
             <a:r>
               <a:rPr lang="en-US" sz="1050" b="1" dirty="0">
                 <a:solidFill>
@@ -3087,9 +2812,6 @@
               </a:rPr>
               <a:t>~$500M valuation</a:t>
             </a:r>
-            <a:pPr indent="0" marL="0">
-              <a:buNone/>
-            </a:pPr>
             <a:r>
               <a:rPr lang="en-US" sz="1050" dirty="0">
                 <a:solidFill>
@@ -3129,6 +2851,13 @@
             <a:prstDash val="solid"/>
           </a:ln>
         </p:spPr>
+        <p:txBody>
+          <a:bodyPr/>
+          <a:lstStyle/>
+          <a:p>
+            <a:endParaRPr lang="en-UZ"/>
+          </a:p>
+        </p:txBody>
       </p:sp>
       <p:sp>
         <p:nvSpPr>
@@ -3151,7 +2880,7 @@
           <a:bodyPr wrap="square" rtlCol="0" anchor="ctr"/>
           <a:lstStyle/>
           <a:p>
-            <a:pPr indent="0" marL="0">
+            <a:pPr marL="0" indent="0">
               <a:buNone/>
             </a:pPr>
             <a:r>
@@ -3190,7 +2919,7 @@
           <a:bodyPr wrap="square" rtlCol="0" anchor="ctr"/>
           <a:lstStyle/>
           <a:p>
-            <a:pPr indent="0" marL="0">
+            <a:pPr marL="0" indent="0">
               <a:buNone/>
             </a:pPr>
             <a:r>
@@ -3231,7 +2960,7 @@
           <a:bodyPr wrap="square" rtlCol="0" anchor="ctr"/>
           <a:lstStyle/>
           <a:p>
-            <a:pPr indent="0" marL="0">
+            <a:pPr marL="0" indent="0">
               <a:buNone/>
             </a:pPr>
             <a:r>
@@ -3273,6 +3002,13 @@
             <a:prstDash val="solid"/>
           </a:ln>
         </p:spPr>
+        <p:txBody>
+          <a:bodyPr/>
+          <a:lstStyle/>
+          <a:p>
+            <a:endParaRPr lang="en-UZ"/>
+          </a:p>
+        </p:txBody>
       </p:sp>
       <p:sp>
         <p:nvSpPr>
@@ -3295,7 +3031,7 @@
           <a:bodyPr wrap="square" rtlCol="0" anchor="ctr"/>
           <a:lstStyle/>
           <a:p>
-            <a:pPr indent="0" marL="0">
+            <a:pPr marL="0" indent="0">
               <a:buNone/>
             </a:pPr>
             <a:r>
@@ -3334,7 +3070,7 @@
           <a:bodyPr wrap="square" rtlCol="0" anchor="ctr"/>
           <a:lstStyle/>
           <a:p>
-            <a:pPr indent="0" marL="0">
+            <a:pPr marL="0" indent="0">
               <a:buNone/>
             </a:pPr>
             <a:r>
@@ -3375,7 +3111,7 @@
           <a:bodyPr wrap="square" rtlCol="0" anchor="ctr"/>
           <a:lstStyle/>
           <a:p>
-            <a:pPr indent="0" marL="0">
+            <a:pPr marL="0" indent="0">
               <a:buNone/>
             </a:pPr>
             <a:r>
@@ -3391,9 +3127,6 @@
               </a:rPr>
               <a:t>Expensive, slow, don't capture bookings. </a:t>
             </a:r>
-            <a:pPr indent="0" marL="0">
-              <a:buNone/>
-            </a:pPr>
             <a:r>
               <a:rPr lang="en-US" sz="1050" b="1" dirty="0">
                 <a:solidFill>
@@ -3433,6 +3166,13 @@
             <a:prstDash val="solid"/>
           </a:ln>
         </p:spPr>
+        <p:txBody>
+          <a:bodyPr/>
+          <a:lstStyle/>
+          <a:p>
+            <a:endParaRPr lang="en-UZ"/>
+          </a:p>
+        </p:txBody>
       </p:sp>
       <p:sp>
         <p:nvSpPr>
@@ -3455,7 +3195,7 @@
           <a:bodyPr wrap="square" rtlCol="0" anchor="ctr"/>
           <a:lstStyle/>
           <a:p>
-            <a:pPr indent="0" marL="0">
+            <a:pPr marL="0" indent="0">
               <a:buNone/>
             </a:pPr>
             <a:r>
@@ -3494,7 +3234,7 @@
           <a:bodyPr wrap="square" rtlCol="0" anchor="ctr"/>
           <a:lstStyle/>
           <a:p>
-            <a:pPr indent="0" marL="0">
+            <a:pPr marL="0" indent="0">
               <a:buNone/>
             </a:pPr>
             <a:r>
@@ -3535,7 +3275,7 @@
           <a:bodyPr wrap="square" rtlCol="0" anchor="ctr"/>
           <a:lstStyle/>
           <a:p>
-            <a:pPr indent="0" marL="0">
+            <a:pPr marL="0" indent="0">
               <a:buNone/>
             </a:pPr>
             <a:r>
@@ -3577,6 +3317,13 @@
             <a:prstDash val="solid"/>
           </a:ln>
         </p:spPr>
+        <p:txBody>
+          <a:bodyPr/>
+          <a:lstStyle/>
+          <a:p>
+            <a:endParaRPr lang="en-UZ"/>
+          </a:p>
+        </p:txBody>
       </p:sp>
       <p:sp>
         <p:nvSpPr>
@@ -3597,18 +3344,25 @@
           </a:solidFill>
           <a:ln/>
         </p:spPr>
+        <p:txBody>
+          <a:bodyPr/>
+          <a:lstStyle/>
+          <a:p>
+            <a:endParaRPr lang="en-UZ"/>
+          </a:p>
+        </p:txBody>
       </p:sp>
       <p:pic>
         <p:nvPicPr>
-          <p:cNvPr id="28" name="Image 0" descr="preencoded.png">    </p:cNvPr>
+          <p:cNvPr id="28" name="Image 0" descr="preencoded.png"/>
           <p:cNvPicPr>
             <a:picLocks noChangeAspect="1"/>
           </p:cNvPicPr>
           <p:nvPr/>
         </p:nvPicPr>
         <p:blipFill>
-          <a:blip r:embed="rId1"/>
-          <a:srcRect l="0" r="0" t="0" b="0"/>
+          <a:blip r:embed="rId3"/>
+          <a:srcRect/>
           <a:stretch/>
         </p:blipFill>
         <p:spPr>
@@ -3642,7 +3396,7 @@
           <a:bodyPr wrap="square" rtlCol="0" anchor="ctr"/>
           <a:lstStyle/>
           <a:p>
-            <a:pPr indent="0" marL="0">
+            <a:pPr marL="0" indent="0">
               <a:buNone/>
             </a:pPr>
             <a:r>
@@ -3683,7 +3437,7 @@
           <a:bodyPr wrap="square" rtlCol="0" anchor="ctr"/>
           <a:lstStyle/>
           <a:p>
-            <a:pPr indent="0" marL="0">
+            <a:pPr marL="0" indent="0">
               <a:buNone/>
             </a:pPr>
             <a:r>
@@ -3752,11 +3506,11 @@
           <a:bodyPr wrap="square" rtlCol="0" anchor="ctr"/>
           <a:lstStyle/>
           <a:p>
-            <a:pPr algn="r" indent="0" marL="0">
-              <a:buNone/>
-            </a:pPr>
-            <a:r>
-              <a:rPr lang="en-US" sz="900" spc="300" kern="0" dirty="0">
+            <a:pPr marL="0" indent="0" algn="r">
+              <a:buNone/>
+            </a:pPr>
+            <a:r>
+              <a:rPr lang="en-US" sz="900" kern="0" spc="300" dirty="0">
                 <a:solidFill>
                   <a:srgbClr val="FFFFFF">
                     <a:alpha val="45000"/>
@@ -3796,6 +3550,13 @@
             <a:prstDash val="solid"/>
           </a:ln>
         </p:spPr>
+        <p:txBody>
+          <a:bodyPr/>
+          <a:lstStyle/>
+          <a:p>
+            <a:endParaRPr lang="en-UZ"/>
+          </a:p>
+        </p:txBody>
       </p:sp>
       <p:sp>
         <p:nvSpPr>
@@ -3805,7 +3566,7 @@
         </p:nvSpPr>
         <p:spPr>
           <a:xfrm>
-            <a:off x="1097280" y="640080"/>
+            <a:off x="1097280" y="618308"/>
             <a:ext cx="5486400" cy="274320"/>
           </a:xfrm>
           <a:prstGeom prst="rect">
@@ -3818,11 +3579,11 @@
           <a:bodyPr wrap="square" rtlCol="0" anchor="ctr"/>
           <a:lstStyle/>
           <a:p>
-            <a:pPr indent="0" marL="0">
-              <a:buNone/>
-            </a:pPr>
-            <a:r>
-              <a:rPr lang="en-US" sz="1000" b="1" spc="400" kern="0" dirty="0">
+            <a:pPr marL="0" indent="0">
+              <a:buNone/>
+            </a:pPr>
+            <a:r>
+              <a:rPr lang="en-US" sz="1000" b="1" kern="0" spc="400" dirty="0">
                 <a:solidFill>
                   <a:srgbClr val="FFFFFF">
                     <a:alpha val="70000"/>
@@ -3859,11 +3620,11 @@
           <a:bodyPr wrap="square" rtlCol="0" anchor="ctr"/>
           <a:lstStyle/>
           <a:p>
-            <a:pPr indent="0" marL="0">
-              <a:buNone/>
-            </a:pPr>
-            <a:r>
-              <a:rPr lang="en-US" sz="4000" spc="-100" kern="0" dirty="0">
+            <a:pPr marL="0" indent="0">
+              <a:buNone/>
+            </a:pPr>
+            <a:r>
+              <a:rPr lang="en-US" sz="4000" kern="0" spc="-100" dirty="0">
                 <a:solidFill>
                   <a:srgbClr val="FDFBF7"/>
                 </a:solidFill>
@@ -3873,11 +3634,8 @@
               </a:rPr>
               <a:t>Early signal from the </a:t>
             </a:r>
-            <a:pPr indent="0" marL="0">
-              <a:buNone/>
-            </a:pPr>
-            <a:r>
-              <a:rPr lang="en-US" sz="4000" i="1" spc="-100" kern="0" dirty="0">
+            <a:r>
+              <a:rPr lang="en-US" sz="4000" i="1" kern="0" spc="-100" dirty="0">
                 <a:solidFill>
                   <a:srgbClr val="FDFBF7"/>
                 </a:solidFill>
@@ -3887,11 +3645,8 @@
               </a:rPr>
               <a:t>real world</a:t>
             </a:r>
-            <a:pPr indent="0" marL="0">
-              <a:buNone/>
-            </a:pPr>
-            <a:r>
-              <a:rPr lang="en-US" sz="4000" spc="-100" kern="0" dirty="0">
+            <a:r>
+              <a:rPr lang="en-US" sz="4000" kern="0" spc="-100" dirty="0">
                 <a:solidFill>
                   <a:srgbClr val="FDFBF7"/>
                 </a:solidFill>
@@ -3929,6 +3684,13 @@
             <a:prstDash val="solid"/>
           </a:ln>
         </p:spPr>
+        <p:txBody>
+          <a:bodyPr/>
+          <a:lstStyle/>
+          <a:p>
+            <a:endParaRPr lang="en-UZ"/>
+          </a:p>
+        </p:txBody>
       </p:sp>
       <p:sp>
         <p:nvSpPr>
@@ -3951,11 +3713,11 @@
           <a:bodyPr wrap="square" rtlCol="0" anchor="ctr"/>
           <a:lstStyle/>
           <a:p>
-            <a:pPr indent="0" marL="0">
-              <a:buNone/>
-            </a:pPr>
-            <a:r>
-              <a:rPr lang="en-US" sz="5600" spc="-300" kern="0" dirty="0">
+            <a:pPr marL="0" indent="0">
+              <a:buNone/>
+            </a:pPr>
+            <a:r>
+              <a:rPr lang="en-US" sz="5600" kern="0" spc="-300" dirty="0">
                 <a:solidFill>
                   <a:srgbClr val="FDFBF7"/>
                 </a:solidFill>
@@ -3990,11 +3752,11 @@
           <a:bodyPr wrap="square" rtlCol="0" anchor="ctr"/>
           <a:lstStyle/>
           <a:p>
-            <a:pPr indent="0" marL="0">
-              <a:buNone/>
-            </a:pPr>
-            <a:r>
-              <a:rPr lang="en-US" sz="900" b="1" spc="400" kern="0" dirty="0">
+            <a:pPr marL="0" indent="0">
+              <a:buNone/>
+            </a:pPr>
+            <a:r>
+              <a:rPr lang="en-US" sz="900" b="1" kern="0" spc="400" dirty="0">
                 <a:solidFill>
                   <a:srgbClr val="FDFBF7">
                     <a:alpha val="65000"/>
@@ -4034,6 +3796,13 @@
             <a:prstDash val="solid"/>
           </a:ln>
         </p:spPr>
+        <p:txBody>
+          <a:bodyPr/>
+          <a:lstStyle/>
+          <a:p>
+            <a:endParaRPr lang="en-UZ"/>
+          </a:p>
+        </p:txBody>
       </p:sp>
       <p:sp>
         <p:nvSpPr>
@@ -4056,11 +3825,11 @@
           <a:bodyPr wrap="square" rtlCol="0" anchor="ctr"/>
           <a:lstStyle/>
           <a:p>
-            <a:pPr indent="0" marL="0">
-              <a:buNone/>
-            </a:pPr>
-            <a:r>
-              <a:rPr lang="en-US" sz="5600" spc="-300" kern="0" dirty="0">
+            <a:pPr marL="0" indent="0">
+              <a:buNone/>
+            </a:pPr>
+            <a:r>
+              <a:rPr lang="en-US" sz="5600" kern="0" spc="-300" dirty="0">
                 <a:solidFill>
                   <a:srgbClr val="FDFBF7"/>
                 </a:solidFill>
@@ -4095,11 +3864,11 @@
           <a:bodyPr wrap="square" rtlCol="0" anchor="ctr"/>
           <a:lstStyle/>
           <a:p>
-            <a:pPr indent="0" marL="0">
-              <a:buNone/>
-            </a:pPr>
-            <a:r>
-              <a:rPr lang="en-US" sz="900" b="1" spc="400" kern="0" dirty="0">
+            <a:pPr marL="0" indent="0">
+              <a:buNone/>
+            </a:pPr>
+            <a:r>
+              <a:rPr lang="en-US" sz="900" b="1" kern="0" spc="400" dirty="0">
                 <a:solidFill>
                   <a:srgbClr val="FDFBF7">
                     <a:alpha val="65000"/>
@@ -4139,6 +3908,13 @@
             <a:prstDash val="solid"/>
           </a:ln>
         </p:spPr>
+        <p:txBody>
+          <a:bodyPr/>
+          <a:lstStyle/>
+          <a:p>
+            <a:endParaRPr lang="en-UZ"/>
+          </a:p>
+        </p:txBody>
       </p:sp>
       <p:sp>
         <p:nvSpPr>
@@ -4161,11 +3937,11 @@
           <a:bodyPr wrap="square" rtlCol="0" anchor="ctr"/>
           <a:lstStyle/>
           <a:p>
-            <a:pPr indent="0" marL="0">
-              <a:buNone/>
-            </a:pPr>
-            <a:r>
-              <a:rPr lang="en-US" sz="5600" spc="-300" kern="0" dirty="0">
+            <a:pPr marL="0" indent="0">
+              <a:buNone/>
+            </a:pPr>
+            <a:r>
+              <a:rPr lang="en-US" sz="5600" kern="0" spc="-300" dirty="0">
                 <a:solidFill>
                   <a:srgbClr val="FDFBF7"/>
                 </a:solidFill>
@@ -4200,11 +3976,11 @@
           <a:bodyPr wrap="square" rtlCol="0" anchor="ctr"/>
           <a:lstStyle/>
           <a:p>
-            <a:pPr indent="0" marL="0">
-              <a:buNone/>
-            </a:pPr>
-            <a:r>
-              <a:rPr lang="en-US" sz="900" b="1" spc="400" kern="0" dirty="0">
+            <a:pPr marL="0" indent="0">
+              <a:buNone/>
+            </a:pPr>
+            <a:r>
+              <a:rPr lang="en-US" sz="900" b="1" kern="0" spc="400" dirty="0">
                 <a:solidFill>
                   <a:srgbClr val="FDFBF7">
                     <a:alpha val="65000"/>
@@ -4244,6 +4020,13 @@
             <a:prstDash val="solid"/>
           </a:ln>
         </p:spPr>
+        <p:txBody>
+          <a:bodyPr/>
+          <a:lstStyle/>
+          <a:p>
+            <a:endParaRPr lang="en-UZ"/>
+          </a:p>
+        </p:txBody>
       </p:sp>
       <p:sp>
         <p:nvSpPr>
@@ -4266,11 +4049,11 @@
           <a:bodyPr wrap="square" rtlCol="0" anchor="ctr"/>
           <a:lstStyle/>
           <a:p>
-            <a:pPr indent="0" marL="0">
-              <a:buNone/>
-            </a:pPr>
-            <a:r>
-              <a:rPr lang="en-US" sz="5600" spc="-300" kern="0" dirty="0">
+            <a:pPr marL="0" indent="0">
+              <a:buNone/>
+            </a:pPr>
+            <a:r>
+              <a:rPr lang="en-US" sz="5600" kern="0" spc="-300" dirty="0">
                 <a:solidFill>
                   <a:srgbClr val="FDFBF7"/>
                 </a:solidFill>
@@ -4305,11 +4088,11 @@
           <a:bodyPr wrap="square" rtlCol="0" anchor="ctr"/>
           <a:lstStyle/>
           <a:p>
-            <a:pPr indent="0" marL="0">
-              <a:buNone/>
-            </a:pPr>
-            <a:r>
-              <a:rPr lang="en-US" sz="900" b="1" spc="400" kern="0" dirty="0">
+            <a:pPr marL="0" indent="0">
+              <a:buNone/>
+            </a:pPr>
+            <a:r>
+              <a:rPr lang="en-US" sz="900" b="1" kern="0" spc="400" dirty="0">
                 <a:solidFill>
                   <a:srgbClr val="FDFBF7">
                     <a:alpha val="65000"/>
@@ -4355,6 +4138,13 @@
             <a:prstDash val="solid"/>
           </a:ln>
         </p:spPr>
+        <p:txBody>
+          <a:bodyPr/>
+          <a:lstStyle/>
+          <a:p>
+            <a:endParaRPr lang="en-UZ"/>
+          </a:p>
+        </p:txBody>
       </p:sp>
       <p:sp>
         <p:nvSpPr>
@@ -4377,7 +4167,7 @@
           <a:bodyPr wrap="square" rtlCol="0" anchor="ctr"/>
           <a:lstStyle/>
           <a:p>
-            <a:pPr indent="0" marL="0">
+            <a:pPr marL="0" indent="0">
               <a:buNone/>
             </a:pPr>
             <a:r>
@@ -4416,7 +4206,7 @@
           <a:bodyPr wrap="square" rtlCol="0" anchor="ctr"/>
           <a:lstStyle/>
           <a:p>
-            <a:pPr indent="0" marL="0">
+            <a:pPr marL="0" indent="0">
               <a:buNone/>
             </a:pPr>
             <a:r>
@@ -4482,11 +4272,11 @@
           <a:bodyPr wrap="square" rtlCol="0" anchor="ctr"/>
           <a:lstStyle/>
           <a:p>
-            <a:pPr algn="r" indent="0" marL="0">
-              <a:buNone/>
-            </a:pPr>
-            <a:r>
-              <a:rPr lang="en-US" sz="900" spc="300" kern="0" dirty="0">
+            <a:pPr marL="0" indent="0" algn="r">
+              <a:buNone/>
+            </a:pPr>
+            <a:r>
+              <a:rPr lang="en-US" sz="900" kern="0" spc="300" dirty="0">
                 <a:solidFill>
                   <a:srgbClr val="03241E">
                     <a:alpha val="45000"/>
@@ -4526,6 +4316,13 @@
             <a:prstDash val="solid"/>
           </a:ln>
         </p:spPr>
+        <p:txBody>
+          <a:bodyPr/>
+          <a:lstStyle/>
+          <a:p>
+            <a:endParaRPr lang="en-UZ"/>
+          </a:p>
+        </p:txBody>
       </p:sp>
       <p:sp>
         <p:nvSpPr>
@@ -4535,7 +4332,7 @@
         </p:nvSpPr>
         <p:spPr>
           <a:xfrm>
-            <a:off x="1097280" y="640080"/>
+            <a:off x="1097280" y="618308"/>
             <a:ext cx="5486400" cy="274320"/>
           </a:xfrm>
           <a:prstGeom prst="rect">
@@ -4548,11 +4345,11 @@
           <a:bodyPr wrap="square" rtlCol="0" anchor="ctr"/>
           <a:lstStyle/>
           <a:p>
-            <a:pPr indent="0" marL="0">
-              <a:buNone/>
-            </a:pPr>
-            <a:r>
-              <a:rPr lang="en-US" sz="1000" b="1" spc="400" kern="0" dirty="0">
+            <a:pPr marL="0" indent="0">
+              <a:buNone/>
+            </a:pPr>
+            <a:r>
+              <a:rPr lang="en-US" sz="1000" b="1" kern="0" spc="400" dirty="0">
                 <a:solidFill>
                   <a:srgbClr val="03241E">
                     <a:alpha val="60000"/>
@@ -4589,11 +4386,11 @@
           <a:bodyPr wrap="square" rtlCol="0" anchor="ctr"/>
           <a:lstStyle/>
           <a:p>
-            <a:pPr indent="0" marL="0">
-              <a:buNone/>
-            </a:pPr>
-            <a:r>
-              <a:rPr lang="en-US" sz="4000" spc="-100" kern="0" dirty="0">
+            <a:pPr marL="0" indent="0">
+              <a:buNone/>
+            </a:pPr>
+            <a:r>
+              <a:rPr lang="en-US" sz="4000" kern="0" spc="-100" dirty="0">
                 <a:solidFill>
                   <a:srgbClr val="03241E"/>
                 </a:solidFill>
@@ -4603,11 +4400,8 @@
               </a:rPr>
               <a:t>Built by people who've been </a:t>
             </a:r>
-            <a:pPr indent="0" marL="0">
-              <a:buNone/>
-            </a:pPr>
-            <a:r>
-              <a:rPr lang="en-US" sz="4000" i="1" spc="-100" kern="0" dirty="0">
+            <a:r>
+              <a:rPr lang="en-US" sz="4000" i="1" kern="0" spc="-100" dirty="0">
                 <a:solidFill>
                   <a:srgbClr val="03241E"/>
                 </a:solidFill>
@@ -4617,11 +4411,8 @@
               </a:rPr>
               <a:t>on the line</a:t>
             </a:r>
-            <a:pPr indent="0" marL="0">
-              <a:buNone/>
-            </a:pPr>
-            <a:r>
-              <a:rPr lang="en-US" sz="4000" spc="-100" kern="0" dirty="0">
+            <a:r>
+              <a:rPr lang="en-US" sz="4000" kern="0" spc="-100" dirty="0">
                 <a:solidFill>
                   <a:srgbClr val="03241E"/>
                 </a:solidFill>
@@ -4661,6 +4452,13 @@
             <a:prstDash val="solid"/>
           </a:ln>
         </p:spPr>
+        <p:txBody>
+          <a:bodyPr/>
+          <a:lstStyle/>
+          <a:p>
+            <a:endParaRPr lang="en-UZ"/>
+          </a:p>
+        </p:txBody>
       </p:sp>
       <p:sp>
         <p:nvSpPr>
@@ -4681,6 +4479,13 @@
           </a:solidFill>
           <a:ln/>
         </p:spPr>
+        <p:txBody>
+          <a:bodyPr/>
+          <a:lstStyle/>
+          <a:p>
+            <a:endParaRPr lang="en-UZ"/>
+          </a:p>
+        </p:txBody>
       </p:sp>
       <p:sp>
         <p:nvSpPr>
@@ -4703,7 +4508,7 @@
           <a:bodyPr wrap="square" rtlCol="0" anchor="ctr"/>
           <a:lstStyle/>
           <a:p>
-            <a:pPr algn="ctr" indent="0" marL="0">
+            <a:pPr marL="0" indent="0" algn="ctr">
               <a:buNone/>
             </a:pPr>
             <a:r>
@@ -4742,7 +4547,7 @@
           <a:bodyPr wrap="square" rtlCol="0" anchor="ctr"/>
           <a:lstStyle/>
           <a:p>
-            <a:pPr indent="0" marL="0">
+            <a:pPr marL="0" indent="0">
               <a:buNone/>
             </a:pPr>
             <a:r>
@@ -4781,11 +4586,11 @@
           <a:bodyPr wrap="square" rtlCol="0" anchor="ctr"/>
           <a:lstStyle/>
           <a:p>
-            <a:pPr indent="0" marL="0">
-              <a:buNone/>
-            </a:pPr>
-            <a:r>
-              <a:rPr lang="en-US" sz="1000" b="1" spc="400" kern="0" dirty="0">
+            <a:pPr marL="0" indent="0">
+              <a:buNone/>
+            </a:pPr>
+            <a:r>
+              <a:rPr lang="en-US" sz="1000" b="1" kern="0" spc="400" dirty="0">
                 <a:solidFill>
                   <a:srgbClr val="03241E">
                     <a:alpha val="55000"/>
@@ -4822,7 +4627,7 @@
           <a:bodyPr wrap="square" rtlCol="0" anchor="t"/>
           <a:lstStyle/>
           <a:p>
-            <a:pPr indent="0" marL="0">
+            <a:pPr marL="0" indent="0">
               <a:buNone/>
             </a:pPr>
             <a:r>
@@ -4866,6 +4671,13 @@
             <a:prstDash val="solid"/>
           </a:ln>
         </p:spPr>
+        <p:txBody>
+          <a:bodyPr/>
+          <a:lstStyle/>
+          <a:p>
+            <a:endParaRPr lang="en-UZ"/>
+          </a:p>
+        </p:txBody>
       </p:sp>
       <p:sp>
         <p:nvSpPr>
@@ -4886,6 +4698,13 @@
           </a:solidFill>
           <a:ln/>
         </p:spPr>
+        <p:txBody>
+          <a:bodyPr/>
+          <a:lstStyle/>
+          <a:p>
+            <a:endParaRPr lang="en-UZ"/>
+          </a:p>
+        </p:txBody>
       </p:sp>
       <p:sp>
         <p:nvSpPr>
@@ -4908,7 +4727,7 @@
           <a:bodyPr wrap="square" rtlCol="0" anchor="ctr"/>
           <a:lstStyle/>
           <a:p>
-            <a:pPr algn="ctr" indent="0" marL="0">
+            <a:pPr marL="0" indent="0" algn="ctr">
               <a:buNone/>
             </a:pPr>
             <a:r>
@@ -4947,7 +4766,7 @@
           <a:bodyPr wrap="square" rtlCol="0" anchor="ctr"/>
           <a:lstStyle/>
           <a:p>
-            <a:pPr indent="0" marL="0">
+            <a:pPr marL="0" indent="0">
               <a:buNone/>
             </a:pPr>
             <a:r>
@@ -4986,11 +4805,11 @@
           <a:bodyPr wrap="square" rtlCol="0" anchor="ctr"/>
           <a:lstStyle/>
           <a:p>
-            <a:pPr indent="0" marL="0">
-              <a:buNone/>
-            </a:pPr>
-            <a:r>
-              <a:rPr lang="en-US" sz="1000" b="1" spc="400" kern="0" dirty="0">
+            <a:pPr marL="0" indent="0">
+              <a:buNone/>
+            </a:pPr>
+            <a:r>
+              <a:rPr lang="en-US" sz="1000" b="1" kern="0" spc="400" dirty="0">
                 <a:solidFill>
                   <a:srgbClr val="03241E">
                     <a:alpha val="55000"/>
@@ -5027,7 +4846,7 @@
           <a:bodyPr wrap="square" rtlCol="0" anchor="t"/>
           <a:lstStyle/>
           <a:p>
-            <a:pPr indent="0" marL="0">
+            <a:pPr marL="0" indent="0">
               <a:buNone/>
             </a:pPr>
             <a:r>
@@ -5069,6 +4888,13 @@
             <a:prstDash val="solid"/>
           </a:ln>
         </p:spPr>
+        <p:txBody>
+          <a:bodyPr/>
+          <a:lstStyle/>
+          <a:p>
+            <a:endParaRPr lang="en-UZ"/>
+          </a:p>
+        </p:txBody>
       </p:sp>
       <p:sp>
         <p:nvSpPr>
@@ -5091,11 +4917,11 @@
           <a:bodyPr wrap="square" rtlCol="0" anchor="ctr"/>
           <a:lstStyle/>
           <a:p>
-            <a:pPr indent="0" marL="0">
-              <a:buNone/>
-            </a:pPr>
-            <a:r>
-              <a:rPr lang="en-US" sz="1000" b="1" spc="400" kern="0" dirty="0">
+            <a:pPr marL="0" indent="0">
+              <a:buNone/>
+            </a:pPr>
+            <a:r>
+              <a:rPr lang="en-US" sz="1000" b="1" kern="0" spc="400" dirty="0">
                 <a:solidFill>
                   <a:srgbClr val="03241E">
                     <a:alpha val="60000"/>
@@ -5132,7 +4958,7 @@
           <a:bodyPr wrap="square" rtlCol="0" anchor="ctr"/>
           <a:lstStyle/>
           <a:p>
-            <a:pPr indent="0" marL="0">
+            <a:pPr marL="0" indent="0">
               <a:buNone/>
             </a:pPr>
             <a:r>
@@ -5196,11 +5022,11 @@
           <a:bodyPr wrap="square" rtlCol="0" anchor="ctr"/>
           <a:lstStyle/>
           <a:p>
-            <a:pPr algn="r" indent="0" marL="0">
-              <a:buNone/>
-            </a:pPr>
-            <a:r>
-              <a:rPr lang="en-US" sz="900" spc="300" kern="0" dirty="0">
+            <a:pPr marL="0" indent="0" algn="r">
+              <a:buNone/>
+            </a:pPr>
+            <a:r>
+              <a:rPr lang="en-US" sz="900" kern="0" spc="300" dirty="0">
                 <a:solidFill>
                   <a:srgbClr val="03241E">
                     <a:alpha val="45000"/>
@@ -5240,6 +5066,13 @@
             <a:prstDash val="solid"/>
           </a:ln>
         </p:spPr>
+        <p:txBody>
+          <a:bodyPr/>
+          <a:lstStyle/>
+          <a:p>
+            <a:endParaRPr lang="en-UZ"/>
+          </a:p>
+        </p:txBody>
       </p:sp>
       <p:sp>
         <p:nvSpPr>
@@ -5249,7 +5082,7 @@
         </p:nvSpPr>
         <p:spPr>
           <a:xfrm>
-            <a:off x="1097280" y="640080"/>
+            <a:off x="1097280" y="618308"/>
             <a:ext cx="5486400" cy="274320"/>
           </a:xfrm>
           <a:prstGeom prst="rect">
@@ -5262,11 +5095,11 @@
           <a:bodyPr wrap="square" rtlCol="0" anchor="ctr"/>
           <a:lstStyle/>
           <a:p>
-            <a:pPr indent="0" marL="0">
-              <a:buNone/>
-            </a:pPr>
-            <a:r>
-              <a:rPr lang="en-US" sz="1000" b="1" spc="400" kern="0" dirty="0">
+            <a:pPr marL="0" indent="0">
+              <a:buNone/>
+            </a:pPr>
+            <a:r>
+              <a:rPr lang="en-US" sz="1000" b="1" kern="0" spc="400" dirty="0">
                 <a:solidFill>
                   <a:srgbClr val="03241E">
                     <a:alpha val="60000"/>
@@ -5303,11 +5136,11 @@
           <a:bodyPr wrap="square" rtlCol="0" anchor="ctr"/>
           <a:lstStyle/>
           <a:p>
-            <a:pPr indent="0" marL="0">
-              <a:buNone/>
-            </a:pPr>
-            <a:r>
-              <a:rPr lang="en-US" sz="3800" spc="-100" kern="0" dirty="0">
+            <a:pPr marL="0" indent="0">
+              <a:buNone/>
+            </a:pPr>
+            <a:r>
+              <a:rPr lang="en-US" sz="3800" kern="0" spc="-100" dirty="0">
                 <a:solidFill>
                   <a:srgbClr val="03241E"/>
                 </a:solidFill>
@@ -5317,11 +5150,8 @@
               </a:rPr>
               <a:t>Land, repeat, </a:t>
             </a:r>
-            <a:pPr indent="0" marL="0">
-              <a:buNone/>
-            </a:pPr>
-            <a:r>
-              <a:rPr lang="en-US" sz="3800" i="1" spc="-100" kern="0" dirty="0">
+            <a:r>
+              <a:rPr lang="en-US" sz="3800" i="1" kern="0" spc="-100" dirty="0">
                 <a:solidFill>
                   <a:srgbClr val="03241E"/>
                 </a:solidFill>
@@ -5331,11 +5161,8 @@
               </a:rPr>
               <a:t>expand</a:t>
             </a:r>
-            <a:pPr indent="0" marL="0">
-              <a:buNone/>
-            </a:pPr>
-            <a:r>
-              <a:rPr lang="en-US" sz="3800" spc="-100" kern="0" dirty="0">
+            <a:r>
+              <a:rPr lang="en-US" sz="3800" kern="0" spc="-100" dirty="0">
                 <a:solidFill>
                   <a:srgbClr val="03241E"/>
                 </a:solidFill>
@@ -5375,6 +5202,13 @@
             <a:prstDash val="solid"/>
           </a:ln>
         </p:spPr>
+        <p:txBody>
+          <a:bodyPr/>
+          <a:lstStyle/>
+          <a:p>
+            <a:endParaRPr lang="en-UZ"/>
+          </a:p>
+        </p:txBody>
       </p:sp>
       <p:sp>
         <p:nvSpPr>
@@ -5397,7 +5231,7 @@
           <a:bodyPr wrap="square" rtlCol="0" anchor="ctr"/>
           <a:lstStyle/>
           <a:p>
-            <a:pPr indent="0" marL="0">
+            <a:pPr marL="0" indent="0">
               <a:buNone/>
             </a:pPr>
             <a:r>
@@ -5438,11 +5272,11 @@
           <a:bodyPr wrap="square" rtlCol="0" anchor="ctr"/>
           <a:lstStyle/>
           <a:p>
-            <a:pPr algn="r" indent="0" marL="0">
-              <a:buNone/>
-            </a:pPr>
-            <a:r>
-              <a:rPr lang="en-US" sz="900" b="1" spc="400" kern="0" dirty="0">
+            <a:pPr marL="0" indent="0" algn="r">
+              <a:buNone/>
+            </a:pPr>
+            <a:r>
+              <a:rPr lang="en-US" sz="900" b="1" kern="0" spc="400" dirty="0">
                 <a:solidFill>
                   <a:srgbClr val="03241E">
                     <a:alpha val="60000"/>
@@ -5479,7 +5313,7 @@
           <a:bodyPr wrap="square" rtlCol="0" anchor="ctr"/>
           <a:lstStyle/>
           <a:p>
-            <a:pPr indent="0" marL="0">
+            <a:pPr marL="0" indent="0">
               <a:buNone/>
             </a:pPr>
             <a:r>
@@ -5516,6 +5350,13 @@
           </a:solidFill>
           <a:ln/>
         </p:spPr>
+        <p:txBody>
+          <a:bodyPr/>
+          <a:lstStyle/>
+          <a:p>
+            <a:endParaRPr lang="en-UZ"/>
+          </a:p>
+        </p:txBody>
       </p:sp>
       <p:sp>
         <p:nvSpPr>
@@ -5538,7 +5379,7 @@
           <a:bodyPr wrap="square" rtlCol="0" anchor="ctr"/>
           <a:lstStyle/>
           <a:p>
-            <a:pPr indent="0" marL="0">
+            <a:pPr marL="0" indent="0">
               <a:buNone/>
             </a:pPr>
             <a:r>
@@ -5575,6 +5416,13 @@
           </a:solidFill>
           <a:ln/>
         </p:spPr>
+        <p:txBody>
+          <a:bodyPr/>
+          <a:lstStyle/>
+          <a:p>
+            <a:endParaRPr lang="en-UZ"/>
+          </a:p>
+        </p:txBody>
       </p:sp>
       <p:sp>
         <p:nvSpPr>
@@ -5597,7 +5445,7 @@
           <a:bodyPr wrap="square" rtlCol="0" anchor="ctr"/>
           <a:lstStyle/>
           <a:p>
-            <a:pPr indent="0" marL="0">
+            <a:pPr marL="0" indent="0">
               <a:buNone/>
             </a:pPr>
             <a:r>
@@ -5634,6 +5482,13 @@
           </a:solidFill>
           <a:ln/>
         </p:spPr>
+        <p:txBody>
+          <a:bodyPr/>
+          <a:lstStyle/>
+          <a:p>
+            <a:endParaRPr lang="en-UZ"/>
+          </a:p>
+        </p:txBody>
       </p:sp>
       <p:sp>
         <p:nvSpPr>
@@ -5656,7 +5511,7 @@
           <a:bodyPr wrap="square" rtlCol="0" anchor="ctr"/>
           <a:lstStyle/>
           <a:p>
-            <a:pPr indent="0" marL="0">
+            <a:pPr marL="0" indent="0">
               <a:buNone/>
             </a:pPr>
             <a:r>
@@ -5700,6 +5555,13 @@
             <a:prstDash val="solid"/>
           </a:ln>
         </p:spPr>
+        <p:txBody>
+          <a:bodyPr/>
+          <a:lstStyle/>
+          <a:p>
+            <a:endParaRPr lang="en-UZ"/>
+          </a:p>
+        </p:txBody>
       </p:sp>
       <p:sp>
         <p:nvSpPr>
@@ -5722,7 +5584,7 @@
           <a:bodyPr wrap="square" rtlCol="0" anchor="ctr"/>
           <a:lstStyle/>
           <a:p>
-            <a:pPr indent="0" marL="0">
+            <a:pPr marL="0" indent="0">
               <a:buNone/>
             </a:pPr>
             <a:r>
@@ -5763,11 +5625,11 @@
           <a:bodyPr wrap="square" rtlCol="0" anchor="ctr"/>
           <a:lstStyle/>
           <a:p>
-            <a:pPr algn="r" indent="0" marL="0">
-              <a:buNone/>
-            </a:pPr>
-            <a:r>
-              <a:rPr lang="en-US" sz="900" b="1" spc="400" kern="0" dirty="0">
+            <a:pPr marL="0" indent="0" algn="r">
+              <a:buNone/>
+            </a:pPr>
+            <a:r>
+              <a:rPr lang="en-US" sz="900" b="1" kern="0" spc="400" dirty="0">
                 <a:solidFill>
                   <a:srgbClr val="03241E">
                     <a:alpha val="60000"/>
@@ -5804,7 +5666,7 @@
           <a:bodyPr wrap="square" rtlCol="0" anchor="ctr"/>
           <a:lstStyle/>
           <a:p>
-            <a:pPr indent="0" marL="0">
+            <a:pPr marL="0" indent="0">
               <a:buNone/>
             </a:pPr>
             <a:r>
@@ -5841,6 +5703,13 @@
           </a:solidFill>
           <a:ln/>
         </p:spPr>
+        <p:txBody>
+          <a:bodyPr/>
+          <a:lstStyle/>
+          <a:p>
+            <a:endParaRPr lang="en-UZ"/>
+          </a:p>
+        </p:txBody>
       </p:sp>
       <p:sp>
         <p:nvSpPr>
@@ -5863,7 +5732,7 @@
           <a:bodyPr wrap="square" rtlCol="0" anchor="ctr"/>
           <a:lstStyle/>
           <a:p>
-            <a:pPr indent="0" marL="0">
+            <a:pPr marL="0" indent="0">
               <a:buNone/>
             </a:pPr>
             <a:r>
@@ -5900,6 +5769,13 @@
           </a:solidFill>
           <a:ln/>
         </p:spPr>
+        <p:txBody>
+          <a:bodyPr/>
+          <a:lstStyle/>
+          <a:p>
+            <a:endParaRPr lang="en-UZ"/>
+          </a:p>
+        </p:txBody>
       </p:sp>
       <p:sp>
         <p:nvSpPr>
@@ -5922,7 +5798,7 @@
           <a:bodyPr wrap="square" rtlCol="0" anchor="ctr"/>
           <a:lstStyle/>
           <a:p>
-            <a:pPr indent="0" marL="0">
+            <a:pPr marL="0" indent="0">
               <a:buNone/>
             </a:pPr>
             <a:r>
@@ -5959,6 +5835,13 @@
           </a:solidFill>
           <a:ln/>
         </p:spPr>
+        <p:txBody>
+          <a:bodyPr/>
+          <a:lstStyle/>
+          <a:p>
+            <a:endParaRPr lang="en-UZ"/>
+          </a:p>
+        </p:txBody>
       </p:sp>
       <p:sp>
         <p:nvSpPr>
@@ -5981,7 +5864,7 @@
           <a:bodyPr wrap="square" rtlCol="0" anchor="ctr"/>
           <a:lstStyle/>
           <a:p>
-            <a:pPr indent="0" marL="0">
+            <a:pPr marL="0" indent="0">
               <a:buNone/>
             </a:pPr>
             <a:r>
@@ -6025,6 +5908,13 @@
             <a:prstDash val="solid"/>
           </a:ln>
         </p:spPr>
+        <p:txBody>
+          <a:bodyPr/>
+          <a:lstStyle/>
+          <a:p>
+            <a:endParaRPr lang="en-UZ"/>
+          </a:p>
+        </p:txBody>
       </p:sp>
       <p:sp>
         <p:nvSpPr>
@@ -6047,7 +5937,7 @@
           <a:bodyPr wrap="square" rtlCol="0" anchor="ctr"/>
           <a:lstStyle/>
           <a:p>
-            <a:pPr indent="0" marL="0">
+            <a:pPr marL="0" indent="0">
               <a:buNone/>
             </a:pPr>
             <a:r>
@@ -6088,11 +5978,11 @@
           <a:bodyPr wrap="square" rtlCol="0" anchor="ctr"/>
           <a:lstStyle/>
           <a:p>
-            <a:pPr algn="r" indent="0" marL="0">
-              <a:buNone/>
-            </a:pPr>
-            <a:r>
-              <a:rPr lang="en-US" sz="900" b="1" spc="400" kern="0" dirty="0">
+            <a:pPr marL="0" indent="0" algn="r">
+              <a:buNone/>
+            </a:pPr>
+            <a:r>
+              <a:rPr lang="en-US" sz="900" b="1" kern="0" spc="400" dirty="0">
                 <a:solidFill>
                   <a:srgbClr val="03241E">
                     <a:alpha val="60000"/>
@@ -6129,7 +6019,7 @@
           <a:bodyPr wrap="square" rtlCol="0" anchor="ctr"/>
           <a:lstStyle/>
           <a:p>
-            <a:pPr indent="0" marL="0">
+            <a:pPr marL="0" indent="0">
               <a:buNone/>
             </a:pPr>
             <a:r>
@@ -6166,6 +6056,13 @@
           </a:solidFill>
           <a:ln/>
         </p:spPr>
+        <p:txBody>
+          <a:bodyPr/>
+          <a:lstStyle/>
+          <a:p>
+            <a:endParaRPr lang="en-UZ"/>
+          </a:p>
+        </p:txBody>
       </p:sp>
       <p:sp>
         <p:nvSpPr>
@@ -6188,7 +6085,7 @@
           <a:bodyPr wrap="square" rtlCol="0" anchor="ctr"/>
           <a:lstStyle/>
           <a:p>
-            <a:pPr indent="0" marL="0">
+            <a:pPr marL="0" indent="0">
               <a:buNone/>
             </a:pPr>
             <a:r>
@@ -6225,6 +6122,13 @@
           </a:solidFill>
           <a:ln/>
         </p:spPr>
+        <p:txBody>
+          <a:bodyPr/>
+          <a:lstStyle/>
+          <a:p>
+            <a:endParaRPr lang="en-UZ"/>
+          </a:p>
+        </p:txBody>
       </p:sp>
       <p:sp>
         <p:nvSpPr>
@@ -6247,7 +6151,7 @@
           <a:bodyPr wrap="square" rtlCol="0" anchor="ctr"/>
           <a:lstStyle/>
           <a:p>
-            <a:pPr indent="0" marL="0">
+            <a:pPr marL="0" indent="0">
               <a:buNone/>
             </a:pPr>
             <a:r>
@@ -6284,6 +6188,13 @@
           </a:solidFill>
           <a:ln/>
         </p:spPr>
+        <p:txBody>
+          <a:bodyPr/>
+          <a:lstStyle/>
+          <a:p>
+            <a:endParaRPr lang="en-UZ"/>
+          </a:p>
+        </p:txBody>
       </p:sp>
       <p:sp>
         <p:nvSpPr>
@@ -6306,7 +6217,7 @@
           <a:bodyPr wrap="square" rtlCol="0" anchor="ctr"/>
           <a:lstStyle/>
           <a:p>
-            <a:pPr indent="0" marL="0">
+            <a:pPr marL="0" indent="0">
               <a:buNone/>
             </a:pPr>
             <a:r>
@@ -6348,6 +6259,13 @@
             <a:prstDash val="solid"/>
           </a:ln>
         </p:spPr>
+        <p:txBody>
+          <a:bodyPr/>
+          <a:lstStyle/>
+          <a:p>
+            <a:endParaRPr lang="en-UZ"/>
+          </a:p>
+        </p:txBody>
       </p:sp>
       <p:sp>
         <p:nvSpPr>
@@ -6370,11 +6288,11 @@
           <a:bodyPr wrap="square" rtlCol="0" anchor="ctr"/>
           <a:lstStyle/>
           <a:p>
-            <a:pPr indent="0" marL="0">
-              <a:buNone/>
-            </a:pPr>
-            <a:r>
-              <a:rPr lang="en-US" sz="1000" b="1" spc="400" kern="0" dirty="0">
+            <a:pPr marL="0" indent="0">
+              <a:buNone/>
+            </a:pPr>
+            <a:r>
+              <a:rPr lang="en-US" sz="1000" b="1" kern="0" spc="400" dirty="0">
                 <a:solidFill>
                   <a:srgbClr val="03241E">
                     <a:alpha val="60000"/>
@@ -6411,11 +6329,11 @@
           <a:bodyPr wrap="square" rtlCol="0" anchor="ctr"/>
           <a:lstStyle/>
           <a:p>
-            <a:pPr indent="0" marL="0">
-              <a:buNone/>
-            </a:pPr>
-            <a:r>
-              <a:rPr lang="en-US" sz="3000" spc="-100" kern="0" dirty="0">
+            <a:pPr marL="0" indent="0">
+              <a:buNone/>
+            </a:pPr>
+            <a:r>
+              <a:rPr lang="en-US" sz="3000" kern="0" spc="-100" dirty="0">
                 <a:solidFill>
                   <a:srgbClr val="03241E"/>
                 </a:solidFill>
@@ -6450,7 +6368,7 @@
           <a:bodyPr wrap="square" rtlCol="0" anchor="ctr"/>
           <a:lstStyle/>
           <a:p>
-            <a:pPr indent="0" marL="0">
+            <a:pPr marL="0" indent="0">
               <a:buNone/>
             </a:pPr>
             <a:r>
@@ -6489,7 +6407,7 @@
           <a:bodyPr wrap="square" rtlCol="0" anchor="ctr"/>
           <a:lstStyle/>
           <a:p>
-            <a:pPr indent="0" marL="0">
+            <a:pPr marL="0" indent="0">
               <a:buNone/>
             </a:pPr>
             <a:r>
@@ -6528,11 +6446,11 @@
           <a:bodyPr wrap="square" rtlCol="0" anchor="ctr"/>
           <a:lstStyle/>
           <a:p>
-            <a:pPr indent="0" marL="0">
-              <a:buNone/>
-            </a:pPr>
-            <a:r>
-              <a:rPr lang="en-US" sz="3000" spc="-100" kern="0" dirty="0">
+            <a:pPr marL="0" indent="0">
+              <a:buNone/>
+            </a:pPr>
+            <a:r>
+              <a:rPr lang="en-US" sz="3000" kern="0" spc="-100" dirty="0">
                 <a:solidFill>
                   <a:srgbClr val="03241E"/>
                 </a:solidFill>
@@ -6567,7 +6485,7 @@
           <a:bodyPr wrap="square" rtlCol="0" anchor="ctr"/>
           <a:lstStyle/>
           <a:p>
-            <a:pPr indent="0" marL="0">
+            <a:pPr marL="0" indent="0">
               <a:buNone/>
             </a:pPr>
             <a:r>
@@ -6606,7 +6524,7 @@
           <a:bodyPr wrap="square" rtlCol="0" anchor="ctr"/>
           <a:lstStyle/>
           <a:p>
-            <a:pPr indent="0" marL="0">
+            <a:pPr marL="0" indent="0">
               <a:buNone/>
             </a:pPr>
             <a:r>
@@ -6645,11 +6563,11 @@
           <a:bodyPr wrap="square" rtlCol="0" anchor="ctr"/>
           <a:lstStyle/>
           <a:p>
-            <a:pPr indent="0" marL="0">
-              <a:buNone/>
-            </a:pPr>
-            <a:r>
-              <a:rPr lang="en-US" sz="3000" spc="-100" kern="0" dirty="0">
+            <a:pPr marL="0" indent="0">
+              <a:buNone/>
+            </a:pPr>
+            <a:r>
+              <a:rPr lang="en-US" sz="3000" kern="0" spc="-100" dirty="0">
                 <a:solidFill>
                   <a:srgbClr val="03241E"/>
                 </a:solidFill>
@@ -6684,7 +6602,7 @@
           <a:bodyPr wrap="square" rtlCol="0" anchor="ctr"/>
           <a:lstStyle/>
           <a:p>
-            <a:pPr indent="0" marL="0">
+            <a:pPr marL="0" indent="0">
               <a:buNone/>
             </a:pPr>
             <a:r>
@@ -6723,7 +6641,7 @@
           <a:bodyPr wrap="square" rtlCol="0" anchor="ctr"/>
           <a:lstStyle/>
           <a:p>
-            <a:pPr indent="0" marL="0">
+            <a:pPr marL="0" indent="0">
               <a:buNone/>
             </a:pPr>
             <a:r>
@@ -6762,11 +6680,11 @@
           <a:bodyPr wrap="square" rtlCol="0" anchor="ctr"/>
           <a:lstStyle/>
           <a:p>
-            <a:pPr indent="0" marL="0">
-              <a:buNone/>
-            </a:pPr>
-            <a:r>
-              <a:rPr lang="en-US" sz="3000" spc="-100" kern="0" dirty="0">
+            <a:pPr marL="0" indent="0">
+              <a:buNone/>
+            </a:pPr>
+            <a:r>
+              <a:rPr lang="en-US" sz="3000" kern="0" spc="-100" dirty="0">
                 <a:solidFill>
                   <a:srgbClr val="03241E"/>
                 </a:solidFill>
@@ -6801,7 +6719,7 @@
           <a:bodyPr wrap="square" rtlCol="0" anchor="ctr"/>
           <a:lstStyle/>
           <a:p>
-            <a:pPr indent="0" marL="0">
+            <a:pPr marL="0" indent="0">
               <a:buNone/>
             </a:pPr>
             <a:r>
@@ -6840,7 +6758,7 @@
           <a:bodyPr wrap="square" rtlCol="0" anchor="ctr"/>
           <a:lstStyle/>
           <a:p>
-            <a:pPr indent="0" marL="0">
+            <a:pPr marL="0" indent="0">
               <a:buNone/>
             </a:pPr>
             <a:r>
@@ -6904,11 +6822,11 @@
           <a:bodyPr wrap="square" rtlCol="0" anchor="ctr"/>
           <a:lstStyle/>
           <a:p>
-            <a:pPr algn="r" indent="0" marL="0">
-              <a:buNone/>
-            </a:pPr>
-            <a:r>
-              <a:rPr lang="en-US" sz="900" spc="300" kern="0" dirty="0">
+            <a:pPr marL="0" indent="0" algn="r">
+              <a:buNone/>
+            </a:pPr>
+            <a:r>
+              <a:rPr lang="en-US" sz="900" kern="0" spc="300" dirty="0">
                 <a:solidFill>
                   <a:srgbClr val="03241E">
                     <a:alpha val="45000"/>
@@ -6948,6 +6866,13 @@
             <a:prstDash val="solid"/>
           </a:ln>
         </p:spPr>
+        <p:txBody>
+          <a:bodyPr/>
+          <a:lstStyle/>
+          <a:p>
+            <a:endParaRPr lang="en-UZ"/>
+          </a:p>
+        </p:txBody>
       </p:sp>
       <p:sp>
         <p:nvSpPr>
@@ -6957,7 +6882,7 @@
         </p:nvSpPr>
         <p:spPr>
           <a:xfrm>
-            <a:off x="1097280" y="640080"/>
+            <a:off x="1097280" y="618308"/>
             <a:ext cx="5486400" cy="274320"/>
           </a:xfrm>
           <a:prstGeom prst="rect">
@@ -6970,11 +6895,11 @@
           <a:bodyPr wrap="square" rtlCol="0" anchor="ctr"/>
           <a:lstStyle/>
           <a:p>
-            <a:pPr indent="0" marL="0">
-              <a:buNone/>
-            </a:pPr>
-            <a:r>
-              <a:rPr lang="en-US" sz="1000" b="1" spc="400" kern="0" dirty="0">
+            <a:pPr marL="0" indent="0">
+              <a:buNone/>
+            </a:pPr>
+            <a:r>
+              <a:rPr lang="en-US" sz="1000" b="1" kern="0" spc="400" dirty="0">
                 <a:solidFill>
                   <a:srgbClr val="03241E">
                     <a:alpha val="60000"/>
@@ -7011,11 +6936,11 @@
           <a:bodyPr wrap="square" rtlCol="0" anchor="ctr"/>
           <a:lstStyle/>
           <a:p>
-            <a:pPr indent="0" marL="0">
-              <a:buNone/>
-            </a:pPr>
-            <a:r>
-              <a:rPr lang="en-US" sz="3800" spc="-100" kern="0" dirty="0">
+            <a:pPr marL="0" indent="0">
+              <a:buNone/>
+            </a:pPr>
+            <a:r>
+              <a:rPr lang="en-US" sz="3800" kern="0" spc="-100" dirty="0">
                 <a:solidFill>
                   <a:srgbClr val="03241E"/>
                 </a:solidFill>
@@ -7025,11 +6950,8 @@
               </a:rPr>
               <a:t>Multiple credible buyers. </a:t>
             </a:r>
-            <a:pPr indent="0" marL="0">
-              <a:buNone/>
-            </a:pPr>
-            <a:r>
-              <a:rPr lang="en-US" sz="3800" i="1" spc="-100" kern="0" dirty="0">
+            <a:r>
+              <a:rPr lang="en-US" sz="3800" i="1" kern="0" spc="-100" dirty="0">
                 <a:solidFill>
                   <a:srgbClr val="03241E"/>
                 </a:solidFill>
@@ -7039,11 +6961,8 @@
               </a:rPr>
               <a:t>3–5 year window</a:t>
             </a:r>
-            <a:pPr indent="0" marL="0">
-              <a:buNone/>
-            </a:pPr>
-            <a:r>
-              <a:rPr lang="en-US" sz="3800" spc="-100" kern="0" dirty="0">
+            <a:r>
+              <a:rPr lang="en-US" sz="3800" kern="0" spc="-100" dirty="0">
                 <a:solidFill>
                   <a:srgbClr val="03241E"/>
                 </a:solidFill>
@@ -7083,6 +7002,13 @@
             <a:prstDash val="solid"/>
           </a:ln>
         </p:spPr>
+        <p:txBody>
+          <a:bodyPr/>
+          <a:lstStyle/>
+          <a:p>
+            <a:endParaRPr lang="en-UZ"/>
+          </a:p>
+        </p:txBody>
       </p:sp>
       <p:sp>
         <p:nvSpPr>
@@ -7110,18 +7036,25 @@
             <a:prstDash val="solid"/>
           </a:ln>
         </p:spPr>
+        <p:txBody>
+          <a:bodyPr/>
+          <a:lstStyle/>
+          <a:p>
+            <a:endParaRPr lang="en-UZ"/>
+          </a:p>
+        </p:txBody>
       </p:sp>
       <p:pic>
         <p:nvPicPr>
-          <p:cNvPr id="8" name="Image 0" descr="preencoded.png">    </p:cNvPr>
+          <p:cNvPr id="8" name="Image 0" descr="preencoded.png"/>
           <p:cNvPicPr>
             <a:picLocks noChangeAspect="1"/>
           </p:cNvPicPr>
           <p:nvPr/>
         </p:nvPicPr>
         <p:blipFill>
-          <a:blip r:embed="rId1"/>
-          <a:srcRect l="0" r="0" t="0" b="0"/>
+          <a:blip r:embed="rId3"/>
+          <a:srcRect/>
           <a:stretch/>
         </p:blipFill>
         <p:spPr>
@@ -7155,7 +7088,7 @@
           <a:bodyPr wrap="square" rtlCol="0" anchor="ctr"/>
           <a:lstStyle/>
           <a:p>
-            <a:pPr indent="0" marL="0">
+            <a:pPr marL="0" indent="0">
               <a:buNone/>
             </a:pPr>
             <a:r>
@@ -7194,7 +7127,7 @@
           <a:bodyPr wrap="square" rtlCol="0" anchor="t"/>
           <a:lstStyle/>
           <a:p>
-            <a:pPr indent="0" marL="0">
+            <a:pPr marL="0" indent="0">
               <a:buNone/>
             </a:pPr>
             <a:r>
@@ -7238,6 +7171,13 @@
             <a:prstDash val="solid"/>
           </a:ln>
         </p:spPr>
+        <p:txBody>
+          <a:bodyPr/>
+          <a:lstStyle/>
+          <a:p>
+            <a:endParaRPr lang="en-UZ"/>
+          </a:p>
+        </p:txBody>
       </p:sp>
       <p:sp>
         <p:nvSpPr>
@@ -7265,18 +7205,25 @@
             <a:prstDash val="solid"/>
           </a:ln>
         </p:spPr>
+        <p:txBody>
+          <a:bodyPr/>
+          <a:lstStyle/>
+          <a:p>
+            <a:endParaRPr lang="en-UZ"/>
+          </a:p>
+        </p:txBody>
       </p:sp>
       <p:pic>
         <p:nvPicPr>
-          <p:cNvPr id="13" name="Image 1" descr="preencoded.png">    </p:cNvPr>
+          <p:cNvPr id="13" name="Image 1" descr="preencoded.png"/>
           <p:cNvPicPr>
             <a:picLocks noChangeAspect="1"/>
           </p:cNvPicPr>
           <p:nvPr/>
         </p:nvPicPr>
         <p:blipFill>
-          <a:blip r:embed="rId2"/>
-          <a:srcRect l="0" r="0" t="0" b="0"/>
+          <a:blip r:embed="rId4"/>
+          <a:srcRect/>
           <a:stretch/>
         </p:blipFill>
         <p:spPr>
@@ -7310,7 +7257,7 @@
           <a:bodyPr wrap="square" rtlCol="0" anchor="ctr"/>
           <a:lstStyle/>
           <a:p>
-            <a:pPr indent="0" marL="0">
+            <a:pPr marL="0" indent="0">
               <a:buNone/>
             </a:pPr>
             <a:r>
@@ -7349,7 +7296,7 @@
           <a:bodyPr wrap="square" rtlCol="0" anchor="t"/>
           <a:lstStyle/>
           <a:p>
-            <a:pPr indent="0" marL="0">
+            <a:pPr marL="0" indent="0">
               <a:buNone/>
             </a:pPr>
             <a:r>
@@ -7393,6 +7340,13 @@
             <a:prstDash val="solid"/>
           </a:ln>
         </p:spPr>
+        <p:txBody>
+          <a:bodyPr/>
+          <a:lstStyle/>
+          <a:p>
+            <a:endParaRPr lang="en-UZ"/>
+          </a:p>
+        </p:txBody>
       </p:sp>
       <p:sp>
         <p:nvSpPr>
@@ -7420,18 +7374,25 @@
             <a:prstDash val="solid"/>
           </a:ln>
         </p:spPr>
+        <p:txBody>
+          <a:bodyPr/>
+          <a:lstStyle/>
+          <a:p>
+            <a:endParaRPr lang="en-UZ"/>
+          </a:p>
+        </p:txBody>
       </p:sp>
       <p:pic>
         <p:nvPicPr>
-          <p:cNvPr id="18" name="Image 2" descr="preencoded.png">    </p:cNvPr>
+          <p:cNvPr id="18" name="Image 2" descr="preencoded.png"/>
           <p:cNvPicPr>
             <a:picLocks noChangeAspect="1"/>
           </p:cNvPicPr>
           <p:nvPr/>
         </p:nvPicPr>
         <p:blipFill>
-          <a:blip r:embed="rId3"/>
-          <a:srcRect l="0" r="0" t="0" b="0"/>
+          <a:blip r:embed="rId5"/>
+          <a:srcRect/>
           <a:stretch/>
         </p:blipFill>
         <p:spPr>
@@ -7465,7 +7426,7 @@
           <a:bodyPr wrap="square" rtlCol="0" anchor="ctr"/>
           <a:lstStyle/>
           <a:p>
-            <a:pPr indent="0" marL="0">
+            <a:pPr marL="0" indent="0">
               <a:buNone/>
             </a:pPr>
             <a:r>
@@ -7504,7 +7465,7 @@
           <a:bodyPr wrap="square" rtlCol="0" anchor="t"/>
           <a:lstStyle/>
           <a:p>
-            <a:pPr indent="0" marL="0">
+            <a:pPr marL="0" indent="0">
               <a:buNone/>
             </a:pPr>
             <a:r>
@@ -7548,6 +7509,13 @@
             <a:prstDash val="solid"/>
           </a:ln>
         </p:spPr>
+        <p:txBody>
+          <a:bodyPr/>
+          <a:lstStyle/>
+          <a:p>
+            <a:endParaRPr lang="en-UZ"/>
+          </a:p>
+        </p:txBody>
       </p:sp>
       <p:sp>
         <p:nvSpPr>
@@ -7575,18 +7543,25 @@
             <a:prstDash val="solid"/>
           </a:ln>
         </p:spPr>
+        <p:txBody>
+          <a:bodyPr/>
+          <a:lstStyle/>
+          <a:p>
+            <a:endParaRPr lang="en-UZ"/>
+          </a:p>
+        </p:txBody>
       </p:sp>
       <p:pic>
         <p:nvPicPr>
-          <p:cNvPr id="23" name="Image 3" descr="preencoded.png">    </p:cNvPr>
+          <p:cNvPr id="23" name="Image 3" descr="preencoded.png"/>
           <p:cNvPicPr>
             <a:picLocks noChangeAspect="1"/>
           </p:cNvPicPr>
           <p:nvPr/>
         </p:nvPicPr>
         <p:blipFill>
-          <a:blip r:embed="rId4"/>
-          <a:srcRect l="0" r="0" t="0" b="0"/>
+          <a:blip r:embed="rId6"/>
+          <a:srcRect/>
           <a:stretch/>
         </p:blipFill>
         <p:spPr>
@@ -7625,18 +7600,25 @@
             <a:prstDash val="solid"/>
           </a:ln>
         </p:spPr>
+        <p:txBody>
+          <a:bodyPr/>
+          <a:lstStyle/>
+          <a:p>
+            <a:endParaRPr lang="en-UZ"/>
+          </a:p>
+        </p:txBody>
       </p:sp>
       <p:pic>
         <p:nvPicPr>
-          <p:cNvPr id="25" name="Image 4" descr="preencoded.png">    </p:cNvPr>
+          <p:cNvPr id="25" name="Image 4" descr="preencoded.png"/>
           <p:cNvPicPr>
             <a:picLocks noChangeAspect="1"/>
           </p:cNvPicPr>
           <p:nvPr/>
         </p:nvPicPr>
         <p:blipFill>
-          <a:blip r:embed="rId5"/>
-          <a:srcRect l="0" r="0" t="0" b="0"/>
+          <a:blip r:embed="rId7"/>
+          <a:srcRect/>
           <a:stretch/>
         </p:blipFill>
         <p:spPr>
@@ -7670,7 +7652,7 @@
           <a:bodyPr wrap="square" rtlCol="0" anchor="ctr"/>
           <a:lstStyle/>
           <a:p>
-            <a:pPr indent="0" marL="0">
+            <a:pPr marL="0" indent="0">
               <a:buNone/>
             </a:pPr>
             <a:r>
@@ -7709,7 +7691,7 @@
           <a:bodyPr wrap="square" rtlCol="0" anchor="t"/>
           <a:lstStyle/>
           <a:p>
-            <a:pPr indent="0" marL="0">
+            <a:pPr marL="0" indent="0">
               <a:buNone/>
             </a:pPr>
             <a:r>
@@ -7751,6 +7733,13 @@
             <a:prstDash val="solid"/>
           </a:ln>
         </p:spPr>
+        <p:txBody>
+          <a:bodyPr/>
+          <a:lstStyle/>
+          <a:p>
+            <a:endParaRPr lang="en-UZ"/>
+          </a:p>
+        </p:txBody>
       </p:sp>
       <p:sp>
         <p:nvSpPr>
@@ -7773,11 +7762,11 @@
           <a:bodyPr wrap="square" rtlCol="0" anchor="ctr"/>
           <a:lstStyle/>
           <a:p>
-            <a:pPr indent="0" marL="0">
-              <a:buNone/>
-            </a:pPr>
-            <a:r>
-              <a:rPr lang="en-US" sz="900" b="1" spc="400" kern="0" dirty="0">
+            <a:pPr marL="0" indent="0">
+              <a:buNone/>
+            </a:pPr>
+            <a:r>
+              <a:rPr lang="en-US" sz="900" b="1" kern="0" spc="400" dirty="0">
                 <a:solidFill>
                   <a:srgbClr val="03241E">
                     <a:alpha val="60000"/>
@@ -7814,7 +7803,7 @@
           <a:bodyPr wrap="square" rtlCol="0" anchor="ctr"/>
           <a:lstStyle/>
           <a:p>
-            <a:pPr indent="0" marL="0">
+            <a:pPr marL="0" indent="0">
               <a:buNone/>
             </a:pPr>
             <a:r>
@@ -7853,11 +7842,11 @@
           <a:bodyPr wrap="square" rtlCol="0" anchor="ctr"/>
           <a:lstStyle/>
           <a:p>
-            <a:pPr indent="0" marL="0">
-              <a:buNone/>
-            </a:pPr>
-            <a:r>
-              <a:rPr lang="en-US" sz="900" b="1" spc="400" kern="0" dirty="0">
+            <a:pPr marL="0" indent="0">
+              <a:buNone/>
+            </a:pPr>
+            <a:r>
+              <a:rPr lang="en-US" sz="900" b="1" kern="0" spc="400" dirty="0">
                 <a:solidFill>
                   <a:srgbClr val="03241E">
                     <a:alpha val="60000"/>
@@ -7894,7 +7883,7 @@
           <a:bodyPr wrap="square" rtlCol="0" anchor="ctr"/>
           <a:lstStyle/>
           <a:p>
-            <a:pPr indent="0" marL="0">
+            <a:pPr marL="0" indent="0">
               <a:buNone/>
             </a:pPr>
             <a:r>
@@ -7911,9 +7900,6 @@
               </a:rPr>
               <a:t>$150M–$500M acquisition</a:t>
             </a:r>
-            <a:pPr indent="0" marL="0">
-              <a:buNone/>
-            </a:pPr>
             <a:r>
               <a:rPr lang="en-US" sz="1600" i="1" dirty="0">
                 <a:solidFill>
@@ -7975,11 +7961,11 @@
           <a:bodyPr wrap="square" rtlCol="0" anchor="ctr"/>
           <a:lstStyle/>
           <a:p>
-            <a:pPr algn="r" indent="0" marL="0">
-              <a:buNone/>
-            </a:pPr>
-            <a:r>
-              <a:rPr lang="en-US" sz="900" spc="300" kern="0" dirty="0">
+            <a:pPr marL="0" indent="0" algn="r">
+              <a:buNone/>
+            </a:pPr>
+            <a:r>
+              <a:rPr lang="en-US" sz="900" kern="0" spc="300" dirty="0">
                 <a:solidFill>
                   <a:srgbClr val="FFFFFF">
                     <a:alpha val="45000"/>
@@ -7997,15 +7983,15 @@
       </p:sp>
       <p:pic>
         <p:nvPicPr>
-          <p:cNvPr id="3" name="Image 0" descr="preencoded.png">    </p:cNvPr>
+          <p:cNvPr id="3" name="Image 0" descr="preencoded.png"/>
           <p:cNvPicPr>
             <a:picLocks noChangeAspect="1"/>
           </p:cNvPicPr>
           <p:nvPr/>
         </p:nvPicPr>
         <p:blipFill>
-          <a:blip r:embed="rId1"/>
-          <a:srcRect l="0" r="0" t="0" b="0"/>
+          <a:blip r:embed="rId3"/>
+          <a:srcRect/>
           <a:stretch/>
         </p:blipFill>
         <p:spPr>
@@ -8042,6 +8028,13 @@
             <a:prstDash val="solid"/>
           </a:ln>
         </p:spPr>
+        <p:txBody>
+          <a:bodyPr/>
+          <a:lstStyle/>
+          <a:p>
+            <a:endParaRPr lang="en-UZ"/>
+          </a:p>
+        </p:txBody>
       </p:sp>
       <p:sp>
         <p:nvSpPr>
@@ -8051,7 +8044,7 @@
         </p:nvSpPr>
         <p:spPr>
           <a:xfrm>
-            <a:off x="1097280" y="1143000"/>
+            <a:off x="1097280" y="1121228"/>
             <a:ext cx="5486400" cy="274320"/>
           </a:xfrm>
           <a:prstGeom prst="rect">
@@ -8064,11 +8057,11 @@
           <a:bodyPr wrap="square" rtlCol="0" anchor="ctr"/>
           <a:lstStyle/>
           <a:p>
-            <a:pPr indent="0" marL="0">
-              <a:buNone/>
-            </a:pPr>
-            <a:r>
-              <a:rPr lang="en-US" sz="1000" b="1" spc="400" kern="0" dirty="0">
+            <a:pPr marL="0" indent="0">
+              <a:buNone/>
+            </a:pPr>
+            <a:r>
+              <a:rPr lang="en-US" sz="1000" b="1" kern="0" spc="400" dirty="0">
                 <a:solidFill>
                   <a:srgbClr val="FFFFFF">
                     <a:alpha val="70000"/>
@@ -8105,11 +8098,11 @@
           <a:bodyPr wrap="square" rtlCol="0" anchor="ctr"/>
           <a:lstStyle/>
           <a:p>
-            <a:pPr indent="0" marL="0">
-              <a:buNone/>
-            </a:pPr>
-            <a:r>
-              <a:rPr lang="en-US" sz="8800" spc="-300" kern="0" dirty="0">
+            <a:pPr marL="0" indent="0">
+              <a:buNone/>
+            </a:pPr>
+            <a:r>
+              <a:rPr lang="en-US" sz="8800" kern="0" spc="-300" dirty="0">
                 <a:solidFill>
                   <a:srgbClr val="FDFBF7"/>
                 </a:solidFill>
@@ -8144,7 +8137,7 @@
           <a:bodyPr wrap="square" rtlCol="0" anchor="ctr"/>
           <a:lstStyle/>
           <a:p>
-            <a:pPr indent="0" marL="0">
+            <a:pPr marL="0" indent="0">
               <a:buNone/>
             </a:pPr>
             <a:r>
@@ -8194,6 +8187,13 @@
             <a:prstDash val="solid"/>
           </a:ln>
         </p:spPr>
+        <p:txBody>
+          <a:bodyPr/>
+          <a:lstStyle/>
+          <a:p>
+            <a:endParaRPr lang="en-UZ"/>
+          </a:p>
+        </p:txBody>
       </p:sp>
       <p:sp>
         <p:nvSpPr>
@@ -8216,11 +8216,11 @@
           <a:bodyPr wrap="square" rtlCol="0" anchor="ctr"/>
           <a:lstStyle/>
           <a:p>
-            <a:pPr indent="0" marL="0">
-              <a:buNone/>
-            </a:pPr>
-            <a:r>
-              <a:rPr lang="en-US" sz="1000" b="1" spc="400" kern="0" dirty="0">
+            <a:pPr marL="0" indent="0">
+              <a:buNone/>
+            </a:pPr>
+            <a:r>
+              <a:rPr lang="en-US" sz="1000" b="1" kern="0" spc="400" dirty="0">
                 <a:solidFill>
                   <a:srgbClr val="FDFBF7">
                     <a:alpha val="70000"/>
@@ -8257,7 +8257,7 @@
           <a:bodyPr wrap="square" rtlCol="0" anchor="ctr"/>
           <a:lstStyle/>
           <a:p>
-            <a:pPr indent="0" marL="0">
+            <a:pPr marL="0" indent="0">
               <a:buNone/>
             </a:pPr>
             <a:r>
@@ -8296,7 +8296,7 @@
           <a:bodyPr wrap="square" rtlCol="0" anchor="ctr"/>
           <a:lstStyle/>
           <a:p>
-            <a:pPr indent="0" marL="0">
+            <a:pPr marL="0" indent="0">
               <a:buNone/>
             </a:pPr>
             <a:r>
@@ -8335,7 +8335,7 @@
           <a:bodyPr wrap="square" rtlCol="0" anchor="ctr"/>
           <a:lstStyle/>
           <a:p>
-            <a:pPr indent="0" marL="0">
+            <a:pPr marL="0" indent="0">
               <a:buNone/>
             </a:pPr>
             <a:r>
@@ -8374,7 +8374,7 @@
           <a:bodyPr wrap="square" rtlCol="0" anchor="ctr"/>
           <a:lstStyle/>
           <a:p>
-            <a:pPr indent="0" marL="0">
+            <a:pPr marL="0" indent="0">
               <a:buNone/>
             </a:pPr>
             <a:r>
@@ -8413,7 +8413,7 @@
           <a:bodyPr wrap="square" rtlCol="0" anchor="ctr"/>
           <a:lstStyle/>
           <a:p>
-            <a:pPr indent="0" marL="0">
+            <a:pPr marL="0" indent="0">
               <a:buNone/>
             </a:pPr>
             <a:r>
@@ -8452,7 +8452,7 @@
           <a:bodyPr wrap="square" rtlCol="0" anchor="ctr"/>
           <a:lstStyle/>
           <a:p>
-            <a:pPr indent="0" marL="0">
+            <a:pPr marL="0" indent="0">
               <a:buNone/>
             </a:pPr>
             <a:r>
@@ -8491,7 +8491,7 @@
           <a:bodyPr wrap="square" rtlCol="0" anchor="ctr"/>
           <a:lstStyle/>
           <a:p>
-            <a:pPr indent="0" marL="0">
+            <a:pPr marL="0" indent="0">
               <a:buNone/>
             </a:pPr>
             <a:r>
@@ -8530,7 +8530,7 @@
           <a:bodyPr wrap="square" rtlCol="0" anchor="ctr"/>
           <a:lstStyle/>
           <a:p>
-            <a:pPr indent="0" marL="0">
+            <a:pPr marL="0" indent="0">
               <a:buNone/>
             </a:pPr>
             <a:r>
@@ -8569,11 +8569,11 @@
           <a:bodyPr wrap="square" rtlCol="0" anchor="ctr"/>
           <a:lstStyle/>
           <a:p>
-            <a:pPr indent="0" marL="0">
-              <a:buNone/>
-            </a:pPr>
-            <a:r>
-              <a:rPr lang="en-US" sz="1100" spc="200" kern="0" dirty="0">
+            <a:pPr marL="0" indent="0">
+              <a:buNone/>
+            </a:pPr>
+            <a:r>
+              <a:rPr lang="en-US" sz="1100" kern="0" spc="200" dirty="0">
                 <a:solidFill>
                   <a:srgbClr val="FDFBF7">
                     <a:alpha val="55000"/>
@@ -8635,11 +8635,11 @@
           <a:bodyPr wrap="square" rtlCol="0" anchor="ctr"/>
           <a:lstStyle/>
           <a:p>
-            <a:pPr algn="r" indent="0" marL="0">
-              <a:buNone/>
-            </a:pPr>
-            <a:r>
-              <a:rPr lang="en-US" sz="900" spc="300" kern="0" dirty="0">
+            <a:pPr marL="0" indent="0" algn="r">
+              <a:buNone/>
+            </a:pPr>
+            <a:r>
+              <a:rPr lang="en-US" sz="900" kern="0" spc="300" dirty="0">
                 <a:solidFill>
                   <a:srgbClr val="03241E">
                     <a:alpha val="45000"/>
@@ -8679,6 +8679,13 @@
             <a:prstDash val="solid"/>
           </a:ln>
         </p:spPr>
+        <p:txBody>
+          <a:bodyPr/>
+          <a:lstStyle/>
+          <a:p>
+            <a:endParaRPr lang="en-UZ"/>
+          </a:p>
+        </p:txBody>
       </p:sp>
       <p:sp>
         <p:nvSpPr>
@@ -8688,7 +8695,7 @@
         </p:nvSpPr>
         <p:spPr>
           <a:xfrm>
-            <a:off x="1097280" y="640080"/>
+            <a:off x="1097280" y="618308"/>
             <a:ext cx="5486400" cy="274320"/>
           </a:xfrm>
           <a:prstGeom prst="rect">
@@ -8701,11 +8708,11 @@
           <a:bodyPr wrap="square" rtlCol="0" anchor="ctr"/>
           <a:lstStyle/>
           <a:p>
-            <a:pPr indent="0" marL="0">
-              <a:buNone/>
-            </a:pPr>
-            <a:r>
-              <a:rPr lang="en-US" sz="1000" b="1" spc="400" kern="0" dirty="0">
+            <a:pPr marL="0" indent="0">
+              <a:buNone/>
+            </a:pPr>
+            <a:r>
+              <a:rPr lang="en-US" sz="1000" b="1" kern="0" spc="400" dirty="0">
                 <a:solidFill>
                   <a:srgbClr val="03241E">
                     <a:alpha val="60000"/>
@@ -8742,11 +8749,11 @@
           <a:bodyPr wrap="square" rtlCol="0" anchor="ctr"/>
           <a:lstStyle/>
           <a:p>
-            <a:pPr indent="0" marL="0">
-              <a:buNone/>
-            </a:pPr>
-            <a:r>
-              <a:rPr lang="en-US" sz="4400" spc="-100" kern="0" dirty="0">
+            <a:pPr marL="0" indent="0">
+              <a:buNone/>
+            </a:pPr>
+            <a:r>
+              <a:rPr lang="en-US" sz="4400" kern="0" spc="-100" dirty="0">
                 <a:solidFill>
                   <a:srgbClr val="03241E"/>
                 </a:solidFill>
@@ -8756,11 +8763,8 @@
               </a:rPr>
               <a:t>Hotels are losing bookings </a:t>
             </a:r>
-            <a:pPr indent="0" marL="0">
-              <a:buNone/>
-            </a:pPr>
-            <a:r>
-              <a:rPr lang="en-US" sz="4400" i="1" spc="-100" kern="0" dirty="0">
+            <a:r>
+              <a:rPr lang="en-US" sz="4400" i="1" kern="0" spc="-100" dirty="0">
                 <a:solidFill>
                   <a:srgbClr val="03241E"/>
                 </a:solidFill>
@@ -8773,11 +8777,8 @@
               </a:rPr>
               <a:t>every hour the phone rings</a:t>
             </a:r>
-            <a:pPr indent="0" marL="0">
-              <a:buNone/>
-            </a:pPr>
-            <a:r>
-              <a:rPr lang="en-US" sz="4400" i="1" spc="-100" kern="0" dirty="0">
+            <a:r>
+              <a:rPr lang="en-US" sz="4400" i="1" kern="0" spc="-100" dirty="0">
                 <a:solidFill>
                   <a:srgbClr val="03241E"/>
                 </a:solidFill>
@@ -8815,6 +8816,13 @@
             <a:prstDash val="solid"/>
           </a:ln>
         </p:spPr>
+        <p:txBody>
+          <a:bodyPr/>
+          <a:lstStyle/>
+          <a:p>
+            <a:endParaRPr lang="en-UZ"/>
+          </a:p>
+        </p:txBody>
       </p:sp>
       <p:sp>
         <p:nvSpPr>
@@ -8837,11 +8845,11 @@
           <a:bodyPr wrap="square" rtlCol="0" anchor="ctr"/>
           <a:lstStyle/>
           <a:p>
-            <a:pPr indent="0" marL="0">
-              <a:buNone/>
-            </a:pPr>
-            <a:r>
-              <a:rPr lang="en-US" sz="6800" spc="-300" kern="0" dirty="0">
+            <a:pPr marL="0" indent="0">
+              <a:buNone/>
+            </a:pPr>
+            <a:r>
+              <a:rPr lang="en-US" sz="6800" kern="0" spc="-300" dirty="0">
                 <a:solidFill>
                   <a:srgbClr val="03241E"/>
                 </a:solidFill>
@@ -8849,7 +8857,29 @@
                 <a:ea typeface="Fraunces" pitchFamily="34" charset="-122"/>
                 <a:cs typeface="Fraunces" pitchFamily="34" charset="-120"/>
               </a:rPr>
-              <a:t>1 in 3</a:t>
+              <a:t>1</a:t>
+            </a:r>
+            <a:r>
+              <a:rPr lang="en-US" sz="6800" i="1" kern="0" spc="-300" dirty="0">
+                <a:solidFill>
+                  <a:srgbClr val="03241E"/>
+                </a:solidFill>
+                <a:latin typeface="Fraunces" pitchFamily="34" charset="0"/>
+                <a:ea typeface="Fraunces" pitchFamily="34" charset="-122"/>
+                <a:cs typeface="Fraunces" pitchFamily="34" charset="-120"/>
+              </a:rPr>
+              <a:t> in </a:t>
+            </a:r>
+            <a:r>
+              <a:rPr lang="en-US" sz="6800" kern="0" spc="-300" dirty="0">
+                <a:solidFill>
+                  <a:srgbClr val="03241E"/>
+                </a:solidFill>
+                <a:latin typeface="Fraunces" pitchFamily="34" charset="0"/>
+                <a:ea typeface="Fraunces" pitchFamily="34" charset="-122"/>
+                <a:cs typeface="Fraunces" pitchFamily="34" charset="-120"/>
+              </a:rPr>
+              <a:t>3</a:t>
             </a:r>
             <a:endParaRPr lang="en-US" sz="6800" dirty="0"/>
           </a:p>
@@ -8876,11 +8906,11 @@
           <a:bodyPr wrap="square" rtlCol="0" anchor="ctr"/>
           <a:lstStyle/>
           <a:p>
-            <a:pPr indent="0" marL="0">
-              <a:buNone/>
-            </a:pPr>
-            <a:r>
-              <a:rPr lang="en-US" sz="1000" b="1" spc="400" kern="0" dirty="0">
+            <a:pPr marL="0" indent="0">
+              <a:buNone/>
+            </a:pPr>
+            <a:r>
+              <a:rPr lang="en-US" sz="1000" b="1" kern="0" spc="400" dirty="0">
                 <a:solidFill>
                   <a:srgbClr val="03241E">
                     <a:alpha val="75000"/>
@@ -8917,7 +8947,7 @@
           <a:bodyPr wrap="square" rtlCol="0" anchor="t"/>
           <a:lstStyle/>
           <a:p>
-            <a:pPr indent="0" marL="0">
+            <a:pPr marL="0" indent="0">
               <a:buNone/>
             </a:pPr>
             <a:r>
@@ -8959,6 +8989,13 @@
             <a:prstDash val="solid"/>
           </a:ln>
         </p:spPr>
+        <p:txBody>
+          <a:bodyPr/>
+          <a:lstStyle/>
+          <a:p>
+            <a:endParaRPr lang="en-UZ"/>
+          </a:p>
+        </p:txBody>
       </p:sp>
       <p:sp>
         <p:nvSpPr>
@@ -8981,11 +9018,11 @@
           <a:bodyPr wrap="square" rtlCol="0" anchor="ctr"/>
           <a:lstStyle/>
           <a:p>
-            <a:pPr indent="0" marL="0">
-              <a:buNone/>
-            </a:pPr>
-            <a:r>
-              <a:rPr lang="en-US" sz="6800" spc="-300" kern="0" dirty="0">
+            <a:pPr marL="0" indent="0">
+              <a:buNone/>
+            </a:pPr>
+            <a:r>
+              <a:rPr lang="en-US" sz="6800" kern="0" spc="-300" dirty="0">
                 <a:solidFill>
                   <a:srgbClr val="03241E"/>
                 </a:solidFill>
@@ -8993,9 +9030,20 @@
                 <a:ea typeface="Fraunces" pitchFamily="34" charset="-122"/>
                 <a:cs typeface="Fraunces" pitchFamily="34" charset="-120"/>
               </a:rPr>
-              <a:t>$12k</a:t>
-            </a:r>
-            <a:endParaRPr lang="en-US" sz="6800" dirty="0"/>
+              <a:t>$12</a:t>
+            </a:r>
+            <a:r>
+              <a:rPr lang="en-US" sz="6800" i="1" kern="0" spc="-300" dirty="0">
+                <a:solidFill>
+                  <a:srgbClr val="03241E"/>
+                </a:solidFill>
+                <a:latin typeface="Fraunces" pitchFamily="34" charset="0"/>
+                <a:ea typeface="Fraunces" pitchFamily="34" charset="-122"/>
+                <a:cs typeface="Fraunces" pitchFamily="34" charset="-120"/>
+              </a:rPr>
+              <a:t>k</a:t>
+            </a:r>
+            <a:endParaRPr lang="en-US" sz="6800" i="1" dirty="0"/>
           </a:p>
         </p:txBody>
       </p:sp>
@@ -9020,11 +9068,11 @@
           <a:bodyPr wrap="square" rtlCol="0" anchor="ctr"/>
           <a:lstStyle/>
           <a:p>
-            <a:pPr indent="0" marL="0">
-              <a:buNone/>
-            </a:pPr>
-            <a:r>
-              <a:rPr lang="en-US" sz="1000" b="1" spc="400" kern="0" dirty="0">
+            <a:pPr marL="0" indent="0">
+              <a:buNone/>
+            </a:pPr>
+            <a:r>
+              <a:rPr lang="en-US" sz="1000" b="1" kern="0" spc="400" dirty="0">
                 <a:solidFill>
                   <a:srgbClr val="03241E">
                     <a:alpha val="75000"/>
@@ -9061,7 +9109,7 @@
           <a:bodyPr wrap="square" rtlCol="0" anchor="t"/>
           <a:lstStyle/>
           <a:p>
-            <a:pPr indent="0" marL="0">
+            <a:pPr marL="0" indent="0">
               <a:buNone/>
             </a:pPr>
             <a:r>
@@ -9103,6 +9151,13 @@
             <a:prstDash val="solid"/>
           </a:ln>
         </p:spPr>
+        <p:txBody>
+          <a:bodyPr/>
+          <a:lstStyle/>
+          <a:p>
+            <a:endParaRPr lang="en-UZ"/>
+          </a:p>
+        </p:txBody>
       </p:sp>
       <p:sp>
         <p:nvSpPr>
@@ -9125,11 +9180,11 @@
           <a:bodyPr wrap="square" rtlCol="0" anchor="ctr"/>
           <a:lstStyle/>
           <a:p>
-            <a:pPr indent="0" marL="0">
-              <a:buNone/>
-            </a:pPr>
-            <a:r>
-              <a:rPr lang="en-US" sz="6800" spc="-300" kern="0" dirty="0">
+            <a:pPr marL="0" indent="0">
+              <a:buNone/>
+            </a:pPr>
+            <a:r>
+              <a:rPr lang="en-US" sz="6800" kern="0" spc="-300" dirty="0">
                 <a:solidFill>
                   <a:srgbClr val="03241E"/>
                 </a:solidFill>
@@ -9137,9 +9192,20 @@
                 <a:ea typeface="Fraunces" pitchFamily="34" charset="-122"/>
                 <a:cs typeface="Fraunces" pitchFamily="34" charset="-120"/>
               </a:rPr>
-              <a:t>2.5 hrs</a:t>
-            </a:r>
-            <a:endParaRPr lang="en-US" sz="6800" dirty="0"/>
+              <a:t>2.5 </a:t>
+            </a:r>
+            <a:r>
+              <a:rPr lang="en-US" sz="6800" i="1" kern="0" spc="-300" dirty="0">
+                <a:solidFill>
+                  <a:srgbClr val="03241E"/>
+                </a:solidFill>
+                <a:latin typeface="Fraunces" pitchFamily="34" charset="0"/>
+                <a:ea typeface="Fraunces" pitchFamily="34" charset="-122"/>
+                <a:cs typeface="Fraunces" pitchFamily="34" charset="-120"/>
+              </a:rPr>
+              <a:t>hrs</a:t>
+            </a:r>
+            <a:endParaRPr lang="en-US" sz="6800" i="1" dirty="0"/>
           </a:p>
         </p:txBody>
       </p:sp>
@@ -9164,11 +9230,11 @@
           <a:bodyPr wrap="square" rtlCol="0" anchor="ctr"/>
           <a:lstStyle/>
           <a:p>
-            <a:pPr indent="0" marL="0">
-              <a:buNone/>
-            </a:pPr>
-            <a:r>
-              <a:rPr lang="en-US" sz="1000" b="1" spc="400" kern="0" dirty="0">
+            <a:pPr marL="0" indent="0">
+              <a:buNone/>
+            </a:pPr>
+            <a:r>
+              <a:rPr lang="en-US" sz="1000" b="1" kern="0" spc="400" dirty="0">
                 <a:solidFill>
                   <a:srgbClr val="03241E">
                     <a:alpha val="75000"/>
@@ -9205,7 +9271,7 @@
           <a:bodyPr wrap="square" rtlCol="0" anchor="t"/>
           <a:lstStyle/>
           <a:p>
-            <a:pPr indent="0" marL="0">
+            <a:pPr marL="0" indent="0">
               <a:buNone/>
             </a:pPr>
             <a:r>
@@ -9244,7 +9310,7 @@
           <a:bodyPr wrap="square" rtlCol="0" anchor="ctr"/>
           <a:lstStyle/>
           <a:p>
-            <a:pPr indent="0" marL="0">
+            <a:pPr marL="0" indent="0">
               <a:buNone/>
             </a:pPr>
             <a:r>
@@ -9258,9 +9324,6 @@
               </a:rPr>
               <a:t>And call centers cost </a:t>
             </a:r>
-            <a:pPr indent="0" marL="0">
-              <a:buNone/>
-            </a:pPr>
             <a:r>
               <a:rPr lang="en-US" sz="1150" b="1" i="1" dirty="0">
                 <a:solidFill>
@@ -9272,9 +9335,6 @@
               </a:rPr>
               <a:t>$2.50 / call</a:t>
             </a:r>
-            <a:pPr indent="0" marL="0">
-              <a:buNone/>
-            </a:pPr>
             <a:r>
               <a:rPr lang="en-US" sz="1150" i="1" dirty="0">
                 <a:solidFill>
@@ -9336,11 +9396,11 @@
           <a:bodyPr wrap="square" rtlCol="0" anchor="ctr"/>
           <a:lstStyle/>
           <a:p>
-            <a:pPr algn="r" indent="0" marL="0">
-              <a:buNone/>
-            </a:pPr>
-            <a:r>
-              <a:rPr lang="en-US" sz="900" spc="300" kern="0" dirty="0">
+            <a:pPr marL="0" indent="0" algn="r">
+              <a:buNone/>
+            </a:pPr>
+            <a:r>
+              <a:rPr lang="en-US" sz="900" kern="0" spc="300" dirty="0">
                 <a:solidFill>
                   <a:srgbClr val="03241E">
                     <a:alpha val="45000"/>
@@ -9380,6 +9440,13 @@
             <a:prstDash val="solid"/>
           </a:ln>
         </p:spPr>
+        <p:txBody>
+          <a:bodyPr/>
+          <a:lstStyle/>
+          <a:p>
+            <a:endParaRPr lang="en-UZ"/>
+          </a:p>
+        </p:txBody>
       </p:sp>
       <p:sp>
         <p:nvSpPr>
@@ -9389,7 +9456,7 @@
         </p:nvSpPr>
         <p:spPr>
           <a:xfrm>
-            <a:off x="1097280" y="640080"/>
+            <a:off x="1097280" y="618308"/>
             <a:ext cx="5486400" cy="274320"/>
           </a:xfrm>
           <a:prstGeom prst="rect">
@@ -9402,11 +9469,11 @@
           <a:bodyPr wrap="square" rtlCol="0" anchor="ctr"/>
           <a:lstStyle/>
           <a:p>
-            <a:pPr indent="0" marL="0">
-              <a:buNone/>
-            </a:pPr>
-            <a:r>
-              <a:rPr lang="en-US" sz="1000" b="1" spc="400" kern="0" dirty="0">
+            <a:pPr marL="0" indent="0">
+              <a:buNone/>
+            </a:pPr>
+            <a:r>
+              <a:rPr lang="en-US" sz="1000" b="1" kern="0" spc="400" dirty="0">
                 <a:solidFill>
                   <a:srgbClr val="03241E">
                     <a:alpha val="60000"/>
@@ -9443,11 +9510,11 @@
           <a:bodyPr wrap="square" rtlCol="0" anchor="ctr"/>
           <a:lstStyle/>
           <a:p>
-            <a:pPr indent="0" marL="0">
-              <a:buNone/>
-            </a:pPr>
-            <a:r>
-              <a:rPr lang="en-US" sz="4200" spc="-100" kern="0" dirty="0">
+            <a:pPr marL="0" indent="0">
+              <a:buNone/>
+            </a:pPr>
+            <a:r>
+              <a:rPr lang="en-US" sz="4200" kern="0" spc="-100" dirty="0">
                 <a:solidFill>
                   <a:srgbClr val="03241E"/>
                 </a:solidFill>
@@ -9457,11 +9524,8 @@
               </a:rPr>
               <a:t>Three curves crossed in the last </a:t>
             </a:r>
-            <a:pPr indent="0" marL="0">
-              <a:buNone/>
-            </a:pPr>
-            <a:r>
-              <a:rPr lang="en-US" sz="4200" i="1" spc="-100" kern="0" dirty="0">
+            <a:r>
+              <a:rPr lang="en-US" sz="4200" i="1" kern="0" spc="-100" dirty="0">
                 <a:solidFill>
                   <a:srgbClr val="03241E"/>
                 </a:solidFill>
@@ -9471,11 +9535,8 @@
               </a:rPr>
               <a:t>18 months</a:t>
             </a:r>
-            <a:pPr indent="0" marL="0">
-              <a:buNone/>
-            </a:pPr>
-            <a:r>
-              <a:rPr lang="en-US" sz="4200" spc="-100" kern="0" dirty="0">
+            <a:r>
+              <a:rPr lang="en-US" sz="4200" kern="0" spc="-100" dirty="0">
                 <a:solidFill>
                   <a:srgbClr val="03241E"/>
                 </a:solidFill>
@@ -9510,7 +9571,7 @@
           <a:bodyPr wrap="square" rtlCol="0" anchor="ctr"/>
           <a:lstStyle/>
           <a:p>
-            <a:pPr indent="0" marL="0">
+            <a:pPr marL="0" indent="0">
               <a:buNone/>
             </a:pPr>
             <a:r>
@@ -9551,7 +9612,7 @@
           <a:bodyPr wrap="square" rtlCol="0" anchor="ctr"/>
           <a:lstStyle/>
           <a:p>
-            <a:pPr indent="0" marL="0">
+            <a:pPr marL="0" indent="0">
               <a:buNone/>
             </a:pPr>
             <a:r>
@@ -9590,7 +9651,7 @@
           <a:bodyPr wrap="square" rtlCol="0" anchor="t"/>
           <a:lstStyle/>
           <a:p>
-            <a:pPr indent="0" marL="0">
+            <a:pPr marL="0" indent="0">
               <a:buNone/>
             </a:pPr>
             <a:r>
@@ -9629,7 +9690,7 @@
           <a:bodyPr wrap="square" rtlCol="0" anchor="ctr"/>
           <a:lstStyle/>
           <a:p>
-            <a:pPr indent="0" marL="0">
+            <a:pPr marL="0" indent="0">
               <a:buNone/>
             </a:pPr>
             <a:r>
@@ -9670,7 +9731,7 @@
           <a:bodyPr wrap="square" rtlCol="0" anchor="ctr"/>
           <a:lstStyle/>
           <a:p>
-            <a:pPr indent="0" marL="0">
+            <a:pPr marL="0" indent="0">
               <a:buNone/>
             </a:pPr>
             <a:r>
@@ -9709,7 +9770,7 @@
           <a:bodyPr wrap="square" rtlCol="0" anchor="t"/>
           <a:lstStyle/>
           <a:p>
-            <a:pPr indent="0" marL="0">
+            <a:pPr marL="0" indent="0">
               <a:buNone/>
             </a:pPr>
             <a:r>
@@ -9748,7 +9809,7 @@
           <a:bodyPr wrap="square" rtlCol="0" anchor="ctr"/>
           <a:lstStyle/>
           <a:p>
-            <a:pPr indent="0" marL="0">
+            <a:pPr marL="0" indent="0">
               <a:buNone/>
             </a:pPr>
             <a:r>
@@ -9789,7 +9850,7 @@
           <a:bodyPr wrap="square" rtlCol="0" anchor="ctr"/>
           <a:lstStyle/>
           <a:p>
-            <a:pPr indent="0" marL="0">
+            <a:pPr marL="0" indent="0">
               <a:buNone/>
             </a:pPr>
             <a:r>
@@ -9828,7 +9889,7 @@
           <a:bodyPr wrap="square" rtlCol="0" anchor="t"/>
           <a:lstStyle/>
           <a:p>
-            <a:pPr indent="0" marL="0">
+            <a:pPr marL="0" indent="0">
               <a:buNone/>
             </a:pPr>
             <a:r>
@@ -9870,6 +9931,13 @@
             <a:prstDash val="solid"/>
           </a:ln>
         </p:spPr>
+        <p:txBody>
+          <a:bodyPr/>
+          <a:lstStyle/>
+          <a:p>
+            <a:endParaRPr lang="en-UZ"/>
+          </a:p>
+        </p:txBody>
       </p:sp>
       <p:sp>
         <p:nvSpPr>
@@ -9892,7 +9960,7 @@
           <a:bodyPr wrap="square" rtlCol="0" anchor="ctr"/>
           <a:lstStyle/>
           <a:p>
-            <a:pPr indent="0" marL="0">
+            <a:pPr marL="0" indent="0">
               <a:buNone/>
             </a:pPr>
             <a:r>
@@ -9904,39 +9972,8 @@
                 <a:ea typeface="Fraunces" pitchFamily="34" charset="-122"/>
                 <a:cs typeface="Fraunces" pitchFamily="34" charset="-120"/>
               </a:rPr>
-              <a:t>Small hotels couldn't afford call centers </a:t>
-            </a:r>
-            <a:pPr indent="0" marL="0">
-              <a:buNone/>
-            </a:pPr>
-            <a:r>
-              <a:rPr lang="en-US" sz="1600" i="1" dirty="0">
-                <a:solidFill>
-                  <a:srgbClr val="03241E"/>
-                </a:solidFill>
-                <a:latin typeface="Fraunces" pitchFamily="34" charset="0"/>
-                <a:ea typeface="Fraunces" pitchFamily="34" charset="-122"/>
-                <a:cs typeface="Fraunces" pitchFamily="34" charset="-120"/>
-              </a:rPr>
-              <a:t>or</a:t>
-            </a:r>
-            <a:pPr indent="0" marL="0">
-              <a:buNone/>
-            </a:pPr>
-            <a:r>
-              <a:rPr lang="en-US" sz="1600" i="1" dirty="0">
-                <a:solidFill>
-                  <a:srgbClr val="03241E"/>
-                </a:solidFill>
-                <a:latin typeface="Fraunces" pitchFamily="34" charset="0"/>
-                <a:ea typeface="Fraunces" pitchFamily="34" charset="-122"/>
-                <a:cs typeface="Fraunces" pitchFamily="34" charset="-120"/>
-              </a:rPr>
-              <a:t> enterprise AI. </a:t>
-            </a:r>
-            <a:pPr indent="0" marL="0">
-              <a:buNone/>
-            </a:pPr>
+              <a:t>Small hotels couldn't afford call centers or enterprise AI. </a:t>
+            </a:r>
             <a:r>
               <a:rPr lang="en-US" sz="1600" i="1" dirty="0">
                 <a:solidFill>
@@ -10001,11 +10038,11 @@
           <a:bodyPr wrap="square" rtlCol="0" anchor="ctr"/>
           <a:lstStyle/>
           <a:p>
-            <a:pPr algn="r" indent="0" marL="0">
-              <a:buNone/>
-            </a:pPr>
-            <a:r>
-              <a:rPr lang="en-US" sz="900" spc="300" kern="0" dirty="0">
+            <a:pPr marL="0" indent="0" algn="r">
+              <a:buNone/>
+            </a:pPr>
+            <a:r>
+              <a:rPr lang="en-US" sz="900" kern="0" spc="300" dirty="0">
                 <a:solidFill>
                   <a:srgbClr val="03241E">
                     <a:alpha val="45000"/>
@@ -10023,15 +10060,15 @@
       </p:sp>
       <p:pic>
         <p:nvPicPr>
-          <p:cNvPr id="3" name="Image 0" descr="preencoded.png">    </p:cNvPr>
+          <p:cNvPr id="3" name="Image 0" descr="preencoded.png"/>
           <p:cNvPicPr>
             <a:picLocks noChangeAspect="1"/>
           </p:cNvPicPr>
           <p:nvPr/>
         </p:nvPicPr>
         <p:blipFill>
-          <a:blip r:embed="rId1"/>
-          <a:srcRect l="0" r="0" t="0" b="0"/>
+          <a:blip r:embed="rId3"/>
+          <a:srcRect/>
           <a:stretch/>
         </p:blipFill>
         <p:spPr>
@@ -10065,11 +10102,11 @@
           <a:bodyPr wrap="square" rtlCol="0" anchor="ctr"/>
           <a:lstStyle/>
           <a:p>
-            <a:pPr indent="0" marL="0">
-              <a:buNone/>
-            </a:pPr>
-            <a:r>
-              <a:rPr lang="en-US" sz="900" b="1" spc="400" kern="0" dirty="0">
+            <a:pPr marL="0" indent="0">
+              <a:buNone/>
+            </a:pPr>
+            <a:r>
+              <a:rPr lang="en-US" sz="900" b="1" kern="0" spc="400" dirty="0">
                 <a:solidFill>
                   <a:srgbClr val="03241E">
                     <a:alpha val="55000"/>
@@ -10109,6 +10146,13 @@
             <a:prstDash val="solid"/>
           </a:ln>
         </p:spPr>
+        <p:txBody>
+          <a:bodyPr/>
+          <a:lstStyle/>
+          <a:p>
+            <a:endParaRPr lang="en-UZ"/>
+          </a:p>
+        </p:txBody>
       </p:sp>
       <p:sp>
         <p:nvSpPr>
@@ -10118,7 +10162,7 @@
         </p:nvSpPr>
         <p:spPr>
           <a:xfrm>
-            <a:off x="1097280" y="1143000"/>
+            <a:off x="1097280" y="1121228"/>
             <a:ext cx="5486400" cy="274320"/>
           </a:xfrm>
           <a:prstGeom prst="rect">
@@ -10131,11 +10175,11 @@
           <a:bodyPr wrap="square" rtlCol="0" anchor="ctr"/>
           <a:lstStyle/>
           <a:p>
-            <a:pPr indent="0" marL="0">
-              <a:buNone/>
-            </a:pPr>
-            <a:r>
-              <a:rPr lang="en-US" sz="1000" b="1" spc="400" kern="0" dirty="0">
+            <a:pPr marL="0" indent="0">
+              <a:buNone/>
+            </a:pPr>
+            <a:r>
+              <a:rPr lang="en-US" sz="1000" b="1" kern="0" spc="400" dirty="0">
                 <a:solidFill>
                   <a:srgbClr val="03241E">
                     <a:alpha val="60000"/>
@@ -10172,11 +10216,11 @@
           <a:bodyPr wrap="square" rtlCol="0" anchor="ctr"/>
           <a:lstStyle/>
           <a:p>
-            <a:pPr indent="0" marL="0">
-              <a:buNone/>
-            </a:pPr>
-            <a:r>
-              <a:rPr lang="en-US" sz="7200" spc="-200" kern="0" dirty="0">
+            <a:pPr marL="0" indent="0">
+              <a:buNone/>
+            </a:pPr>
+            <a:r>
+              <a:rPr lang="en-US" sz="7200" kern="0" spc="-200" dirty="0">
                 <a:solidFill>
                   <a:srgbClr val="03241E"/>
                 </a:solidFill>
@@ -10186,11 +10230,8 @@
               </a:rPr>
               <a:t>Meet </a:t>
             </a:r>
-            <a:pPr indent="0" marL="0">
-              <a:buNone/>
-            </a:pPr>
-            <a:r>
-              <a:rPr lang="en-US" sz="7200" i="1" spc="-200" kern="0" dirty="0">
+            <a:r>
+              <a:rPr lang="en-US" sz="7200" i="1" kern="0" spc="-200" dirty="0">
                 <a:solidFill>
                   <a:srgbClr val="03241E"/>
                 </a:solidFill>
@@ -10200,11 +10241,8 @@
               </a:rPr>
               <a:t>Arvy</a:t>
             </a:r>
-            <a:pPr indent="0" marL="0">
-              <a:buNone/>
-            </a:pPr>
-            <a:r>
-              <a:rPr lang="en-US" sz="7200" spc="-200" kern="0" dirty="0">
+            <a:r>
+              <a:rPr lang="en-US" sz="7200" kern="0" spc="-200" dirty="0">
                 <a:solidFill>
                   <a:srgbClr val="03241E"/>
                 </a:solidFill>
@@ -10239,7 +10277,7 @@
           <a:bodyPr wrap="square" rtlCol="0" anchor="ctr"/>
           <a:lstStyle/>
           <a:p>
-            <a:pPr indent="0" marL="0">
+            <a:pPr marL="0" indent="0">
               <a:buNone/>
             </a:pPr>
             <a:r>
@@ -10255,9 +10293,6 @@
               </a:rPr>
               <a:t>The AI voice that </a:t>
             </a:r>
-            <a:pPr indent="0" marL="0">
-              <a:buNone/>
-            </a:pPr>
             <a:r>
               <a:rPr lang="en-US" sz="2200" dirty="0">
                 <a:solidFill>
@@ -10274,9 +10309,6 @@
               </a:rPr>
               <a:t>answers every guest call</a:t>
             </a:r>
-            <a:pPr indent="0" marL="0">
-              <a:buNone/>
-            </a:pPr>
             <a:r>
               <a:rPr lang="en-US" sz="2200" dirty="0">
                 <a:solidFill>
@@ -10313,6 +10345,13 @@
           </a:solidFill>
           <a:ln/>
         </p:spPr>
+        <p:txBody>
+          <a:bodyPr/>
+          <a:lstStyle/>
+          <a:p>
+            <a:endParaRPr lang="en-UZ"/>
+          </a:p>
+        </p:txBody>
       </p:sp>
       <p:sp>
         <p:nvSpPr>
@@ -10335,7 +10374,7 @@
           <a:bodyPr wrap="square" rtlCol="0" anchor="ctr"/>
           <a:lstStyle/>
           <a:p>
-            <a:pPr indent="0" marL="0">
+            <a:pPr marL="0" indent="0">
               <a:buNone/>
             </a:pPr>
             <a:r>
@@ -10372,6 +10411,13 @@
           </a:solidFill>
           <a:ln/>
         </p:spPr>
+        <p:txBody>
+          <a:bodyPr/>
+          <a:lstStyle/>
+          <a:p>
+            <a:endParaRPr lang="en-UZ"/>
+          </a:p>
+        </p:txBody>
       </p:sp>
       <p:sp>
         <p:nvSpPr>
@@ -10394,7 +10440,7 @@
           <a:bodyPr wrap="square" rtlCol="0" anchor="ctr"/>
           <a:lstStyle/>
           <a:p>
-            <a:pPr indent="0" marL="0">
+            <a:pPr marL="0" indent="0">
               <a:buNone/>
             </a:pPr>
             <a:r>
@@ -10431,6 +10477,13 @@
           </a:solidFill>
           <a:ln/>
         </p:spPr>
+        <p:txBody>
+          <a:bodyPr/>
+          <a:lstStyle/>
+          <a:p>
+            <a:endParaRPr lang="en-UZ"/>
+          </a:p>
+        </p:txBody>
       </p:sp>
       <p:sp>
         <p:nvSpPr>
@@ -10453,7 +10506,7 @@
           <a:bodyPr wrap="square" rtlCol="0" anchor="ctr"/>
           <a:lstStyle/>
           <a:p>
-            <a:pPr indent="0" marL="0">
+            <a:pPr marL="0" indent="0">
               <a:buNone/>
             </a:pPr>
             <a:r>
@@ -10490,6 +10543,13 @@
           </a:solidFill>
           <a:ln/>
         </p:spPr>
+        <p:txBody>
+          <a:bodyPr/>
+          <a:lstStyle/>
+          <a:p>
+            <a:endParaRPr lang="en-UZ"/>
+          </a:p>
+        </p:txBody>
       </p:sp>
       <p:sp>
         <p:nvSpPr>
@@ -10512,7 +10572,7 @@
           <a:bodyPr wrap="square" rtlCol="0" anchor="ctr"/>
           <a:lstStyle/>
           <a:p>
-            <a:pPr indent="0" marL="0">
+            <a:pPr marL="0" indent="0">
               <a:buNone/>
             </a:pPr>
             <a:r>
@@ -10556,6 +10616,13 @@
             <a:prstDash val="solid"/>
           </a:ln>
         </p:spPr>
+        <p:txBody>
+          <a:bodyPr/>
+          <a:lstStyle/>
+          <a:p>
+            <a:endParaRPr lang="en-UZ"/>
+          </a:p>
+        </p:txBody>
       </p:sp>
       <p:sp>
         <p:nvSpPr>
@@ -10579,6 +10646,13 @@
             <a:prstDash val="solid"/>
           </a:ln>
         </p:spPr>
+        <p:txBody>
+          <a:bodyPr/>
+          <a:lstStyle/>
+          <a:p>
+            <a:endParaRPr lang="en-UZ"/>
+          </a:p>
+        </p:txBody>
       </p:sp>
       <p:sp>
         <p:nvSpPr>
@@ -10599,6 +10673,13 @@
           </a:solidFill>
           <a:ln/>
         </p:spPr>
+        <p:txBody>
+          <a:bodyPr/>
+          <a:lstStyle/>
+          <a:p>
+            <a:endParaRPr lang="en-UZ"/>
+          </a:p>
+        </p:txBody>
       </p:sp>
       <p:sp>
         <p:nvSpPr>
@@ -10621,11 +10702,11 @@
           <a:bodyPr wrap="square" rtlCol="0" anchor="ctr"/>
           <a:lstStyle/>
           <a:p>
-            <a:pPr indent="0" marL="0">
-              <a:buNone/>
-            </a:pPr>
-            <a:r>
-              <a:rPr lang="en-US" sz="1000" b="1" spc="400" kern="0" dirty="0">
+            <a:pPr marL="0" indent="0">
+              <a:buNone/>
+            </a:pPr>
+            <a:r>
+              <a:rPr lang="en-US" sz="1000" b="1" kern="0" spc="400" dirty="0">
                 <a:solidFill>
                   <a:srgbClr val="03241E"/>
                 </a:solidFill>
@@ -10660,7 +10741,7 @@
           <a:bodyPr wrap="square" rtlCol="0" anchor="ctr"/>
           <a:lstStyle/>
           <a:p>
-            <a:pPr algn="r" indent="0" marL="0">
+            <a:pPr marL="0" indent="0" algn="r">
               <a:buNone/>
             </a:pPr>
             <a:r>
@@ -10699,11 +10780,11 @@
           <a:bodyPr wrap="square" rtlCol="0" anchor="ctr"/>
           <a:lstStyle/>
           <a:p>
-            <a:pPr indent="0" marL="0">
-              <a:buNone/>
-            </a:pPr>
-            <a:r>
-              <a:rPr lang="en-US" sz="900" b="1" spc="400" kern="0" dirty="0">
+            <a:pPr marL="0" indent="0">
+              <a:buNone/>
+            </a:pPr>
+            <a:r>
+              <a:rPr lang="en-US" sz="900" b="1" kern="0" spc="400" dirty="0">
                 <a:solidFill>
                   <a:srgbClr val="03241E">
                     <a:alpha val="55000"/>
@@ -10740,7 +10821,7 @@
           <a:bodyPr wrap="square" rtlCol="0" anchor="ctr"/>
           <a:lstStyle/>
           <a:p>
-            <a:pPr indent="0" marL="0">
+            <a:pPr marL="0" indent="0">
               <a:buNone/>
             </a:pPr>
             <a:r>
@@ -10779,11 +10860,11 @@
           <a:bodyPr wrap="square" rtlCol="0" anchor="ctr"/>
           <a:lstStyle/>
           <a:p>
-            <a:pPr indent="0" marL="0">
-              <a:buNone/>
-            </a:pPr>
-            <a:r>
-              <a:rPr lang="en-US" sz="900" b="1" spc="400" kern="0" dirty="0">
+            <a:pPr marL="0" indent="0">
+              <a:buNone/>
+            </a:pPr>
+            <a:r>
+              <a:rPr lang="en-US" sz="900" b="1" kern="0" spc="400" dirty="0">
                 <a:solidFill>
                   <a:srgbClr val="03241E">
                     <a:alpha val="55000"/>
@@ -10820,7 +10901,7 @@
           <a:bodyPr wrap="square" rtlCol="0" anchor="ctr"/>
           <a:lstStyle/>
           <a:p>
-            <a:pPr indent="0" marL="0">
+            <a:pPr marL="0" indent="0">
               <a:buNone/>
             </a:pPr>
             <a:r>
@@ -10860,6 +10941,13 @@
             <a:prstDash val="solid"/>
           </a:ln>
         </p:spPr>
+        <p:txBody>
+          <a:bodyPr/>
+          <a:lstStyle/>
+          <a:p>
+            <a:endParaRPr lang="en-UZ"/>
+          </a:p>
+        </p:txBody>
       </p:sp>
       <p:sp>
         <p:nvSpPr>
@@ -10882,6 +10970,13 @@
           </a:solidFill>
           <a:ln/>
         </p:spPr>
+        <p:txBody>
+          <a:bodyPr/>
+          <a:lstStyle/>
+          <a:p>
+            <a:endParaRPr lang="en-UZ"/>
+          </a:p>
+        </p:txBody>
       </p:sp>
       <p:sp>
         <p:nvSpPr>
@@ -10904,11 +10999,11 @@
           <a:bodyPr wrap="square" rtlCol="0" anchor="ctr"/>
           <a:lstStyle/>
           <a:p>
-            <a:pPr algn="ctr" indent="0" marL="0">
-              <a:buNone/>
-            </a:pPr>
-            <a:r>
-              <a:rPr lang="en-US" sz="900" b="1" spc="400" kern="0" dirty="0">
+            <a:pPr marL="0" indent="0" algn="ctr">
+              <a:buNone/>
+            </a:pPr>
+            <a:r>
+              <a:rPr lang="en-US" sz="900" b="1" kern="0" spc="400" dirty="0">
                 <a:solidFill>
                   <a:srgbClr val="FDFBF7"/>
                 </a:solidFill>
@@ -10943,7 +11038,7 @@
           <a:bodyPr wrap="square" rtlCol="0" anchor="ctr"/>
           <a:lstStyle/>
           <a:p>
-            <a:pPr algn="r" indent="0" marL="0">
+            <a:pPr marL="0" indent="0" algn="r">
               <a:buNone/>
             </a:pPr>
             <a:r>
@@ -11007,11 +11102,11 @@
           <a:bodyPr wrap="square" rtlCol="0" anchor="ctr"/>
           <a:lstStyle/>
           <a:p>
-            <a:pPr algn="r" indent="0" marL="0">
-              <a:buNone/>
-            </a:pPr>
-            <a:r>
-              <a:rPr lang="en-US" sz="900" spc="300" kern="0" dirty="0">
+            <a:pPr marL="0" indent="0" algn="r">
+              <a:buNone/>
+            </a:pPr>
+            <a:r>
+              <a:rPr lang="en-US" sz="900" kern="0" spc="300" dirty="0">
                 <a:solidFill>
                   <a:srgbClr val="03241E">
                     <a:alpha val="45000"/>
@@ -11051,6 +11146,13 @@
             <a:prstDash val="solid"/>
           </a:ln>
         </p:spPr>
+        <p:txBody>
+          <a:bodyPr/>
+          <a:lstStyle/>
+          <a:p>
+            <a:endParaRPr lang="en-UZ"/>
+          </a:p>
+        </p:txBody>
       </p:sp>
       <p:sp>
         <p:nvSpPr>
@@ -11060,7 +11162,7 @@
         </p:nvSpPr>
         <p:spPr>
           <a:xfrm>
-            <a:off x="1097280" y="640080"/>
+            <a:off x="1097280" y="618308"/>
             <a:ext cx="5486400" cy="274320"/>
           </a:xfrm>
           <a:prstGeom prst="rect">
@@ -11073,11 +11175,11 @@
           <a:bodyPr wrap="square" rtlCol="0" anchor="ctr"/>
           <a:lstStyle/>
           <a:p>
-            <a:pPr indent="0" marL="0">
-              <a:buNone/>
-            </a:pPr>
-            <a:r>
-              <a:rPr lang="en-US" sz="1000" b="1" spc="400" kern="0" dirty="0">
+            <a:pPr marL="0" indent="0">
+              <a:buNone/>
+            </a:pPr>
+            <a:r>
+              <a:rPr lang="en-US" sz="1000" b="1" kern="0" spc="400" dirty="0">
                 <a:solidFill>
                   <a:srgbClr val="03241E">
                     <a:alpha val="60000"/>
@@ -11114,11 +11216,11 @@
           <a:bodyPr wrap="square" rtlCol="0" anchor="ctr"/>
           <a:lstStyle/>
           <a:p>
-            <a:pPr indent="0" marL="0">
-              <a:buNone/>
-            </a:pPr>
-            <a:r>
-              <a:rPr lang="en-US" sz="4200" spc="-100" kern="0" dirty="0">
+            <a:pPr marL="0" indent="0">
+              <a:buNone/>
+            </a:pPr>
+            <a:r>
+              <a:rPr lang="en-US" sz="4200" kern="0" spc="-100" dirty="0">
                 <a:solidFill>
                   <a:srgbClr val="03241E"/>
                 </a:solidFill>
@@ -11128,11 +11230,8 @@
               </a:rPr>
               <a:t>Three kinds of calls. </a:t>
             </a:r>
-            <a:pPr indent="0" marL="0">
-              <a:buNone/>
-            </a:pPr>
-            <a:r>
-              <a:rPr lang="en-US" sz="4200" i="1" spc="-100" kern="0" dirty="0">
+            <a:r>
+              <a:rPr lang="en-US" sz="4200" i="1" kern="0" spc="-100" dirty="0">
                 <a:solidFill>
                   <a:srgbClr val="03241E"/>
                 </a:solidFill>
@@ -11142,11 +11241,8 @@
               </a:rPr>
               <a:t>One steady voice</a:t>
             </a:r>
-            <a:pPr indent="0" marL="0">
-              <a:buNone/>
-            </a:pPr>
-            <a:r>
-              <a:rPr lang="en-US" sz="4200" spc="-100" kern="0" dirty="0">
+            <a:r>
+              <a:rPr lang="en-US" sz="4200" kern="0" spc="-100" dirty="0">
                 <a:solidFill>
                   <a:srgbClr val="03241E"/>
                 </a:solidFill>
@@ -11186,6 +11282,13 @@
             <a:prstDash val="solid"/>
           </a:ln>
         </p:spPr>
+        <p:txBody>
+          <a:bodyPr/>
+          <a:lstStyle/>
+          <a:p>
+            <a:endParaRPr lang="en-UZ"/>
+          </a:p>
+        </p:txBody>
       </p:sp>
       <p:sp>
         <p:nvSpPr>
@@ -11208,7 +11311,7 @@
           <a:bodyPr wrap="square" rtlCol="0" anchor="ctr"/>
           <a:lstStyle/>
           <a:p>
-            <a:pPr indent="0" marL="0">
+            <a:pPr marL="0" indent="0">
               <a:buNone/>
             </a:pPr>
             <a:r>
@@ -11249,11 +11352,11 @@
           <a:bodyPr wrap="square" rtlCol="0" anchor="ctr"/>
           <a:lstStyle/>
           <a:p>
-            <a:pPr algn="r" indent="0" marL="0">
-              <a:buNone/>
-            </a:pPr>
-            <a:r>
-              <a:rPr lang="en-US" sz="900" b="1" spc="400" kern="0" dirty="0">
+            <a:pPr marL="0" indent="0" algn="r">
+              <a:buNone/>
+            </a:pPr>
+            <a:r>
+              <a:rPr lang="en-US" sz="900" b="1" kern="0" spc="400" dirty="0">
                 <a:solidFill>
                   <a:srgbClr val="03241E">
                     <a:alpha val="60000"/>
@@ -11290,7 +11393,7 @@
           <a:bodyPr wrap="square" rtlCol="0" anchor="ctr"/>
           <a:lstStyle/>
           <a:p>
-            <a:pPr indent="0" marL="0">
+            <a:pPr marL="0" indent="0">
               <a:buNone/>
             </a:pPr>
             <a:r>
@@ -11330,6 +11433,13 @@
             <a:prstDash val="solid"/>
           </a:ln>
         </p:spPr>
+        <p:txBody>
+          <a:bodyPr/>
+          <a:lstStyle/>
+          <a:p>
+            <a:endParaRPr lang="en-UZ"/>
+          </a:p>
+        </p:txBody>
       </p:sp>
       <p:sp>
         <p:nvSpPr>
@@ -11352,6 +11462,13 @@
           </a:solidFill>
           <a:ln/>
         </p:spPr>
+        <p:txBody>
+          <a:bodyPr/>
+          <a:lstStyle/>
+          <a:p>
+            <a:endParaRPr lang="en-UZ"/>
+          </a:p>
+        </p:txBody>
       </p:sp>
       <p:sp>
         <p:nvSpPr>
@@ -11374,11 +11491,11 @@
           <a:bodyPr wrap="square" rtlCol="0" anchor="ctr"/>
           <a:lstStyle/>
           <a:p>
-            <a:pPr algn="ctr" indent="0" marL="0">
-              <a:buNone/>
-            </a:pPr>
-            <a:r>
-              <a:rPr lang="en-US" sz="800" b="1" spc="400" kern="0" dirty="0">
+            <a:pPr marL="0" indent="0" algn="ctr">
+              <a:buNone/>
+            </a:pPr>
+            <a:r>
+              <a:rPr lang="en-US" sz="800" b="1" kern="0" spc="400" dirty="0">
                 <a:solidFill>
                   <a:srgbClr val="FDFBF7"/>
                 </a:solidFill>
@@ -11413,7 +11530,7 @@
           <a:bodyPr wrap="square" rtlCol="0" anchor="ctr"/>
           <a:lstStyle/>
           <a:p>
-            <a:pPr algn="r" indent="0" marL="0">
+            <a:pPr marL="0" indent="0" algn="r">
               <a:buNone/>
             </a:pPr>
             <a:r>
@@ -11457,6 +11574,13 @@
             <a:prstDash val="solid"/>
           </a:ln>
         </p:spPr>
+        <p:txBody>
+          <a:bodyPr/>
+          <a:lstStyle/>
+          <a:p>
+            <a:endParaRPr lang="en-UZ"/>
+          </a:p>
+        </p:txBody>
       </p:sp>
       <p:sp>
         <p:nvSpPr>
@@ -11479,7 +11603,7 @@
           <a:bodyPr wrap="square" rtlCol="0" anchor="ctr"/>
           <a:lstStyle/>
           <a:p>
-            <a:pPr indent="0" marL="0">
+            <a:pPr marL="0" indent="0">
               <a:buNone/>
             </a:pPr>
             <a:r>
@@ -11520,11 +11644,11 @@
           <a:bodyPr wrap="square" rtlCol="0" anchor="ctr"/>
           <a:lstStyle/>
           <a:p>
-            <a:pPr algn="r" indent="0" marL="0">
-              <a:buNone/>
-            </a:pPr>
-            <a:r>
-              <a:rPr lang="en-US" sz="900" b="1" spc="400" kern="0" dirty="0">
+            <a:pPr marL="0" indent="0" algn="r">
+              <a:buNone/>
+            </a:pPr>
+            <a:r>
+              <a:rPr lang="en-US" sz="900" b="1" kern="0" spc="400" dirty="0">
                 <a:solidFill>
                   <a:srgbClr val="03241E">
                     <a:alpha val="60000"/>
@@ -11561,7 +11685,7 @@
           <a:bodyPr wrap="square" rtlCol="0" anchor="ctr"/>
           <a:lstStyle/>
           <a:p>
-            <a:pPr indent="0" marL="0">
+            <a:pPr marL="0" indent="0">
               <a:buNone/>
             </a:pPr>
             <a:r>
@@ -11601,6 +11725,13 @@
             <a:prstDash val="solid"/>
           </a:ln>
         </p:spPr>
+        <p:txBody>
+          <a:bodyPr/>
+          <a:lstStyle/>
+          <a:p>
+            <a:endParaRPr lang="en-UZ"/>
+          </a:p>
+        </p:txBody>
       </p:sp>
       <p:sp>
         <p:nvSpPr>
@@ -11623,6 +11754,13 @@
           </a:solidFill>
           <a:ln/>
         </p:spPr>
+        <p:txBody>
+          <a:bodyPr/>
+          <a:lstStyle/>
+          <a:p>
+            <a:endParaRPr lang="en-UZ"/>
+          </a:p>
+        </p:txBody>
       </p:sp>
       <p:sp>
         <p:nvSpPr>
@@ -11645,11 +11783,11 @@
           <a:bodyPr wrap="square" rtlCol="0" anchor="ctr"/>
           <a:lstStyle/>
           <a:p>
-            <a:pPr algn="ctr" indent="0" marL="0">
-              <a:buNone/>
-            </a:pPr>
-            <a:r>
-              <a:rPr lang="en-US" sz="800" b="1" spc="400" kern="0" dirty="0">
+            <a:pPr marL="0" indent="0" algn="ctr">
+              <a:buNone/>
+            </a:pPr>
+            <a:r>
+              <a:rPr lang="en-US" sz="800" b="1" kern="0" spc="400" dirty="0">
                 <a:solidFill>
                   <a:srgbClr val="FDFBF7"/>
                 </a:solidFill>
@@ -11684,7 +11822,7 @@
           <a:bodyPr wrap="square" rtlCol="0" anchor="ctr"/>
           <a:lstStyle/>
           <a:p>
-            <a:pPr algn="r" indent="0" marL="0">
+            <a:pPr marL="0" indent="0" algn="r">
               <a:buNone/>
             </a:pPr>
             <a:r>
@@ -11728,6 +11866,13 @@
             <a:prstDash val="solid"/>
           </a:ln>
         </p:spPr>
+        <p:txBody>
+          <a:bodyPr/>
+          <a:lstStyle/>
+          <a:p>
+            <a:endParaRPr lang="en-UZ"/>
+          </a:p>
+        </p:txBody>
       </p:sp>
       <p:sp>
         <p:nvSpPr>
@@ -11750,7 +11895,7 @@
           <a:bodyPr wrap="square" rtlCol="0" anchor="ctr"/>
           <a:lstStyle/>
           <a:p>
-            <a:pPr indent="0" marL="0">
+            <a:pPr marL="0" indent="0">
               <a:buNone/>
             </a:pPr>
             <a:r>
@@ -11791,11 +11936,11 @@
           <a:bodyPr wrap="square" rtlCol="0" anchor="ctr"/>
           <a:lstStyle/>
           <a:p>
-            <a:pPr algn="r" indent="0" marL="0">
-              <a:buNone/>
-            </a:pPr>
-            <a:r>
-              <a:rPr lang="en-US" sz="900" b="1" spc="400" kern="0" dirty="0">
+            <a:pPr marL="0" indent="0" algn="r">
+              <a:buNone/>
+            </a:pPr>
+            <a:r>
+              <a:rPr lang="en-US" sz="900" b="1" kern="0" spc="400" dirty="0">
                 <a:solidFill>
                   <a:srgbClr val="03241E">
                     <a:alpha val="60000"/>
@@ -11832,7 +11977,7 @@
           <a:bodyPr wrap="square" rtlCol="0" anchor="ctr"/>
           <a:lstStyle/>
           <a:p>
-            <a:pPr indent="0" marL="0">
+            <a:pPr marL="0" indent="0">
               <a:buNone/>
             </a:pPr>
             <a:r>
@@ -11872,6 +12017,13 @@
             <a:prstDash val="solid"/>
           </a:ln>
         </p:spPr>
+        <p:txBody>
+          <a:bodyPr/>
+          <a:lstStyle/>
+          <a:p>
+            <a:endParaRPr lang="en-UZ"/>
+          </a:p>
+        </p:txBody>
       </p:sp>
       <p:sp>
         <p:nvSpPr>
@@ -11894,6 +12046,13 @@
           </a:solidFill>
           <a:ln/>
         </p:spPr>
+        <p:txBody>
+          <a:bodyPr/>
+          <a:lstStyle/>
+          <a:p>
+            <a:endParaRPr lang="en-UZ"/>
+          </a:p>
+        </p:txBody>
       </p:sp>
       <p:sp>
         <p:nvSpPr>
@@ -11916,11 +12075,11 @@
           <a:bodyPr wrap="square" rtlCol="0" anchor="ctr"/>
           <a:lstStyle/>
           <a:p>
-            <a:pPr algn="ctr" indent="0" marL="0">
-              <a:buNone/>
-            </a:pPr>
-            <a:r>
-              <a:rPr lang="en-US" sz="800" b="1" spc="400" kern="0" dirty="0">
+            <a:pPr marL="0" indent="0" algn="ctr">
+              <a:buNone/>
+            </a:pPr>
+            <a:r>
+              <a:rPr lang="en-US" sz="800" b="1" kern="0" spc="400" dirty="0">
                 <a:solidFill>
                   <a:srgbClr val="FDFBF7"/>
                 </a:solidFill>
@@ -11955,7 +12114,7 @@
           <a:bodyPr wrap="square" rtlCol="0" anchor="ctr"/>
           <a:lstStyle/>
           <a:p>
-            <a:pPr algn="r" indent="0" marL="0">
+            <a:pPr marL="0" indent="0" algn="r">
               <a:buNone/>
             </a:pPr>
             <a:r>
@@ -11997,6 +12156,13 @@
             <a:prstDash val="solid"/>
           </a:ln>
         </p:spPr>
+        <p:txBody>
+          <a:bodyPr/>
+          <a:lstStyle/>
+          <a:p>
+            <a:endParaRPr lang="en-UZ"/>
+          </a:p>
+        </p:txBody>
       </p:sp>
       <p:sp>
         <p:nvSpPr>
@@ -12019,11 +12185,11 @@
           <a:bodyPr wrap="square" rtlCol="0" anchor="ctr"/>
           <a:lstStyle/>
           <a:p>
-            <a:pPr indent="0" marL="0">
-              <a:buNone/>
-            </a:pPr>
-            <a:r>
-              <a:rPr lang="en-US" sz="900" b="1" spc="400" kern="0" dirty="0">
+            <a:pPr marL="0" indent="0">
+              <a:buNone/>
+            </a:pPr>
+            <a:r>
+              <a:rPr lang="en-US" sz="900" b="1" kern="0" spc="400" dirty="0">
                 <a:solidFill>
                   <a:srgbClr val="03241E">
                     <a:alpha val="60000"/>
@@ -12060,7 +12226,7 @@
           <a:bodyPr wrap="square" rtlCol="0" anchor="ctr"/>
           <a:lstStyle/>
           <a:p>
-            <a:pPr algn="r" indent="0" marL="0">
+            <a:pPr marL="0" indent="0" algn="r">
               <a:buNone/>
             </a:pPr>
             <a:r>
@@ -12106,6 +12272,13 @@
             <a:prstDash val="solid"/>
           </a:ln>
         </p:spPr>
+        <p:txBody>
+          <a:bodyPr/>
+          <a:lstStyle/>
+          <a:p>
+            <a:endParaRPr lang="en-UZ"/>
+          </a:p>
+        </p:txBody>
       </p:sp>
       <p:sp>
         <p:nvSpPr>
@@ -12128,7 +12301,7 @@
           <a:bodyPr wrap="square" rtlCol="0" anchor="ctr"/>
           <a:lstStyle/>
           <a:p>
-            <a:pPr algn="ctr" indent="0" marL="0">
+            <a:pPr marL="0" indent="0" algn="ctr">
               <a:buNone/>
             </a:pPr>
             <a:r>
@@ -12172,6 +12345,13 @@
             <a:prstDash val="solid"/>
           </a:ln>
         </p:spPr>
+        <p:txBody>
+          <a:bodyPr/>
+          <a:lstStyle/>
+          <a:p>
+            <a:endParaRPr lang="en-UZ"/>
+          </a:p>
+        </p:txBody>
       </p:sp>
       <p:sp>
         <p:nvSpPr>
@@ -12194,7 +12374,7 @@
           <a:bodyPr wrap="square" rtlCol="0" anchor="ctr"/>
           <a:lstStyle/>
           <a:p>
-            <a:pPr algn="ctr" indent="0" marL="0">
+            <a:pPr marL="0" indent="0" algn="ctr">
               <a:buNone/>
             </a:pPr>
             <a:r>
@@ -12238,6 +12418,13 @@
             <a:prstDash val="solid"/>
           </a:ln>
         </p:spPr>
+        <p:txBody>
+          <a:bodyPr/>
+          <a:lstStyle/>
+          <a:p>
+            <a:endParaRPr lang="en-UZ"/>
+          </a:p>
+        </p:txBody>
       </p:sp>
       <p:sp>
         <p:nvSpPr>
@@ -12260,7 +12447,7 @@
           <a:bodyPr wrap="square" rtlCol="0" anchor="ctr"/>
           <a:lstStyle/>
           <a:p>
-            <a:pPr algn="ctr" indent="0" marL="0">
+            <a:pPr marL="0" indent="0" algn="ctr">
               <a:buNone/>
             </a:pPr>
             <a:r>
@@ -12304,6 +12491,13 @@
             <a:prstDash val="solid"/>
           </a:ln>
         </p:spPr>
+        <p:txBody>
+          <a:bodyPr/>
+          <a:lstStyle/>
+          <a:p>
+            <a:endParaRPr lang="en-UZ"/>
+          </a:p>
+        </p:txBody>
       </p:sp>
       <p:sp>
         <p:nvSpPr>
@@ -12326,7 +12520,7 @@
           <a:bodyPr wrap="square" rtlCol="0" anchor="ctr"/>
           <a:lstStyle/>
           <a:p>
-            <a:pPr algn="ctr" indent="0" marL="0">
+            <a:pPr marL="0" indent="0" algn="ctr">
               <a:buNone/>
             </a:pPr>
             <a:r>
@@ -12370,6 +12564,13 @@
             <a:prstDash val="solid"/>
           </a:ln>
         </p:spPr>
+        <p:txBody>
+          <a:bodyPr/>
+          <a:lstStyle/>
+          <a:p>
+            <a:endParaRPr lang="en-UZ"/>
+          </a:p>
+        </p:txBody>
       </p:sp>
       <p:sp>
         <p:nvSpPr>
@@ -12392,7 +12593,7 @@
           <a:bodyPr wrap="square" rtlCol="0" anchor="ctr"/>
           <a:lstStyle/>
           <a:p>
-            <a:pPr algn="ctr" indent="0" marL="0">
+            <a:pPr marL="0" indent="0" algn="ctr">
               <a:buNone/>
             </a:pPr>
             <a:r>
@@ -12436,6 +12637,13 @@
             <a:prstDash val="solid"/>
           </a:ln>
         </p:spPr>
+        <p:txBody>
+          <a:bodyPr/>
+          <a:lstStyle/>
+          <a:p>
+            <a:endParaRPr lang="en-UZ"/>
+          </a:p>
+        </p:txBody>
       </p:sp>
       <p:sp>
         <p:nvSpPr>
@@ -12458,7 +12666,7 @@
           <a:bodyPr wrap="square" rtlCol="0" anchor="ctr"/>
           <a:lstStyle/>
           <a:p>
-            <a:pPr algn="ctr" indent="0" marL="0">
+            <a:pPr marL="0" indent="0" algn="ctr">
               <a:buNone/>
             </a:pPr>
             <a:r>
@@ -12522,11 +12730,11 @@
           <a:bodyPr wrap="square" rtlCol="0" anchor="ctr"/>
           <a:lstStyle/>
           <a:p>
-            <a:pPr algn="r" indent="0" marL="0">
-              <a:buNone/>
-            </a:pPr>
-            <a:r>
-              <a:rPr lang="en-US" sz="900" spc="300" kern="0" dirty="0">
+            <a:pPr marL="0" indent="0" algn="r">
+              <a:buNone/>
+            </a:pPr>
+            <a:r>
+              <a:rPr lang="en-US" sz="900" kern="0" spc="300" dirty="0">
                 <a:solidFill>
                   <a:srgbClr val="03241E">
                     <a:alpha val="45000"/>
@@ -12566,6 +12774,13 @@
             <a:prstDash val="solid"/>
           </a:ln>
         </p:spPr>
+        <p:txBody>
+          <a:bodyPr/>
+          <a:lstStyle/>
+          <a:p>
+            <a:endParaRPr lang="en-UZ"/>
+          </a:p>
+        </p:txBody>
       </p:sp>
       <p:sp>
         <p:nvSpPr>
@@ -12575,7 +12790,7 @@
         </p:nvSpPr>
         <p:spPr>
           <a:xfrm>
-            <a:off x="1097280" y="640080"/>
+            <a:off x="1097280" y="618308"/>
             <a:ext cx="5486400" cy="274320"/>
           </a:xfrm>
           <a:prstGeom prst="rect">
@@ -12588,11 +12803,11 @@
           <a:bodyPr wrap="square" rtlCol="0" anchor="ctr"/>
           <a:lstStyle/>
           <a:p>
-            <a:pPr indent="0" marL="0">
-              <a:buNone/>
-            </a:pPr>
-            <a:r>
-              <a:rPr lang="en-US" sz="1000" b="1" spc="400" kern="0" dirty="0">
+            <a:pPr marL="0" indent="0">
+              <a:buNone/>
+            </a:pPr>
+            <a:r>
+              <a:rPr lang="en-US" sz="1000" b="1" kern="0" spc="400" dirty="0">
                 <a:solidFill>
                   <a:srgbClr val="03241E">
                     <a:alpha val="60000"/>
@@ -12629,11 +12844,11 @@
           <a:bodyPr wrap="square" rtlCol="0" anchor="ctr"/>
           <a:lstStyle/>
           <a:p>
-            <a:pPr indent="0" marL="0">
-              <a:buNone/>
-            </a:pPr>
-            <a:r>
-              <a:rPr lang="en-US" sz="4000" spc="-100" kern="0" dirty="0">
+            <a:pPr marL="0" indent="0">
+              <a:buNone/>
+            </a:pPr>
+            <a:r>
+              <a:rPr lang="en-US" sz="4000" kern="0" spc="-100" dirty="0">
                 <a:solidFill>
                   <a:srgbClr val="03241E"/>
                 </a:solidFill>
@@ -12643,11 +12858,8 @@
               </a:rPr>
               <a:t>I lived the missed call </a:t>
             </a:r>
-            <a:pPr indent="0" marL="0">
-              <a:buNone/>
-            </a:pPr>
-            <a:r>
-              <a:rPr lang="en-US" sz="4000" i="1" spc="-100" kern="0" dirty="0">
+            <a:r>
+              <a:rPr lang="en-US" sz="4000" i="1" kern="0" spc="-100" dirty="0">
                 <a:solidFill>
                   <a:srgbClr val="03241E"/>
                 </a:solidFill>
@@ -12657,11 +12869,8 @@
               </a:rPr>
               <a:t>every shift</a:t>
             </a:r>
-            <a:pPr indent="0" marL="0">
-              <a:buNone/>
-            </a:pPr>
-            <a:r>
-              <a:rPr lang="en-US" sz="4000" spc="-100" kern="0" dirty="0">
+            <a:r>
+              <a:rPr lang="en-US" sz="4000" kern="0" spc="-100" dirty="0">
                 <a:solidFill>
                   <a:srgbClr val="03241E"/>
                 </a:solidFill>
@@ -12696,7 +12905,7 @@
           <a:bodyPr wrap="square" rtlCol="0" anchor="t"/>
           <a:lstStyle/>
           <a:p>
-            <a:pPr indent="0" marL="0">
+            <a:pPr marL="0" indent="0">
               <a:buNone/>
             </a:pPr>
             <a:r>
@@ -12735,7 +12944,7 @@
           <a:bodyPr wrap="square" rtlCol="0" anchor="t"/>
           <a:lstStyle/>
           <a:p>
-            <a:pPr indent="0" marL="0">
+            <a:pPr marL="0" indent="0">
               <a:buNone/>
             </a:pPr>
             <a:r>
@@ -12747,7 +12956,7 @@
                 <a:ea typeface="Inter" pitchFamily="34" charset="-122"/>
                 <a:cs typeface="Inter" pitchFamily="34" charset="-120"/>
               </a:rPr>
-              <a:t>I built Arryve for the person behind the desk. Hospitality is human; the phone work is the part we can take off their plate.</a:t>
+              <a:t>We built Arryve for the person behind the desk. Hospitality is human; the phone work is the part we can take off their plate.</a:t>
             </a:r>
             <a:endParaRPr lang="en-US" sz="1300" dirty="0"/>
           </a:p>
@@ -12779,6 +12988,13 @@
             <a:prstDash val="solid"/>
           </a:ln>
         </p:spPr>
+        <p:txBody>
+          <a:bodyPr/>
+          <a:lstStyle/>
+          <a:p>
+            <a:endParaRPr lang="en-UZ"/>
+          </a:p>
+        </p:txBody>
       </p:sp>
       <p:sp>
         <p:nvSpPr>
@@ -12801,11 +13017,11 @@
           <a:bodyPr wrap="square" rtlCol="0" anchor="ctr"/>
           <a:lstStyle/>
           <a:p>
-            <a:pPr indent="0" marL="0">
-              <a:buNone/>
-            </a:pPr>
-            <a:r>
-              <a:rPr lang="en-US" sz="1000" b="1" spc="400" kern="0" dirty="0">
+            <a:pPr marL="0" indent="0">
+              <a:buNone/>
+            </a:pPr>
+            <a:r>
+              <a:rPr lang="en-US" sz="1000" b="1" kern="0" spc="400" dirty="0">
                 <a:solidFill>
                   <a:srgbClr val="03241E">
                     <a:alpha val="60000"/>
@@ -12840,6 +13056,13 @@
           </a:solidFill>
           <a:ln/>
         </p:spPr>
+        <p:txBody>
+          <a:bodyPr/>
+          <a:lstStyle/>
+          <a:p>
+            <a:endParaRPr lang="en-UZ"/>
+          </a:p>
+        </p:txBody>
       </p:sp>
       <p:sp>
         <p:nvSpPr>
@@ -12862,7 +13085,7 @@
           <a:bodyPr wrap="square" rtlCol="0" anchor="ctr"/>
           <a:lstStyle/>
           <a:p>
-            <a:pPr indent="0" marL="0">
+            <a:pPr marL="0" indent="0">
               <a:buNone/>
             </a:pPr>
             <a:r>
@@ -12901,7 +13124,7 @@
           <a:bodyPr wrap="square" rtlCol="0" anchor="ctr"/>
           <a:lstStyle/>
           <a:p>
-            <a:pPr indent="0" marL="0">
+            <a:pPr marL="0" indent="0">
               <a:buNone/>
             </a:pPr>
             <a:r>
@@ -12938,6 +13161,13 @@
           </a:solidFill>
           <a:ln/>
         </p:spPr>
+        <p:txBody>
+          <a:bodyPr/>
+          <a:lstStyle/>
+          <a:p>
+            <a:endParaRPr lang="en-UZ"/>
+          </a:p>
+        </p:txBody>
       </p:sp>
       <p:sp>
         <p:nvSpPr>
@@ -12960,7 +13190,7 @@
           <a:bodyPr wrap="square" rtlCol="0" anchor="ctr"/>
           <a:lstStyle/>
           <a:p>
-            <a:pPr indent="0" marL="0">
+            <a:pPr marL="0" indent="0">
               <a:buNone/>
             </a:pPr>
             <a:r>
@@ -12999,7 +13229,7 @@
           <a:bodyPr wrap="square" rtlCol="0" anchor="ctr"/>
           <a:lstStyle/>
           <a:p>
-            <a:pPr indent="0" marL="0">
+            <a:pPr marL="0" indent="0">
               <a:buNone/>
             </a:pPr>
             <a:r>
@@ -13036,6 +13266,13 @@
           </a:solidFill>
           <a:ln/>
         </p:spPr>
+        <p:txBody>
+          <a:bodyPr/>
+          <a:lstStyle/>
+          <a:p>
+            <a:endParaRPr lang="en-UZ"/>
+          </a:p>
+        </p:txBody>
       </p:sp>
       <p:sp>
         <p:nvSpPr>
@@ -13058,7 +13295,7 @@
           <a:bodyPr wrap="square" rtlCol="0" anchor="ctr"/>
           <a:lstStyle/>
           <a:p>
-            <a:pPr indent="0" marL="0">
+            <a:pPr marL="0" indent="0">
               <a:buNone/>
             </a:pPr>
             <a:r>
@@ -13097,7 +13334,7 @@
           <a:bodyPr wrap="square" rtlCol="0" anchor="ctr"/>
           <a:lstStyle/>
           <a:p>
-            <a:pPr indent="0" marL="0">
+            <a:pPr marL="0" indent="0">
               <a:buNone/>
             </a:pPr>
             <a:r>
@@ -13134,6 +13371,13 @@
           </a:solidFill>
           <a:ln/>
         </p:spPr>
+        <p:txBody>
+          <a:bodyPr/>
+          <a:lstStyle/>
+          <a:p>
+            <a:endParaRPr lang="en-UZ"/>
+          </a:p>
+        </p:txBody>
       </p:sp>
       <p:sp>
         <p:nvSpPr>
@@ -13156,7 +13400,7 @@
           <a:bodyPr wrap="square" rtlCol="0" anchor="ctr"/>
           <a:lstStyle/>
           <a:p>
-            <a:pPr indent="0" marL="0">
+            <a:pPr marL="0" indent="0">
               <a:buNone/>
             </a:pPr>
             <a:r>
@@ -13195,7 +13439,7 @@
           <a:bodyPr wrap="square" rtlCol="0" anchor="ctr"/>
           <a:lstStyle/>
           <a:p>
-            <a:pPr indent="0" marL="0">
+            <a:pPr marL="0" indent="0">
               <a:buNone/>
             </a:pPr>
             <a:r>
@@ -13259,11 +13503,11 @@
           <a:bodyPr wrap="square" rtlCol="0" anchor="ctr"/>
           <a:lstStyle/>
           <a:p>
-            <a:pPr algn="r" indent="0" marL="0">
-              <a:buNone/>
-            </a:pPr>
-            <a:r>
-              <a:rPr lang="en-US" sz="900" spc="300" kern="0" dirty="0">
+            <a:pPr marL="0" indent="0" algn="r">
+              <a:buNone/>
+            </a:pPr>
+            <a:r>
+              <a:rPr lang="en-US" sz="900" kern="0" spc="300" dirty="0">
                 <a:solidFill>
                   <a:srgbClr val="03241E">
                     <a:alpha val="45000"/>
@@ -13303,6 +13547,13 @@
             <a:prstDash val="solid"/>
           </a:ln>
         </p:spPr>
+        <p:txBody>
+          <a:bodyPr/>
+          <a:lstStyle/>
+          <a:p>
+            <a:endParaRPr lang="en-UZ"/>
+          </a:p>
+        </p:txBody>
       </p:sp>
       <p:sp>
         <p:nvSpPr>
@@ -13312,7 +13563,7 @@
         </p:nvSpPr>
         <p:spPr>
           <a:xfrm>
-            <a:off x="1097280" y="640080"/>
+            <a:off x="1097280" y="618308"/>
             <a:ext cx="5486400" cy="274320"/>
           </a:xfrm>
           <a:prstGeom prst="rect">
@@ -13325,11 +13576,11 @@
           <a:bodyPr wrap="square" rtlCol="0" anchor="ctr"/>
           <a:lstStyle/>
           <a:p>
-            <a:pPr indent="0" marL="0">
-              <a:buNone/>
-            </a:pPr>
-            <a:r>
-              <a:rPr lang="en-US" sz="1000" b="1" spc="400" kern="0" dirty="0">
+            <a:pPr marL="0" indent="0">
+              <a:buNone/>
+            </a:pPr>
+            <a:r>
+              <a:rPr lang="en-US" sz="1000" b="1" kern="0" spc="400" dirty="0">
                 <a:solidFill>
                   <a:srgbClr val="03241E">
                     <a:alpha val="60000"/>
@@ -13366,11 +13617,11 @@
           <a:bodyPr wrap="square" rtlCol="0" anchor="ctr"/>
           <a:lstStyle/>
           <a:p>
-            <a:pPr indent="0" marL="0">
-              <a:buNone/>
-            </a:pPr>
-            <a:r>
-              <a:rPr lang="en-US" sz="4200" spc="-100" kern="0" dirty="0">
+            <a:pPr marL="0" indent="0">
+              <a:buNone/>
+            </a:pPr>
+            <a:r>
+              <a:rPr lang="en-US" sz="4200" kern="0" spc="-100" dirty="0">
                 <a:solidFill>
                   <a:srgbClr val="03241E"/>
                 </a:solidFill>
@@ -13380,11 +13631,8 @@
               </a:rPr>
               <a:t>A large, </a:t>
             </a:r>
-            <a:pPr indent="0" marL="0">
-              <a:buNone/>
-            </a:pPr>
-            <a:r>
-              <a:rPr lang="en-US" sz="4200" spc="-100" kern="0" dirty="0">
+            <a:r>
+              <a:rPr lang="en-US" sz="4200" kern="0" spc="-100" dirty="0">
                 <a:solidFill>
                   <a:srgbClr val="03241E"/>
                 </a:solidFill>
@@ -13397,11 +13645,8 @@
               </a:rPr>
               <a:t>underserved wedge</a:t>
             </a:r>
-            <a:pPr indent="0" marL="0">
-              <a:buNone/>
-            </a:pPr>
-            <a:r>
-              <a:rPr lang="en-US" sz="4200" spc="-100" kern="0" dirty="0">
+            <a:r>
+              <a:rPr lang="en-US" sz="4200" kern="0" spc="-100" dirty="0">
                 <a:solidFill>
                   <a:srgbClr val="03241E"/>
                 </a:solidFill>
@@ -13441,6 +13686,13 @@
             <a:prstDash val="solid"/>
           </a:ln>
         </p:spPr>
+        <p:txBody>
+          <a:bodyPr/>
+          <a:lstStyle/>
+          <a:p>
+            <a:endParaRPr lang="en-UZ"/>
+          </a:p>
+        </p:txBody>
       </p:sp>
       <p:sp>
         <p:nvSpPr>
@@ -13463,11 +13715,11 @@
           <a:bodyPr wrap="square" rtlCol="0" anchor="ctr"/>
           <a:lstStyle/>
           <a:p>
-            <a:pPr indent="0" marL="0">
-              <a:buNone/>
-            </a:pPr>
-            <a:r>
-              <a:rPr lang="en-US" sz="5600" spc="-200" kern="0" dirty="0">
+            <a:pPr marL="0" indent="0">
+              <a:buNone/>
+            </a:pPr>
+            <a:r>
+              <a:rPr lang="en-US" sz="5600" kern="0" spc="-200" dirty="0">
                 <a:solidFill>
                   <a:srgbClr val="03241E"/>
                 </a:solidFill>
@@ -13502,11 +13754,11 @@
           <a:bodyPr wrap="square" rtlCol="0" anchor="ctr"/>
           <a:lstStyle/>
           <a:p>
-            <a:pPr indent="0" marL="0">
-              <a:buNone/>
-            </a:pPr>
-            <a:r>
-              <a:rPr lang="en-US" sz="1000" b="1" spc="400" kern="0" dirty="0">
+            <a:pPr marL="0" indent="0">
+              <a:buNone/>
+            </a:pPr>
+            <a:r>
+              <a:rPr lang="en-US" sz="1000" b="1" kern="0" spc="400" dirty="0">
                 <a:solidFill>
                   <a:srgbClr val="03241E">
                     <a:alpha val="60000"/>
@@ -13543,7 +13795,7 @@
           <a:bodyPr wrap="square" rtlCol="0" anchor="ctr"/>
           <a:lstStyle/>
           <a:p>
-            <a:pPr indent="0" marL="0">
+            <a:pPr marL="0" indent="0">
               <a:buNone/>
             </a:pPr>
             <a:r>
@@ -13587,6 +13839,13 @@
             <a:prstDash val="solid"/>
           </a:ln>
         </p:spPr>
+        <p:txBody>
+          <a:bodyPr/>
+          <a:lstStyle/>
+          <a:p>
+            <a:endParaRPr lang="en-UZ"/>
+          </a:p>
+        </p:txBody>
       </p:sp>
       <p:sp>
         <p:nvSpPr>
@@ -13609,11 +13868,11 @@
           <a:bodyPr wrap="square" rtlCol="0" anchor="ctr"/>
           <a:lstStyle/>
           <a:p>
-            <a:pPr indent="0" marL="0">
-              <a:buNone/>
-            </a:pPr>
-            <a:r>
-              <a:rPr lang="en-US" sz="5600" spc="-200" kern="0" dirty="0">
+            <a:pPr marL="0" indent="0">
+              <a:buNone/>
+            </a:pPr>
+            <a:r>
+              <a:rPr lang="en-US" sz="5600" kern="0" spc="-200" dirty="0">
                 <a:solidFill>
                   <a:srgbClr val="FDFBF7"/>
                 </a:solidFill>
@@ -13648,11 +13907,11 @@
           <a:bodyPr wrap="square" rtlCol="0" anchor="ctr"/>
           <a:lstStyle/>
           <a:p>
-            <a:pPr indent="0" marL="0">
-              <a:buNone/>
-            </a:pPr>
-            <a:r>
-              <a:rPr lang="en-US" sz="1000" b="1" spc="400" kern="0" dirty="0">
+            <a:pPr marL="0" indent="0">
+              <a:buNone/>
+            </a:pPr>
+            <a:r>
+              <a:rPr lang="en-US" sz="1000" b="1" kern="0" spc="400" dirty="0">
                 <a:solidFill>
                   <a:srgbClr val="FDFBF7">
                     <a:alpha val="75000"/>
@@ -13689,7 +13948,7 @@
           <a:bodyPr wrap="square" rtlCol="0" anchor="ctr"/>
           <a:lstStyle/>
           <a:p>
-            <a:pPr indent="0" marL="0">
+            <a:pPr marL="0" indent="0">
               <a:buNone/>
             </a:pPr>
             <a:r>
@@ -13735,6 +13994,13 @@
             <a:prstDash val="solid"/>
           </a:ln>
         </p:spPr>
+        <p:txBody>
+          <a:bodyPr/>
+          <a:lstStyle/>
+          <a:p>
+            <a:endParaRPr lang="en-UZ"/>
+          </a:p>
+        </p:txBody>
       </p:sp>
       <p:sp>
         <p:nvSpPr>
@@ -13757,11 +14023,11 @@
           <a:bodyPr wrap="square" rtlCol="0" anchor="ctr"/>
           <a:lstStyle/>
           <a:p>
-            <a:pPr indent="0" marL="0">
-              <a:buNone/>
-            </a:pPr>
-            <a:r>
-              <a:rPr lang="en-US" sz="5600" spc="-200" kern="0" dirty="0">
+            <a:pPr marL="0" indent="0">
+              <a:buNone/>
+            </a:pPr>
+            <a:r>
+              <a:rPr lang="en-US" sz="5600" kern="0" spc="-200" dirty="0">
                 <a:solidFill>
                   <a:srgbClr val="03241E"/>
                 </a:solidFill>
@@ -13796,11 +14062,11 @@
           <a:bodyPr wrap="square" rtlCol="0" anchor="ctr"/>
           <a:lstStyle/>
           <a:p>
-            <a:pPr indent="0" marL="0">
-              <a:buNone/>
-            </a:pPr>
-            <a:r>
-              <a:rPr lang="en-US" sz="1000" b="1" spc="400" kern="0" dirty="0">
+            <a:pPr marL="0" indent="0">
+              <a:buNone/>
+            </a:pPr>
+            <a:r>
+              <a:rPr lang="en-US" sz="1000" b="1" kern="0" spc="400" dirty="0">
                 <a:solidFill>
                   <a:srgbClr val="03241E">
                     <a:alpha val="60000"/>
@@ -13837,7 +14103,7 @@
           <a:bodyPr wrap="square" rtlCol="0" anchor="ctr"/>
           <a:lstStyle/>
           <a:p>
-            <a:pPr indent="0" marL="0">
+            <a:pPr marL="0" indent="0">
               <a:buNone/>
             </a:pPr>
             <a:r>
@@ -13879,6 +14145,13 @@
             <a:prstDash val="solid"/>
           </a:ln>
         </p:spPr>
+        <p:txBody>
+          <a:bodyPr/>
+          <a:lstStyle/>
+          <a:p>
+            <a:endParaRPr lang="en-UZ"/>
+          </a:p>
+        </p:txBody>
       </p:sp>
       <p:sp>
         <p:nvSpPr>
@@ -13901,11 +14174,11 @@
           <a:bodyPr wrap="square" rtlCol="0" anchor="ctr"/>
           <a:lstStyle/>
           <a:p>
-            <a:pPr indent="0" marL="0">
-              <a:buNone/>
-            </a:pPr>
-            <a:r>
-              <a:rPr lang="en-US" sz="1000" b="1" spc="400" kern="0" dirty="0">
+            <a:pPr marL="0" indent="0">
+              <a:buNone/>
+            </a:pPr>
+            <a:r>
+              <a:rPr lang="en-US" sz="1000" b="1" kern="0" spc="400" dirty="0">
                 <a:solidFill>
                   <a:srgbClr val="03241E">
                     <a:alpha val="55000"/>
@@ -13942,7 +14215,7 @@
           <a:bodyPr wrap="square" rtlCol="0" anchor="ctr"/>
           <a:lstStyle/>
           <a:p>
-            <a:pPr indent="0" marL="0">
+            <a:pPr marL="0" indent="0">
               <a:buNone/>
             </a:pPr>
             <a:r>
@@ -13981,11 +14254,11 @@
           <a:bodyPr wrap="square" rtlCol="0" anchor="ctr"/>
           <a:lstStyle/>
           <a:p>
-            <a:pPr indent="0" marL="0">
-              <a:buNone/>
-            </a:pPr>
-            <a:r>
-              <a:rPr lang="en-US" sz="1000" b="1" spc="400" kern="0" dirty="0">
+            <a:pPr marL="0" indent="0">
+              <a:buNone/>
+            </a:pPr>
+            <a:r>
+              <a:rPr lang="en-US" sz="1000" b="1" kern="0" spc="400" dirty="0">
                 <a:solidFill>
                   <a:srgbClr val="03241E">
                     <a:alpha val="55000"/>
@@ -14022,7 +14295,7 @@
           <a:bodyPr wrap="square" rtlCol="0" anchor="ctr"/>
           <a:lstStyle/>
           <a:p>
-            <a:pPr indent="0" marL="0">
+            <a:pPr marL="0" indent="0">
               <a:buNone/>
             </a:pPr>
             <a:r>
@@ -14086,11 +14359,11 @@
           <a:bodyPr wrap="square" rtlCol="0" anchor="ctr"/>
           <a:lstStyle/>
           <a:p>
-            <a:pPr algn="r" indent="0" marL="0">
-              <a:buNone/>
-            </a:pPr>
-            <a:r>
-              <a:rPr lang="en-US" sz="900" spc="300" kern="0" dirty="0">
+            <a:pPr marL="0" indent="0" algn="r">
+              <a:buNone/>
+            </a:pPr>
+            <a:r>
+              <a:rPr lang="en-US" sz="900" kern="0" spc="300" dirty="0">
                 <a:solidFill>
                   <a:srgbClr val="03241E">
                     <a:alpha val="45000"/>
@@ -14130,6 +14403,13 @@
             <a:prstDash val="solid"/>
           </a:ln>
         </p:spPr>
+        <p:txBody>
+          <a:bodyPr/>
+          <a:lstStyle/>
+          <a:p>
+            <a:endParaRPr lang="en-UZ"/>
+          </a:p>
+        </p:txBody>
       </p:sp>
       <p:sp>
         <p:nvSpPr>
@@ -14139,7 +14419,7 @@
         </p:nvSpPr>
         <p:spPr>
           <a:xfrm>
-            <a:off x="1097280" y="640080"/>
+            <a:off x="1097280" y="618308"/>
             <a:ext cx="5486400" cy="274320"/>
           </a:xfrm>
           <a:prstGeom prst="rect">
@@ -14152,11 +14432,11 @@
           <a:bodyPr wrap="square" rtlCol="0" anchor="ctr"/>
           <a:lstStyle/>
           <a:p>
-            <a:pPr indent="0" marL="0">
-              <a:buNone/>
-            </a:pPr>
-            <a:r>
-              <a:rPr lang="en-US" sz="1000" b="1" spc="400" kern="0" dirty="0">
+            <a:pPr marL="0" indent="0">
+              <a:buNone/>
+            </a:pPr>
+            <a:r>
+              <a:rPr lang="en-US" sz="1000" b="1" kern="0" spc="400" dirty="0">
                 <a:solidFill>
                   <a:srgbClr val="03241E">
                     <a:alpha val="60000"/>
@@ -14193,11 +14473,11 @@
           <a:bodyPr wrap="square" rtlCol="0" anchor="ctr"/>
           <a:lstStyle/>
           <a:p>
-            <a:pPr indent="0" marL="0">
-              <a:buNone/>
-            </a:pPr>
-            <a:r>
-              <a:rPr lang="en-US" sz="3800" spc="-100" kern="0" dirty="0">
+            <a:pPr marL="0" indent="0">
+              <a:buNone/>
+            </a:pPr>
+            <a:r>
+              <a:rPr lang="en-US" sz="3800" kern="0" spc="-100" dirty="0">
                 <a:solidFill>
                   <a:srgbClr val="03241E"/>
                 </a:solidFill>
@@ -14207,11 +14487,8 @@
               </a:rPr>
               <a:t>Start in Cincinnati. </a:t>
             </a:r>
-            <a:pPr indent="0" marL="0">
-              <a:buNone/>
-            </a:pPr>
-            <a:r>
-              <a:rPr lang="en-US" sz="3800" i="1" spc="-100" kern="0" dirty="0">
+            <a:r>
+              <a:rPr lang="en-US" sz="3800" i="1" kern="0" spc="-100" dirty="0">
                 <a:solidFill>
                   <a:srgbClr val="03241E"/>
                 </a:solidFill>
@@ -14221,11 +14498,8 @@
               </a:rPr>
               <a:t>Expand on trust</a:t>
             </a:r>
-            <a:pPr indent="0" marL="0">
-              <a:buNone/>
-            </a:pPr>
-            <a:r>
-              <a:rPr lang="en-US" sz="3800" spc="-100" kern="0" dirty="0">
+            <a:r>
+              <a:rPr lang="en-US" sz="3800" kern="0" spc="-100" dirty="0">
                 <a:solidFill>
                   <a:srgbClr val="03241E"/>
                 </a:solidFill>
@@ -14260,7 +14534,7 @@
           <a:bodyPr wrap="square" rtlCol="0" anchor="ctr"/>
           <a:lstStyle/>
           <a:p>
-            <a:pPr indent="0" marL="0">
+            <a:pPr marL="0" indent="0">
               <a:buNone/>
             </a:pPr>
             <a:r>
@@ -14304,6 +14578,13 @@
             <a:prstDash val="solid"/>
           </a:ln>
         </p:spPr>
+        <p:txBody>
+          <a:bodyPr/>
+          <a:lstStyle/>
+          <a:p>
+            <a:endParaRPr lang="en-UZ"/>
+          </a:p>
+        </p:txBody>
       </p:sp>
       <p:sp>
         <p:nvSpPr>
@@ -14326,11 +14607,11 @@
           <a:bodyPr wrap="square" rtlCol="0" anchor="ctr"/>
           <a:lstStyle/>
           <a:p>
-            <a:pPr indent="0" marL="0">
-              <a:buNone/>
-            </a:pPr>
-            <a:r>
-              <a:rPr lang="en-US" sz="1000" b="1" spc="400" kern="0" dirty="0">
+            <a:pPr marL="0" indent="0">
+              <a:buNone/>
+            </a:pPr>
+            <a:r>
+              <a:rPr lang="en-US" sz="1000" b="1" kern="0" spc="400" dirty="0">
                 <a:solidFill>
                   <a:srgbClr val="073A2F"/>
                 </a:solidFill>
@@ -14365,11 +14646,11 @@
           <a:bodyPr wrap="square" rtlCol="0" anchor="ctr"/>
           <a:lstStyle/>
           <a:p>
-            <a:pPr algn="r" indent="0" marL="0">
-              <a:buNone/>
-            </a:pPr>
-            <a:r>
-              <a:rPr lang="en-US" sz="900" b="1" spc="400" kern="0" dirty="0">
+            <a:pPr marL="0" indent="0" algn="r">
+              <a:buNone/>
+            </a:pPr>
+            <a:r>
+              <a:rPr lang="en-US" sz="900" b="1" kern="0" spc="400" dirty="0">
                 <a:solidFill>
                   <a:srgbClr val="03241E">
                     <a:alpha val="50000"/>
@@ -14406,7 +14687,7 @@
           <a:bodyPr wrap="square" rtlCol="0" anchor="ctr"/>
           <a:lstStyle/>
           <a:p>
-            <a:pPr indent="0" marL="0">
+            <a:pPr marL="0" indent="0">
               <a:buNone/>
             </a:pPr>
             <a:r>
@@ -14445,7 +14726,7 @@
           <a:bodyPr wrap="square" rtlCol="0" anchor="t"/>
           <a:lstStyle/>
           <a:p>
-            <a:pPr indent="0" marL="0">
+            <a:pPr marL="0" indent="0">
               <a:buNone/>
             </a:pPr>
             <a:r>
@@ -14485,6 +14766,13 @@
             <a:prstDash val="solid"/>
           </a:ln>
         </p:spPr>
+        <p:txBody>
+          <a:bodyPr/>
+          <a:lstStyle/>
+          <a:p>
+            <a:endParaRPr lang="en-UZ"/>
+          </a:p>
+        </p:txBody>
       </p:sp>
       <p:sp>
         <p:nvSpPr>
@@ -14507,11 +14795,11 @@
           <a:bodyPr wrap="square" rtlCol="0" anchor="ctr"/>
           <a:lstStyle/>
           <a:p>
-            <a:pPr indent="0" marL="0">
-              <a:buNone/>
-            </a:pPr>
-            <a:r>
-              <a:rPr lang="en-US" sz="1000" b="1" spc="400" kern="0" dirty="0">
+            <a:pPr marL="0" indent="0">
+              <a:buNone/>
+            </a:pPr>
+            <a:r>
+              <a:rPr lang="en-US" sz="1000" b="1" kern="0" spc="400" dirty="0">
                 <a:solidFill>
                   <a:srgbClr val="03241E">
                     <a:alpha val="75000"/>
@@ -14521,23 +14809,7 @@
                 <a:ea typeface="Inter" pitchFamily="34" charset="-122"/>
                 <a:cs typeface="Inter" pitchFamily="34" charset="-120"/>
               </a:rPr>
-              <a:t>TARGET: </a:t>
-            </a:r>
-            <a:pPr indent="0" marL="0">
-              <a:buNone/>
-            </a:pPr>
-            <a:r>
-              <a:rPr lang="en-US" sz="1000" b="1" spc="400" kern="0" dirty="0">
-                <a:solidFill>
-                  <a:srgbClr val="03241E">
-                    <a:alpha val="75000"/>
-                  </a:srgbClr>
-                </a:solidFill>
-                <a:latin typeface="Inter" pitchFamily="34" charset="0"/>
-                <a:ea typeface="Inter" pitchFamily="34" charset="-122"/>
-                <a:cs typeface="Inter" pitchFamily="34" charset="-120"/>
-              </a:rPr>
-              <a:t>10 PAID PILOTS</a:t>
+              <a:t>TARGET: 10 PAID PILOTS</a:t>
             </a:r>
             <a:endParaRPr lang="en-US" sz="1000" dirty="0"/>
           </a:p>
@@ -14569,6 +14841,13 @@
             <a:prstDash val="solid"/>
           </a:ln>
         </p:spPr>
+        <p:txBody>
+          <a:bodyPr/>
+          <a:lstStyle/>
+          <a:p>
+            <a:endParaRPr lang="en-UZ"/>
+          </a:p>
+        </p:txBody>
       </p:sp>
       <p:sp>
         <p:nvSpPr>
@@ -14591,11 +14870,11 @@
           <a:bodyPr wrap="square" rtlCol="0" anchor="ctr"/>
           <a:lstStyle/>
           <a:p>
-            <a:pPr indent="0" marL="0">
-              <a:buNone/>
-            </a:pPr>
-            <a:r>
-              <a:rPr lang="en-US" sz="1000" b="1" spc="400" kern="0" dirty="0">
+            <a:pPr marL="0" indent="0">
+              <a:buNone/>
+            </a:pPr>
+            <a:r>
+              <a:rPr lang="en-US" sz="1000" b="1" kern="0" spc="400" dirty="0">
                 <a:solidFill>
                   <a:srgbClr val="073A2F"/>
                 </a:solidFill>
@@ -14630,11 +14909,11 @@
           <a:bodyPr wrap="square" rtlCol="0" anchor="ctr"/>
           <a:lstStyle/>
           <a:p>
-            <a:pPr algn="r" indent="0" marL="0">
-              <a:buNone/>
-            </a:pPr>
-            <a:r>
-              <a:rPr lang="en-US" sz="900" b="1" spc="400" kern="0" dirty="0">
+            <a:pPr marL="0" indent="0" algn="r">
+              <a:buNone/>
+            </a:pPr>
+            <a:r>
+              <a:rPr lang="en-US" sz="900" b="1" kern="0" spc="400" dirty="0">
                 <a:solidFill>
                   <a:srgbClr val="03241E">
                     <a:alpha val="50000"/>
@@ -14671,7 +14950,7 @@
           <a:bodyPr wrap="square" rtlCol="0" anchor="ctr"/>
           <a:lstStyle/>
           <a:p>
-            <a:pPr indent="0" marL="0">
+            <a:pPr marL="0" indent="0">
               <a:buNone/>
             </a:pPr>
             <a:r>
@@ -14710,7 +14989,7 @@
           <a:bodyPr wrap="square" rtlCol="0" anchor="t"/>
           <a:lstStyle/>
           <a:p>
-            <a:pPr indent="0" marL="0">
+            <a:pPr marL="0" indent="0">
               <a:buNone/>
             </a:pPr>
             <a:r>
@@ -14750,6 +15029,13 @@
             <a:prstDash val="solid"/>
           </a:ln>
         </p:spPr>
+        <p:txBody>
+          <a:bodyPr/>
+          <a:lstStyle/>
+          <a:p>
+            <a:endParaRPr lang="en-UZ"/>
+          </a:p>
+        </p:txBody>
       </p:sp>
       <p:sp>
         <p:nvSpPr>
@@ -14772,11 +15058,11 @@
           <a:bodyPr wrap="square" rtlCol="0" anchor="ctr"/>
           <a:lstStyle/>
           <a:p>
-            <a:pPr indent="0" marL="0">
-              <a:buNone/>
-            </a:pPr>
-            <a:r>
-              <a:rPr lang="en-US" sz="1000" b="1" spc="400" kern="0" dirty="0">
+            <a:pPr marL="0" indent="0">
+              <a:buNone/>
+            </a:pPr>
+            <a:r>
+              <a:rPr lang="en-US" sz="1000" b="1" kern="0" spc="400" dirty="0">
                 <a:solidFill>
                   <a:srgbClr val="03241E">
                     <a:alpha val="75000"/>
@@ -14786,23 +15072,7 @@
                 <a:ea typeface="Inter" pitchFamily="34" charset="-122"/>
                 <a:cs typeface="Inter" pitchFamily="34" charset="-120"/>
               </a:rPr>
-              <a:t>TARGET: </a:t>
-            </a:r>
-            <a:pPr indent="0" marL="0">
-              <a:buNone/>
-            </a:pPr>
-            <a:r>
-              <a:rPr lang="en-US" sz="1000" b="1" spc="400" kern="0" dirty="0">
-                <a:solidFill>
-                  <a:srgbClr val="03241E">
-                    <a:alpha val="75000"/>
-                  </a:srgbClr>
-                </a:solidFill>
-                <a:latin typeface="Inter" pitchFamily="34" charset="0"/>
-                <a:ea typeface="Inter" pitchFamily="34" charset="-122"/>
-                <a:cs typeface="Inter" pitchFamily="34" charset="-120"/>
-              </a:rPr>
-              <a:t>50 PAYING PROPERTIES</a:t>
+              <a:t>TARGET: 50 PAYING PROPERTIES</a:t>
             </a:r>
             <a:endParaRPr lang="en-US" sz="1000" dirty="0"/>
           </a:p>
@@ -14834,6 +15104,13 @@
             <a:prstDash val="solid"/>
           </a:ln>
         </p:spPr>
+        <p:txBody>
+          <a:bodyPr/>
+          <a:lstStyle/>
+          <a:p>
+            <a:endParaRPr lang="en-UZ"/>
+          </a:p>
+        </p:txBody>
       </p:sp>
       <p:sp>
         <p:nvSpPr>
@@ -14856,11 +15133,11 @@
           <a:bodyPr wrap="square" rtlCol="0" anchor="ctr"/>
           <a:lstStyle/>
           <a:p>
-            <a:pPr indent="0" marL="0">
-              <a:buNone/>
-            </a:pPr>
-            <a:r>
-              <a:rPr lang="en-US" sz="1000" b="1" spc="400" kern="0" dirty="0">
+            <a:pPr marL="0" indent="0">
+              <a:buNone/>
+            </a:pPr>
+            <a:r>
+              <a:rPr lang="en-US" sz="1000" b="1" kern="0" spc="400" dirty="0">
                 <a:solidFill>
                   <a:srgbClr val="073A2F"/>
                 </a:solidFill>
@@ -14895,11 +15172,11 @@
           <a:bodyPr wrap="square" rtlCol="0" anchor="ctr"/>
           <a:lstStyle/>
           <a:p>
-            <a:pPr algn="r" indent="0" marL="0">
-              <a:buNone/>
-            </a:pPr>
-            <a:r>
-              <a:rPr lang="en-US" sz="900" b="1" spc="400" kern="0" dirty="0">
+            <a:pPr marL="0" indent="0" algn="r">
+              <a:buNone/>
+            </a:pPr>
+            <a:r>
+              <a:rPr lang="en-US" sz="900" b="1" kern="0" spc="400" dirty="0">
                 <a:solidFill>
                   <a:srgbClr val="03241E">
                     <a:alpha val="50000"/>
@@ -14936,7 +15213,7 @@
           <a:bodyPr wrap="square" rtlCol="0" anchor="ctr"/>
           <a:lstStyle/>
           <a:p>
-            <a:pPr indent="0" marL="0">
+            <a:pPr marL="0" indent="0">
               <a:buNone/>
             </a:pPr>
             <a:r>
@@ -14975,7 +15252,7 @@
           <a:bodyPr wrap="square" rtlCol="0" anchor="t"/>
           <a:lstStyle/>
           <a:p>
-            <a:pPr indent="0" marL="0">
+            <a:pPr marL="0" indent="0">
               <a:buNone/>
             </a:pPr>
             <a:r>
@@ -15015,6 +15292,13 @@
             <a:prstDash val="solid"/>
           </a:ln>
         </p:spPr>
+        <p:txBody>
+          <a:bodyPr/>
+          <a:lstStyle/>
+          <a:p>
+            <a:endParaRPr lang="en-UZ"/>
+          </a:p>
+        </p:txBody>
       </p:sp>
       <p:sp>
         <p:nvSpPr>
@@ -15037,11 +15321,11 @@
           <a:bodyPr wrap="square" rtlCol="0" anchor="ctr"/>
           <a:lstStyle/>
           <a:p>
-            <a:pPr indent="0" marL="0">
-              <a:buNone/>
-            </a:pPr>
-            <a:r>
-              <a:rPr lang="en-US" sz="1000" b="1" spc="400" kern="0" dirty="0">
+            <a:pPr marL="0" indent="0">
+              <a:buNone/>
+            </a:pPr>
+            <a:r>
+              <a:rPr lang="en-US" sz="1000" b="1" kern="0" spc="400" dirty="0">
                 <a:solidFill>
                   <a:srgbClr val="03241E">
                     <a:alpha val="75000"/>
@@ -15051,23 +15335,7 @@
                 <a:ea typeface="Inter" pitchFamily="34" charset="-122"/>
                 <a:cs typeface="Inter" pitchFamily="34" charset="-120"/>
               </a:rPr>
-              <a:t>TARGET: </a:t>
-            </a:r>
-            <a:pPr indent="0" marL="0">
-              <a:buNone/>
-            </a:pPr>
-            <a:r>
-              <a:rPr lang="en-US" sz="1000" b="1" spc="400" kern="0" dirty="0">
-                <a:solidFill>
-                  <a:srgbClr val="03241E">
-                    <a:alpha val="75000"/>
-                  </a:srgbClr>
-                </a:solidFill>
-                <a:latin typeface="Inter" pitchFamily="34" charset="0"/>
-                <a:ea typeface="Inter" pitchFamily="34" charset="-122"/>
-                <a:cs typeface="Inter" pitchFamily="34" charset="-120"/>
-              </a:rPr>
-              <a:t>300+ PROPERTIES</a:t>
+              <a:t>TARGET: 300+ PROPERTIES</a:t>
             </a:r>
             <a:endParaRPr lang="en-US" sz="1000" dirty="0"/>
           </a:p>
@@ -15119,11 +15387,11 @@
           <a:bodyPr wrap="square" rtlCol="0" anchor="ctr"/>
           <a:lstStyle/>
           <a:p>
-            <a:pPr algn="r" indent="0" marL="0">
-              <a:buNone/>
-            </a:pPr>
-            <a:r>
-              <a:rPr lang="en-US" sz="900" spc="300" kern="0" dirty="0">
+            <a:pPr marL="0" indent="0" algn="r">
+              <a:buNone/>
+            </a:pPr>
+            <a:r>
+              <a:rPr lang="en-US" sz="900" kern="0" spc="300" dirty="0">
                 <a:solidFill>
                   <a:srgbClr val="03241E">
                     <a:alpha val="45000"/>
@@ -15163,6 +15431,13 @@
             <a:prstDash val="solid"/>
           </a:ln>
         </p:spPr>
+        <p:txBody>
+          <a:bodyPr/>
+          <a:lstStyle/>
+          <a:p>
+            <a:endParaRPr lang="en-UZ"/>
+          </a:p>
+        </p:txBody>
       </p:sp>
       <p:sp>
         <p:nvSpPr>
@@ -15172,7 +15447,7 @@
         </p:nvSpPr>
         <p:spPr>
           <a:xfrm>
-            <a:off x="1097280" y="640080"/>
+            <a:off x="1097280" y="618308"/>
             <a:ext cx="5486400" cy="274320"/>
           </a:xfrm>
           <a:prstGeom prst="rect">
@@ -15185,11 +15460,11 @@
           <a:bodyPr wrap="square" rtlCol="0" anchor="ctr"/>
           <a:lstStyle/>
           <a:p>
-            <a:pPr indent="0" marL="0">
-              <a:buNone/>
-            </a:pPr>
-            <a:r>
-              <a:rPr lang="en-US" sz="1000" b="1" spc="400" kern="0" dirty="0">
+            <a:pPr marL="0" indent="0">
+              <a:buNone/>
+            </a:pPr>
+            <a:r>
+              <a:rPr lang="en-US" sz="1000" b="1" kern="0" spc="400" dirty="0">
                 <a:solidFill>
                   <a:srgbClr val="03241E">
                     <a:alpha val="60000"/>
@@ -15226,11 +15501,11 @@
           <a:bodyPr wrap="square" rtlCol="0" anchor="ctr"/>
           <a:lstStyle/>
           <a:p>
-            <a:pPr indent="0" marL="0">
-              <a:buNone/>
-            </a:pPr>
-            <a:r>
-              <a:rPr lang="en-US" sz="4000" spc="-100" kern="0" dirty="0">
+            <a:pPr marL="0" indent="0">
+              <a:buNone/>
+            </a:pPr>
+            <a:r>
+              <a:rPr lang="en-US" sz="4000" kern="0" spc="-100" dirty="0">
                 <a:solidFill>
                   <a:srgbClr val="03241E"/>
                 </a:solidFill>
@@ -15240,11 +15515,8 @@
               </a:rPr>
               <a:t>One plan, </a:t>
             </a:r>
-            <a:pPr indent="0" marL="0">
-              <a:buNone/>
-            </a:pPr>
-            <a:r>
-              <a:rPr lang="en-US" sz="4000" i="1" spc="-100" kern="0" dirty="0">
+            <a:r>
+              <a:rPr lang="en-US" sz="4000" i="1" kern="0" spc="-100" dirty="0">
                 <a:solidFill>
                   <a:srgbClr val="03241E"/>
                 </a:solidFill>
@@ -15254,11 +15526,8 @@
               </a:rPr>
               <a:t>per property</a:t>
             </a:r>
-            <a:pPr indent="0" marL="0">
-              <a:buNone/>
-            </a:pPr>
-            <a:r>
-              <a:rPr lang="en-US" sz="4000" spc="-100" kern="0" dirty="0">
+            <a:r>
+              <a:rPr lang="en-US" sz="4000" kern="0" spc="-100" dirty="0">
                 <a:solidFill>
                   <a:srgbClr val="03241E"/>
                 </a:solidFill>
@@ -15298,6 +15567,13 @@
             <a:prstDash val="solid"/>
           </a:ln>
         </p:spPr>
+        <p:txBody>
+          <a:bodyPr/>
+          <a:lstStyle/>
+          <a:p>
+            <a:endParaRPr lang="en-UZ"/>
+          </a:p>
+        </p:txBody>
       </p:sp>
       <p:sp>
         <p:nvSpPr>
@@ -15320,11 +15596,11 @@
           <a:bodyPr wrap="square" rtlCol="0" anchor="ctr"/>
           <a:lstStyle/>
           <a:p>
-            <a:pPr indent="0" marL="0">
-              <a:buNone/>
-            </a:pPr>
-            <a:r>
-              <a:rPr lang="en-US" sz="1100" b="1" spc="400" kern="0" dirty="0">
+            <a:pPr marL="0" indent="0">
+              <a:buNone/>
+            </a:pPr>
+            <a:r>
+              <a:rPr lang="en-US" sz="1100" b="1" kern="0" spc="400" dirty="0">
                 <a:solidFill>
                   <a:srgbClr val="03241E">
                     <a:alpha val="60000"/>
@@ -15361,7 +15637,7 @@
           <a:bodyPr wrap="square" rtlCol="0" anchor="ctr"/>
           <a:lstStyle/>
           <a:p>
-            <a:pPr algn="r" indent="0" marL="0">
+            <a:pPr marL="0" indent="0" algn="r">
               <a:buNone/>
             </a:pPr>
             <a:r>
@@ -15401,6 +15677,13 @@
             <a:prstDash val="solid"/>
           </a:ln>
         </p:spPr>
+        <p:txBody>
+          <a:bodyPr/>
+          <a:lstStyle/>
+          <a:p>
+            <a:endParaRPr lang="en-UZ"/>
+          </a:p>
+        </p:txBody>
       </p:sp>
       <p:sp>
         <p:nvSpPr>
@@ -15423,11 +15706,11 @@
           <a:bodyPr wrap="square" rtlCol="0" anchor="ctr"/>
           <a:lstStyle/>
           <a:p>
-            <a:pPr indent="0" marL="0">
-              <a:buNone/>
-            </a:pPr>
-            <a:r>
-              <a:rPr lang="en-US" sz="1100" b="1" spc="400" kern="0" dirty="0">
+            <a:pPr marL="0" indent="0">
+              <a:buNone/>
+            </a:pPr>
+            <a:r>
+              <a:rPr lang="en-US" sz="1100" b="1" kern="0" spc="400" dirty="0">
                 <a:solidFill>
                   <a:srgbClr val="03241E">
                     <a:alpha val="60000"/>
@@ -15464,7 +15747,7 @@
           <a:bodyPr wrap="square" rtlCol="0" anchor="ctr"/>
           <a:lstStyle/>
           <a:p>
-            <a:pPr algn="r" indent="0" marL="0">
+            <a:pPr marL="0" indent="0" algn="r">
               <a:buNone/>
             </a:pPr>
             <a:r>
@@ -15504,6 +15787,13 @@
             <a:prstDash val="solid"/>
           </a:ln>
         </p:spPr>
+        <p:txBody>
+          <a:bodyPr/>
+          <a:lstStyle/>
+          <a:p>
+            <a:endParaRPr lang="en-UZ"/>
+          </a:p>
+        </p:txBody>
       </p:sp>
       <p:sp>
         <p:nvSpPr>
@@ -15526,11 +15816,11 @@
           <a:bodyPr wrap="square" rtlCol="0" anchor="ctr"/>
           <a:lstStyle/>
           <a:p>
-            <a:pPr indent="0" marL="0">
-              <a:buNone/>
-            </a:pPr>
-            <a:r>
-              <a:rPr lang="en-US" sz="1100" b="1" spc="400" kern="0" dirty="0">
+            <a:pPr marL="0" indent="0">
+              <a:buNone/>
+            </a:pPr>
+            <a:r>
+              <a:rPr lang="en-US" sz="1100" b="1" kern="0" spc="400" dirty="0">
                 <a:solidFill>
                   <a:srgbClr val="03241E">
                     <a:alpha val="60000"/>
@@ -15567,7 +15857,7 @@
           <a:bodyPr wrap="square" rtlCol="0" anchor="ctr"/>
           <a:lstStyle/>
           <a:p>
-            <a:pPr algn="r" indent="0" marL="0">
+            <a:pPr marL="0" indent="0" algn="r">
               <a:buNone/>
             </a:pPr>
             <a:r>
@@ -15607,6 +15897,13 @@
             <a:prstDash val="solid"/>
           </a:ln>
         </p:spPr>
+        <p:txBody>
+          <a:bodyPr/>
+          <a:lstStyle/>
+          <a:p>
+            <a:endParaRPr lang="en-UZ"/>
+          </a:p>
+        </p:txBody>
       </p:sp>
       <p:sp>
         <p:nvSpPr>
@@ -15629,11 +15926,11 @@
           <a:bodyPr wrap="square" rtlCol="0" anchor="ctr"/>
           <a:lstStyle/>
           <a:p>
-            <a:pPr indent="0" marL="0">
-              <a:buNone/>
-            </a:pPr>
-            <a:r>
-              <a:rPr lang="en-US" sz="1100" b="1" spc="400" kern="0" dirty="0">
+            <a:pPr marL="0" indent="0">
+              <a:buNone/>
+            </a:pPr>
+            <a:r>
+              <a:rPr lang="en-US" sz="1100" b="1" kern="0" spc="400" dirty="0">
                 <a:solidFill>
                   <a:srgbClr val="03241E">
                     <a:alpha val="60000"/>
@@ -15670,7 +15967,7 @@
           <a:bodyPr wrap="square" rtlCol="0" anchor="ctr"/>
           <a:lstStyle/>
           <a:p>
-            <a:pPr algn="r" indent="0" marL="0">
+            <a:pPr marL="0" indent="0" algn="r">
               <a:buNone/>
             </a:pPr>
             <a:r>
@@ -15709,11 +16006,11 @@
           <a:bodyPr wrap="square" rtlCol="0" anchor="ctr"/>
           <a:lstStyle/>
           <a:p>
-            <a:pPr indent="0" marL="0">
-              <a:buNone/>
-            </a:pPr>
-            <a:r>
-              <a:rPr lang="en-US" sz="1000" b="1" spc="400" kern="0" dirty="0">
+            <a:pPr marL="0" indent="0">
+              <a:buNone/>
+            </a:pPr>
+            <a:r>
+              <a:rPr lang="en-US" sz="1000" b="1" kern="0" spc="400" dirty="0">
                 <a:solidFill>
                   <a:srgbClr val="03241E">
                     <a:alpha val="60000"/>
@@ -15750,7 +16047,7 @@
           <a:bodyPr wrap="square" rtlCol="0" anchor="ctr"/>
           <a:lstStyle/>
           <a:p>
-            <a:pPr indent="0" marL="0">
+            <a:pPr marL="0" indent="0">
               <a:buNone/>
             </a:pPr>
             <a:r>
@@ -15791,7 +16088,7 @@
           <a:bodyPr wrap="square" rtlCol="0" anchor="ctr"/>
           <a:lstStyle/>
           <a:p>
-            <a:pPr algn="r" indent="0" marL="0">
+            <a:pPr marL="0" indent="0" algn="r">
               <a:buNone/>
             </a:pPr>
             <a:r>
@@ -15833,6 +16130,13 @@
             <a:prstDash val="solid"/>
           </a:ln>
         </p:spPr>
+        <p:txBody>
+          <a:bodyPr/>
+          <a:lstStyle/>
+          <a:p>
+            <a:endParaRPr lang="en-UZ"/>
+          </a:p>
+        </p:txBody>
       </p:sp>
       <p:sp>
         <p:nvSpPr>
@@ -15855,7 +16159,7 @@
           <a:bodyPr wrap="square" rtlCol="0" anchor="ctr"/>
           <a:lstStyle/>
           <a:p>
-            <a:pPr indent="0" marL="0">
+            <a:pPr marL="0" indent="0">
               <a:buNone/>
             </a:pPr>
             <a:r>
@@ -15896,7 +16200,7 @@
           <a:bodyPr wrap="square" rtlCol="0" anchor="ctr"/>
           <a:lstStyle/>
           <a:p>
-            <a:pPr algn="r" indent="0" marL="0">
+            <a:pPr marL="0" indent="0" algn="r">
               <a:buNone/>
             </a:pPr>
             <a:r>
@@ -15938,6 +16242,13 @@
             <a:prstDash val="solid"/>
           </a:ln>
         </p:spPr>
+        <p:txBody>
+          <a:bodyPr/>
+          <a:lstStyle/>
+          <a:p>
+            <a:endParaRPr lang="en-UZ"/>
+          </a:p>
+        </p:txBody>
       </p:sp>
       <p:sp>
         <p:nvSpPr>
@@ -15960,7 +16271,7 @@
           <a:bodyPr wrap="square" rtlCol="0" anchor="ctr"/>
           <a:lstStyle/>
           <a:p>
-            <a:pPr indent="0" marL="0">
+            <a:pPr marL="0" indent="0">
               <a:buNone/>
             </a:pPr>
             <a:r>
@@ -16001,7 +16312,7 @@
           <a:bodyPr wrap="square" rtlCol="0" anchor="ctr"/>
           <a:lstStyle/>
           <a:p>
-            <a:pPr algn="r" indent="0" marL="0">
+            <a:pPr marL="0" indent="0" algn="r">
               <a:buNone/>
             </a:pPr>
             <a:r>
@@ -16043,6 +16354,13 @@
             <a:prstDash val="solid"/>
           </a:ln>
         </p:spPr>
+        <p:txBody>
+          <a:bodyPr/>
+          <a:lstStyle/>
+          <a:p>
+            <a:endParaRPr lang="en-UZ"/>
+          </a:p>
+        </p:txBody>
       </p:sp>
       <p:sp>
         <p:nvSpPr>
@@ -16065,7 +16383,7 @@
           <a:bodyPr wrap="square" rtlCol="0" anchor="ctr"/>
           <a:lstStyle/>
           <a:p>
-            <a:pPr indent="0" marL="0">
+            <a:pPr marL="0" indent="0">
               <a:buNone/>
             </a:pPr>
             <a:r>
@@ -16106,7 +16424,7 @@
           <a:bodyPr wrap="square" rtlCol="0" anchor="ctr"/>
           <a:lstStyle/>
           <a:p>
-            <a:pPr algn="r" indent="0" marL="0">
+            <a:pPr marL="0" indent="0" algn="r">
               <a:buNone/>
             </a:pPr>
             <a:r>
@@ -16148,6 +16466,13 @@
             <a:prstDash val="solid"/>
           </a:ln>
         </p:spPr>
+        <p:txBody>
+          <a:bodyPr/>
+          <a:lstStyle/>
+          <a:p>
+            <a:endParaRPr lang="en-UZ"/>
+          </a:p>
+        </p:txBody>
       </p:sp>
       <p:sp>
         <p:nvSpPr>
@@ -16170,7 +16495,7 @@
           <a:bodyPr wrap="square" rtlCol="0" anchor="ctr"/>
           <a:lstStyle/>
           <a:p>
-            <a:pPr indent="0" marL="0">
+            <a:pPr marL="0" indent="0">
               <a:buNone/>
             </a:pPr>
             <a:r>
@@ -16211,7 +16536,7 @@
           <a:bodyPr wrap="square" rtlCol="0" anchor="ctr"/>
           <a:lstStyle/>
           <a:p>
-            <a:pPr algn="r" indent="0" marL="0">
+            <a:pPr marL="0" indent="0" algn="r">
               <a:buNone/>
             </a:pPr>
             <a:r>
@@ -16253,6 +16578,13 @@
             <a:prstDash val="solid"/>
           </a:ln>
         </p:spPr>
+        <p:txBody>
+          <a:bodyPr/>
+          <a:lstStyle/>
+          <a:p>
+            <a:endParaRPr lang="en-UZ"/>
+          </a:p>
+        </p:txBody>
       </p:sp>
       <p:sp>
         <p:nvSpPr>
@@ -16275,7 +16607,7 @@
           <a:bodyPr wrap="square" rtlCol="0" anchor="ctr"/>
           <a:lstStyle/>
           <a:p>
-            <a:pPr indent="0" marL="0">
+            <a:pPr marL="0" indent="0">
               <a:buNone/>
             </a:pPr>
             <a:r>
@@ -16291,9 +16623,6 @@
               </a:rPr>
               <a:t>Diaspora-driven GTM keeps CAC below SaaS average. Structural pricing advantage — still roughly half a call center's cost, while </a:t>
             </a:r>
-            <a:pPr indent="0" marL="0">
-              <a:buNone/>
-            </a:pPr>
             <a:r>
               <a:rPr lang="en-US" sz="1150" i="1" dirty="0">
                 <a:solidFill>
@@ -16310,9 +16639,6 @@
               </a:rPr>
               <a:t>capturing bookings they can't</a:t>
             </a:r>
-            <a:pPr indent="0" marL="0">
-              <a:buNone/>
-            </a:pPr>
             <a:r>
               <a:rPr lang="en-US" sz="1150" i="1" dirty="0">
                 <a:solidFill>
@@ -16631,4 +16957,319 @@
     </a:ext>
   </a:extLst>
 </a:theme>
+</file>
+
+<file path=ppt/theme/theme2.xml><?xml version="1.0" encoding="utf-8"?>
+<a:theme xmlns:a="http://schemas.openxmlformats.org/drawingml/2006/main" name="Office Theme">
+  <a:themeElements>
+    <a:clrScheme name="Office">
+      <a:dk1>
+        <a:sysClr val="windowText" lastClr="000000"/>
+      </a:dk1>
+      <a:lt1>
+        <a:sysClr val="window" lastClr="FFFFFF"/>
+      </a:lt1>
+      <a:dk2>
+        <a:srgbClr val="0E2841"/>
+      </a:dk2>
+      <a:lt2>
+        <a:srgbClr val="E8E8E8"/>
+      </a:lt2>
+      <a:accent1>
+        <a:srgbClr val="156082"/>
+      </a:accent1>
+      <a:accent2>
+        <a:srgbClr val="E97132"/>
+      </a:accent2>
+      <a:accent3>
+        <a:srgbClr val="196B24"/>
+      </a:accent3>
+      <a:accent4>
+        <a:srgbClr val="0F9ED5"/>
+      </a:accent4>
+      <a:accent5>
+        <a:srgbClr val="A02B93"/>
+      </a:accent5>
+      <a:accent6>
+        <a:srgbClr val="4EA72E"/>
+      </a:accent6>
+      <a:hlink>
+        <a:srgbClr val="467886"/>
+      </a:hlink>
+      <a:folHlink>
+        <a:srgbClr val="96607D"/>
+      </a:folHlink>
+    </a:clrScheme>
+    <a:fontScheme name="Office">
+      <a:majorFont>
+        <a:latin typeface="Aptos Display" panose="02110004020202020204"/>
+        <a:ea typeface=""/>
+        <a:cs typeface=""/>
+        <a:font script="Jpan" typeface="游ゴシック Light"/>
+        <a:font script="Hang" typeface="맑은 고딕"/>
+        <a:font script="Hans" typeface="等线 Light"/>
+        <a:font script="Hant" typeface="新細明體"/>
+        <a:font script="Arab" typeface="Times New Roman"/>
+        <a:font script="Hebr" typeface="Times New Roman"/>
+        <a:font script="Thai" typeface="Angsana New"/>
+        <a:font script="Ethi" typeface="Nyala"/>
+        <a:font script="Beng" typeface="Vrinda"/>
+        <a:font script="Gujr" typeface="Shruti"/>
+        <a:font script="Khmr" typeface="MoolBoran"/>
+        <a:font script="Knda" typeface="Tunga"/>
+        <a:font script="Guru" typeface="Raavi"/>
+        <a:font script="Cans" typeface="Euphemia"/>
+        <a:font script="Cher" typeface="Plantagenet Cherokee"/>
+        <a:font script="Yiii" typeface="Microsoft Yi Baiti"/>
+        <a:font script="Tibt" typeface="Microsoft Himalaya"/>
+        <a:font script="Thaa" typeface="MV Boli"/>
+        <a:font script="Deva" typeface="Mangal"/>
+        <a:font script="Telu" typeface="Gautami"/>
+        <a:font script="Taml" typeface="Latha"/>
+        <a:font script="Syrc" typeface="Estrangelo Edessa"/>
+        <a:font script="Orya" typeface="Kalinga"/>
+        <a:font script="Mlym" typeface="Kartika"/>
+        <a:font script="Laoo" typeface="DokChampa"/>
+        <a:font script="Sinh" typeface="Iskoola Pota"/>
+        <a:font script="Mong" typeface="Mongolian Baiti"/>
+        <a:font script="Viet" typeface="Times New Roman"/>
+        <a:font script="Uigh" typeface="Microsoft Uighur"/>
+        <a:font script="Geor" typeface="Sylfaen"/>
+        <a:font script="Armn" typeface="Arial"/>
+        <a:font script="Bugi" typeface="Leelawadee UI"/>
+        <a:font script="Bopo" typeface="Microsoft JhengHei"/>
+        <a:font script="Java" typeface="Javanese Text"/>
+        <a:font script="Lisu" typeface="Segoe UI"/>
+        <a:font script="Mymr" typeface="Myanmar Text"/>
+        <a:font script="Nkoo" typeface="Ebrima"/>
+        <a:font script="Olck" typeface="Nirmala UI"/>
+        <a:font script="Osma" typeface="Ebrima"/>
+        <a:font script="Phag" typeface="Phagspa"/>
+        <a:font script="Syrn" typeface="Estrangelo Edessa"/>
+        <a:font script="Syrj" typeface="Estrangelo Edessa"/>
+        <a:font script="Syre" typeface="Estrangelo Edessa"/>
+        <a:font script="Sora" typeface="Nirmala UI"/>
+        <a:font script="Tale" typeface="Microsoft Tai Le"/>
+        <a:font script="Talu" typeface="Microsoft New Tai Lue"/>
+        <a:font script="Tfng" typeface="Ebrima"/>
+      </a:majorFont>
+      <a:minorFont>
+        <a:latin typeface="Aptos" panose="02110004020202020204"/>
+        <a:ea typeface=""/>
+        <a:cs typeface=""/>
+        <a:font script="Jpan" typeface="游ゴシック"/>
+        <a:font script="Hang" typeface="맑은 고딕"/>
+        <a:font script="Hans" typeface="等线"/>
+        <a:font script="Hant" typeface="新細明體"/>
+        <a:font script="Arab" typeface="Arial"/>
+        <a:font script="Hebr" typeface="Arial"/>
+        <a:font script="Thai" typeface="Cordia New"/>
+        <a:font script="Ethi" typeface="Nyala"/>
+        <a:font script="Beng" typeface="Vrinda"/>
+        <a:font script="Gujr" typeface="Shruti"/>
+        <a:font script="Khmr" typeface="DaunPenh"/>
+        <a:font script="Knda" typeface="Tunga"/>
+        <a:font script="Guru" typeface="Raavi"/>
+        <a:font script="Cans" typeface="Euphemia"/>
+        <a:font script="Cher" typeface="Plantagenet Cherokee"/>
+        <a:font script="Yiii" typeface="Microsoft Yi Baiti"/>
+        <a:font script="Tibt" typeface="Microsoft Himalaya"/>
+        <a:font script="Thaa" typeface="MV Boli"/>
+        <a:font script="Deva" typeface="Mangal"/>
+        <a:font script="Telu" typeface="Gautami"/>
+        <a:font script="Taml" typeface="Latha"/>
+        <a:font script="Syrc" typeface="Estrangelo Edessa"/>
+        <a:font script="Orya" typeface="Kalinga"/>
+        <a:font script="Mlym" typeface="Kartika"/>
+        <a:font script="Laoo" typeface="DokChampa"/>
+        <a:font script="Sinh" typeface="Iskoola Pota"/>
+        <a:font script="Mong" typeface="Mongolian Baiti"/>
+        <a:font script="Viet" typeface="Arial"/>
+        <a:font script="Uigh" typeface="Microsoft Uighur"/>
+        <a:font script="Geor" typeface="Sylfaen"/>
+        <a:font script="Armn" typeface="Arial"/>
+        <a:font script="Bugi" typeface="Leelawadee UI"/>
+        <a:font script="Bopo" typeface="Microsoft JhengHei"/>
+        <a:font script="Java" typeface="Javanese Text"/>
+        <a:font script="Lisu" typeface="Segoe UI"/>
+        <a:font script="Mymr" typeface="Myanmar Text"/>
+        <a:font script="Nkoo" typeface="Ebrima"/>
+        <a:font script="Olck" typeface="Nirmala UI"/>
+        <a:font script="Osma" typeface="Ebrima"/>
+        <a:font script="Phag" typeface="Phagspa"/>
+        <a:font script="Syrn" typeface="Estrangelo Edessa"/>
+        <a:font script="Syrj" typeface="Estrangelo Edessa"/>
+        <a:font script="Syre" typeface="Estrangelo Edessa"/>
+        <a:font script="Sora" typeface="Nirmala UI"/>
+        <a:font script="Tale" typeface="Microsoft Tai Le"/>
+        <a:font script="Talu" typeface="Microsoft New Tai Lue"/>
+        <a:font script="Tfng" typeface="Ebrima"/>
+      </a:minorFont>
+    </a:fontScheme>
+    <a:fmtScheme name="Office">
+      <a:fillStyleLst>
+        <a:solidFill>
+          <a:schemeClr val="phClr"/>
+        </a:solidFill>
+        <a:gradFill rotWithShape="1">
+          <a:gsLst>
+            <a:gs pos="0">
+              <a:schemeClr val="phClr">
+                <a:lumMod val="110000"/>
+                <a:satMod val="105000"/>
+                <a:tint val="67000"/>
+              </a:schemeClr>
+            </a:gs>
+            <a:gs pos="50000">
+              <a:schemeClr val="phClr">
+                <a:lumMod val="105000"/>
+                <a:satMod val="103000"/>
+                <a:tint val="73000"/>
+              </a:schemeClr>
+            </a:gs>
+            <a:gs pos="100000">
+              <a:schemeClr val="phClr">
+                <a:lumMod val="105000"/>
+                <a:satMod val="109000"/>
+                <a:tint val="81000"/>
+              </a:schemeClr>
+            </a:gs>
+          </a:gsLst>
+          <a:lin ang="5400000" scaled="0"/>
+        </a:gradFill>
+        <a:gradFill rotWithShape="1">
+          <a:gsLst>
+            <a:gs pos="0">
+              <a:schemeClr val="phClr">
+                <a:satMod val="103000"/>
+                <a:lumMod val="102000"/>
+                <a:tint val="94000"/>
+              </a:schemeClr>
+            </a:gs>
+            <a:gs pos="50000">
+              <a:schemeClr val="phClr">
+                <a:satMod val="110000"/>
+                <a:lumMod val="100000"/>
+                <a:shade val="100000"/>
+              </a:schemeClr>
+            </a:gs>
+            <a:gs pos="100000">
+              <a:schemeClr val="phClr">
+                <a:lumMod val="99000"/>
+                <a:satMod val="120000"/>
+                <a:shade val="78000"/>
+              </a:schemeClr>
+            </a:gs>
+          </a:gsLst>
+          <a:lin ang="5400000" scaled="0"/>
+        </a:gradFill>
+      </a:fillStyleLst>
+      <a:lnStyleLst>
+        <a:ln w="12700" cap="flat" cmpd="sng" algn="ctr">
+          <a:solidFill>
+            <a:schemeClr val="phClr"/>
+          </a:solidFill>
+          <a:prstDash val="solid"/>
+          <a:miter lim="800000"/>
+        </a:ln>
+        <a:ln w="19050" cap="flat" cmpd="sng" algn="ctr">
+          <a:solidFill>
+            <a:schemeClr val="phClr"/>
+          </a:solidFill>
+          <a:prstDash val="solid"/>
+          <a:miter lim="800000"/>
+        </a:ln>
+        <a:ln w="25400" cap="flat" cmpd="sng" algn="ctr">
+          <a:solidFill>
+            <a:schemeClr val="phClr"/>
+          </a:solidFill>
+          <a:prstDash val="solid"/>
+          <a:miter lim="800000"/>
+        </a:ln>
+      </a:lnStyleLst>
+      <a:effectStyleLst>
+        <a:effectStyle>
+          <a:effectLst/>
+        </a:effectStyle>
+        <a:effectStyle>
+          <a:effectLst/>
+        </a:effectStyle>
+        <a:effectStyle>
+          <a:effectLst>
+            <a:outerShdw blurRad="57150" dist="19050" dir="5400000" algn="ctr" rotWithShape="0">
+              <a:srgbClr val="000000">
+                <a:alpha val="63000"/>
+              </a:srgbClr>
+            </a:outerShdw>
+          </a:effectLst>
+        </a:effectStyle>
+      </a:effectStyleLst>
+      <a:bgFillStyleLst>
+        <a:solidFill>
+          <a:schemeClr val="phClr"/>
+        </a:solidFill>
+        <a:solidFill>
+          <a:schemeClr val="phClr">
+            <a:tint val="95000"/>
+            <a:satMod val="170000"/>
+          </a:schemeClr>
+        </a:solidFill>
+        <a:gradFill rotWithShape="1">
+          <a:gsLst>
+            <a:gs pos="0">
+              <a:schemeClr val="phClr">
+                <a:tint val="93000"/>
+                <a:satMod val="150000"/>
+                <a:shade val="98000"/>
+                <a:lumMod val="102000"/>
+              </a:schemeClr>
+            </a:gs>
+            <a:gs pos="50000">
+              <a:schemeClr val="phClr">
+                <a:tint val="98000"/>
+                <a:satMod val="130000"/>
+                <a:shade val="90000"/>
+                <a:lumMod val="103000"/>
+              </a:schemeClr>
+            </a:gs>
+            <a:gs pos="100000">
+              <a:schemeClr val="phClr">
+                <a:shade val="63000"/>
+                <a:satMod val="120000"/>
+              </a:schemeClr>
+            </a:gs>
+          </a:gsLst>
+          <a:lin ang="5400000" scaled="0"/>
+        </a:gradFill>
+      </a:bgFillStyleLst>
+    </a:fmtScheme>
+  </a:themeElements>
+  <a:objectDefaults>
+    <a:lnDef>
+      <a:spPr/>
+      <a:bodyPr/>
+      <a:lstStyle/>
+      <a:style>
+        <a:lnRef idx="2">
+          <a:schemeClr val="accent1"/>
+        </a:lnRef>
+        <a:fillRef idx="0">
+          <a:schemeClr val="accent1"/>
+        </a:fillRef>
+        <a:effectRef idx="1">
+          <a:schemeClr val="accent1"/>
+        </a:effectRef>
+        <a:fontRef idx="minor">
+          <a:schemeClr val="tx1"/>
+        </a:fontRef>
+      </a:style>
+    </a:lnDef>
+  </a:objectDefaults>
+  <a:extraClrSchemeLst/>
+  <a:extLst>
+    <a:ext uri="{05A4C25C-085E-4340-85A3-A5531E510DB2}">
+      <thm15:themeFamily xmlns:thm15="http://schemas.microsoft.com/office/thememl/2012/main" name="Office Theme" id="{2E142A2C-CD16-42D6-873A-C26D2A0506FA}" vid="{1BDDFF52-6CD6-40A5-AB3C-68EB2F1E4D0A}"/>
+    </a:ext>
+  </a:extLst>
+</a:theme>
 </file>